--- a/docs/Credara_Investor_Deck.pptx
+++ b/docs/Credara_Investor_Deck.pptx
@@ -3272,7 +3272,7 @@
               </a:defRPr>
             </a:pPr>
             <a:r>
-              <a:t>Othniel Obasi · NOVTIA Ltd · credara-jet.vercel.app</a:t>
+              <a:t>Othniel Obasi &amp; Martins Nwanu · NOVTIA Ltd · credara-jet.vercel.app</a:t>
             </a:r>
           </a:p>
         </p:txBody>
@@ -4288,7 +4288,7 @@
               </a:defRPr>
             </a:pPr>
             <a:r>
-              <a:t>Operator-founder with regulated-scale delivery track record</a:t>
+              <a:t>Founder + banking engineering leadership — regulated delivery at scale</a:t>
             </a:r>
           </a:p>
         </p:txBody>
@@ -4457,8 +4457,43 @@
         </p:nvSpPr>
         <p:spPr>
           <a:xfrm>
-            <a:off x="822960" y="2011680"/>
-            <a:ext cx="10515600" cy="3474720"/>
+            <a:off x="822960" y="1874519"/>
+            <a:ext cx="5120640" cy="365760"/>
+          </a:xfrm>
+          <a:prstGeom prst="rect">
+            <a:avLst/>
+          </a:prstGeom>
+          <a:noFill/>
+        </p:spPr>
+        <p:txBody>
+          <a:bodyPr wrap="square">
+            <a:spAutoFit/>
+          </a:bodyPr>
+          <a:lstStyle/>
+          <a:p>
+            <a:pPr algn="l">
+              <a:defRPr sz="1400" b="1">
+                <a:solidFill>
+                  <a:srgbClr val="2563EB"/>
+                </a:solidFill>
+              </a:defRPr>
+            </a:pPr>
+            <a:r>
+              <a:t>Othniel Obasi — Founder, NOVTIA Ltd (London)</a:t>
+            </a:r>
+          </a:p>
+        </p:txBody>
+      </p:sp>
+      <p:sp>
+        <p:nvSpPr>
+          <p:cNvPr id="9" name="TextBox 8"/>
+          <p:cNvSpPr txBox="1"/>
+          <p:nvPr/>
+        </p:nvSpPr>
+        <p:spPr>
+          <a:xfrm>
+            <a:off x="822960" y="2240280"/>
+            <a:ext cx="5120640" cy="3200400"/>
           </a:xfrm>
           <a:prstGeom prst="rect">
             <a:avLst/>
@@ -4473,83 +4508,229 @@
           <a:p>
             <a:pPr>
               <a:spcAft>
-                <a:spcPts val="684"/>
+                <a:spcPts val="603"/>
               </a:spcAft>
-              <a:defRPr sz="1700">
+              <a:defRPr sz="1500">
                 <a:solidFill>
                   <a:srgbClr val="111827"/>
                 </a:solidFill>
               </a:defRPr>
             </a:pPr>
             <a:r>
-              <a:t>Othniel Obasi — Founder, NOVTIA Ltd (London)</a:t>
+              <a:t>Creditville MFBank 40K → 100K+ users</a:t>
             </a:r>
           </a:p>
           <a:p>
             <a:pPr>
               <a:spcAft>
-                <a:spcPts val="684"/>
+                <a:spcPts val="603"/>
               </a:spcAft>
-              <a:defRPr sz="1700">
+              <a:defRPr sz="1500">
                 <a:solidFill>
                   <a:srgbClr val="111827"/>
                 </a:solidFill>
               </a:defRPr>
             </a:pPr>
             <a:r>
-              <a:t>Digital banking: Creditville MFBank 40K → 100K+ users</a:t>
+              <a:t>PHED utilities — 5M+ customers, $96M+ revenue growth</a:t>
             </a:r>
           </a:p>
           <a:p>
             <a:pPr>
               <a:spcAft>
-                <a:spcPts val="684"/>
+                <a:spcPts val="603"/>
               </a:spcAft>
-              <a:defRPr sz="1700">
+              <a:defRPr sz="1500">
                 <a:solidFill>
                   <a:srgbClr val="111827"/>
                 </a:solidFill>
               </a:defRPr>
             </a:pPr>
             <a:r>
-              <a:t>Utilities: PHED transformation — 5M+ customers, $96M+ revenue growth</a:t>
+              <a:t>AIRG + SURGE v2 → Credara evidence model</a:t>
             </a:r>
           </a:p>
           <a:p>
             <a:pPr>
               <a:spcAft>
-                <a:spcPts val="684"/>
+                <a:spcPts val="603"/>
               </a:spcAft>
-              <a:defRPr sz="1700">
+              <a:defRPr sz="1500">
                 <a:solidFill>
                   <a:srgbClr val="111827"/>
                 </a:solidFill>
               </a:defRPr>
             </a:pPr>
             <a:r>
-              <a:t>AI governance: AIRG + SURGE v2 cryptographic receipt chain → Credara evidence model</a:t>
-            </a:r>
-          </a:p>
+              <a:t>Portfolio: NorthBridge, Kairos, ProofSource, Autonix</a:t>
+            </a:r>
+          </a:p>
+        </p:txBody>
+      </p:sp>
+      <p:sp>
+        <p:nvSpPr>
+          <p:cNvPr id="10" name="TextBox 9"/>
+          <p:cNvSpPr txBox="1"/>
+          <p:nvPr/>
+        </p:nvSpPr>
+        <p:spPr>
+          <a:xfrm>
+            <a:off x="6309360" y="1874519"/>
+            <a:ext cx="5120640" cy="365760"/>
+          </a:xfrm>
+          <a:prstGeom prst="rect">
+            <a:avLst/>
+          </a:prstGeom>
+          <a:noFill/>
+        </p:spPr>
+        <p:txBody>
+          <a:bodyPr wrap="square">
+            <a:spAutoFit/>
+          </a:bodyPr>
+          <a:lstStyle/>
+          <a:p>
+            <a:pPr algn="l">
+              <a:defRPr sz="1400" b="1">
+                <a:solidFill>
+                  <a:srgbClr val="2563EB"/>
+                </a:solidFill>
+              </a:defRPr>
+            </a:pPr>
+            <a:r>
+              <a:t>Martins Nwanu — Head of IT, Creditville Group</a:t>
+            </a:r>
+          </a:p>
+        </p:txBody>
+      </p:sp>
+      <p:sp>
+        <p:nvSpPr>
+          <p:cNvPr id="11" name="TextBox 10"/>
+          <p:cNvSpPr txBox="1"/>
+          <p:nvPr/>
+        </p:nvSpPr>
+        <p:spPr>
+          <a:xfrm>
+            <a:off x="6309360" y="2240280"/>
+            <a:ext cx="5120640" cy="3200400"/>
+          </a:xfrm>
+          <a:prstGeom prst="rect">
+            <a:avLst/>
+          </a:prstGeom>
+          <a:noFill/>
+        </p:spPr>
+        <p:txBody>
+          <a:bodyPr wrap="square">
+            <a:spAutoFit/>
+          </a:bodyPr>
+          <a:lstStyle/>
           <a:p>
             <a:pPr>
               <a:spcAft>
-                <a:spcPts val="684"/>
+                <a:spcPts val="603"/>
               </a:spcAft>
-              <a:defRPr sz="1700">
+              <a:defRPr sz="1500">
                 <a:solidFill>
                   <a:srgbClr val="111827"/>
                 </a:solidFill>
               </a:defRPr>
             </a:pPr>
             <a:r>
-              <a:t>Portfolio of shipped full-stack systems: NorthBridge, Kairos, ProofSource, Autonix</a:t>
-            </a:r>
-          </a:p>
-        </p:txBody>
-      </p:sp>
-      <p:sp>
-        <p:nvSpPr>
-          <p:cNvPr id="9" name="TextBox 8"/>
+              <a:t>11-engineer leadership; core banking platform delivery</a:t>
+            </a:r>
+          </a:p>
+          <a:p>
+            <a:pPr>
+              <a:spcAft>
+                <a:spcPts val="603"/>
+              </a:spcAft>
+              <a:defRPr sz="1500">
+                <a:solidFill>
+                  <a:srgbClr val="111827"/>
+                </a:solidFill>
+              </a:defRPr>
+            </a:pPr>
+            <a:r>
+              <a:t>C Money 30K → 100K+ users; in-house mobile rebuild</a:t>
+            </a:r>
+          </a:p>
+          <a:p>
+            <a:pPr>
+              <a:spcAft>
+                <a:spcPts val="603"/>
+              </a:spcAft>
+              <a:defRPr sz="1500">
+                <a:solidFill>
+                  <a:srgbClr val="111827"/>
+                </a:solidFill>
+              </a:defRPr>
+            </a:pPr>
+            <a:r>
+              <a:t>Loan ops scaled to ₦800M–₦1B/month disbursements</a:t>
+            </a:r>
+          </a:p>
+          <a:p>
+            <a:pPr>
+              <a:spcAft>
+                <a:spcPts val="603"/>
+              </a:spcAft>
+              <a:defRPr sz="1500">
+                <a:solidFill>
+                  <a:srgbClr val="111827"/>
+                </a:solidFill>
+              </a:defRPr>
+            </a:pPr>
+            <a:r>
+              <a:t>Credara: production API, workspace UX, deploy discipline</a:t>
+            </a:r>
+          </a:p>
+        </p:txBody>
+      </p:sp>
+      <p:sp>
+        <p:nvSpPr>
+          <p:cNvPr id="12" name="Rectangle 11"/>
+          <p:cNvSpPr/>
+          <p:nvPr/>
+        </p:nvSpPr>
+        <p:spPr>
+          <a:xfrm>
+            <a:off x="6080760" y="1783080"/>
+            <a:ext cx="45720" cy="3840480"/>
+          </a:xfrm>
+          <a:prstGeom prst="rect">
+            <a:avLst/>
+          </a:prstGeom>
+          <a:solidFill>
+            <a:srgbClr val="E7EAF1"/>
+          </a:solidFill>
+          <a:ln>
+            <a:noFill/>
+          </a:ln>
+        </p:spPr>
+        <p:style>
+          <a:lnRef idx="1">
+            <a:schemeClr val="accent1"/>
+          </a:lnRef>
+          <a:fillRef idx="3">
+            <a:schemeClr val="accent1"/>
+          </a:fillRef>
+          <a:effectRef idx="2">
+            <a:schemeClr val="accent1"/>
+          </a:effectRef>
+          <a:fontRef idx="minor">
+            <a:schemeClr val="lt1"/>
+          </a:fontRef>
+        </p:style>
+        <p:txBody>
+          <a:bodyPr rtlCol="0" anchor="ctr"/>
+          <a:lstStyle/>
+          <a:p>
+            <a:pPr algn="ctr"/>
+          </a:p>
+        </p:txBody>
+      </p:sp>
+      <p:sp>
+        <p:nvSpPr>
+          <p:cNvPr id="13" name="TextBox 12"/>
           <p:cNvSpPr txBox="1"/>
           <p:nvPr/>
         </p:nvSpPr>

--- a/docs/Credara_Investor_Deck.pptx
+++ b/docs/Credara_Investor_Deck.pptx
@@ -19,6 +19,8 @@
     <p:sldId id="267" r:id="rId18"/>
     <p:sldId id="268" r:id="rId19"/>
     <p:sldId id="269" r:id="rId20"/>
+    <p:sldId id="270" r:id="rId21"/>
+    <p:sldId id="271" r:id="rId22"/>
   </p:sldIdLst>
   <p:sldSz cx="12191695" cy="6858000" type="screen4x3"/>
   <p:notesSz cx="6858000" cy="9144000"/>
@@ -3446,7 +3448,7 @@
               </a:defRPr>
             </a:pPr>
             <a:r>
-              <a:t>GO-TO-MARKET</a:t>
+              <a:t>BUSINESS MODEL</a:t>
             </a:r>
           </a:p>
         </p:txBody>
@@ -3481,7 +3483,7 @@
               </a:defRPr>
             </a:pPr>
             <a:r>
-              <a:t>One corridor, prove it, then replicate</a:t>
+              <a:t>Who pays: financiers and platform users — API expands TAM</a:t>
             </a:r>
           </a:p>
         </p:txBody>
@@ -3651,105 +3653,287 @@
         <p:spPr>
           <a:xfrm>
             <a:off x="822960" y="2011680"/>
-            <a:ext cx="5303520" cy="3840480"/>
-          </a:xfrm>
-          <a:prstGeom prst="rect">
-            <a:avLst/>
-          </a:prstGeom>
-          <a:noFill/>
-        </p:spPr>
-        <p:txBody>
-          <a:bodyPr wrap="square">
-            <a:spAutoFit/>
-          </a:bodyPr>
-          <a:lstStyle/>
-          <a:p>
-            <a:pPr>
-              <a:spcAft>
-                <a:spcPts val="644"/>
-              </a:spcAft>
-              <a:defRPr sz="1600">
+            <a:ext cx="3108960" cy="365760"/>
+          </a:xfrm>
+          <a:prstGeom prst="rect">
+            <a:avLst/>
+          </a:prstGeom>
+          <a:noFill/>
+        </p:spPr>
+        <p:txBody>
+          <a:bodyPr wrap="square">
+            <a:spAutoFit/>
+          </a:bodyPr>
+          <a:lstStyle/>
+          <a:p>
+            <a:pPr algn="l">
+              <a:defRPr sz="1600" b="1">
+                <a:solidFill>
+                  <a:srgbClr val="2563EB"/>
+                </a:solidFill>
+              </a:defRPr>
+            </a:pPr>
+            <a:r>
+              <a:t>Financing origination</a:t>
+            </a:r>
+          </a:p>
+        </p:txBody>
+      </p:sp>
+      <p:sp>
+        <p:nvSpPr>
+          <p:cNvPr id="9" name="TextBox 8"/>
+          <p:cNvSpPr txBox="1"/>
+          <p:nvPr/>
+        </p:nvSpPr>
+        <p:spPr>
+          <a:xfrm>
+            <a:off x="4023360" y="2011680"/>
+            <a:ext cx="7406640" cy="457200"/>
+          </a:xfrm>
+          <a:prstGeom prst="rect">
+            <a:avLst/>
+          </a:prstGeom>
+          <a:noFill/>
+        </p:spPr>
+        <p:txBody>
+          <a:bodyPr wrap="square">
+            <a:spAutoFit/>
+          </a:bodyPr>
+          <a:lstStyle/>
+          <a:p>
+            <a:pPr algn="l">
+              <a:defRPr sz="1600" b="0">
                 <a:solidFill>
                   <a:srgbClr val="111827"/>
                 </a:solidFill>
               </a:defRPr>
             </a:pPr>
             <a:r>
-              <a:t>Wedge: UAE SME trade-finance slice — Jebel Ali suppliers</a:t>
-            </a:r>
-          </a:p>
-          <a:p>
-            <a:pPr>
-              <a:spcAft>
-                <a:spcPts val="644"/>
-              </a:spcAft>
-              <a:defRPr sz="1600">
+              <a:t>Fee when receivable is funded via Smart LC marketplace</a:t>
+            </a:r>
+          </a:p>
+        </p:txBody>
+      </p:sp>
+      <p:sp>
+        <p:nvSpPr>
+          <p:cNvPr id="10" name="TextBox 9"/>
+          <p:cNvSpPr txBox="1"/>
+          <p:nvPr/>
+        </p:nvSpPr>
+        <p:spPr>
+          <a:xfrm>
+            <a:off x="822960" y="2761488"/>
+            <a:ext cx="3108960" cy="365760"/>
+          </a:xfrm>
+          <a:prstGeom prst="rect">
+            <a:avLst/>
+          </a:prstGeom>
+          <a:noFill/>
+        </p:spPr>
+        <p:txBody>
+          <a:bodyPr wrap="square">
+            <a:spAutoFit/>
+          </a:bodyPr>
+          <a:lstStyle/>
+          <a:p>
+            <a:pPr algn="l">
+              <a:defRPr sz="1600" b="1">
+                <a:solidFill>
+                  <a:srgbClr val="2563EB"/>
+                </a:solidFill>
+              </a:defRPr>
+            </a:pPr>
+            <a:r>
+              <a:t>Platform / SaaS</a:t>
+            </a:r>
+          </a:p>
+        </p:txBody>
+      </p:sp>
+      <p:sp>
+        <p:nvSpPr>
+          <p:cNvPr id="11" name="TextBox 10"/>
+          <p:cNvSpPr txBox="1"/>
+          <p:nvPr/>
+        </p:nvSpPr>
+        <p:spPr>
+          <a:xfrm>
+            <a:off x="4023360" y="2761488"/>
+            <a:ext cx="7406640" cy="457200"/>
+          </a:xfrm>
+          <a:prstGeom prst="rect">
+            <a:avLst/>
+          </a:prstGeom>
+          <a:noFill/>
+        </p:spPr>
+        <p:txBody>
+          <a:bodyPr wrap="square">
+            <a:spAutoFit/>
+          </a:bodyPr>
+          <a:lstStyle/>
+          <a:p>
+            <a:pPr algn="l">
+              <a:defRPr sz="1600" b="0">
                 <a:solidFill>
                   <a:srgbClr val="111827"/>
                 </a:solidFill>
               </a:defRPr>
             </a:pPr>
             <a:r>
-              <a:t>Beachhead: 1–2 non-bank financiers + SME cohort</a:t>
-            </a:r>
-          </a:p>
-          <a:p>
-            <a:pPr>
-              <a:spcAft>
-                <a:spcPts val="644"/>
-              </a:spcAft>
-              <a:defRPr sz="1600">
+              <a:t>Verification, deal room, reporting — tiered by volume</a:t>
+            </a:r>
+          </a:p>
+        </p:txBody>
+      </p:sp>
+      <p:sp>
+        <p:nvSpPr>
+          <p:cNvPr id="12" name="TextBox 11"/>
+          <p:cNvSpPr txBox="1"/>
+          <p:nvPr/>
+        </p:nvSpPr>
+        <p:spPr>
+          <a:xfrm>
+            <a:off x="822960" y="3511296"/>
+            <a:ext cx="3108960" cy="365760"/>
+          </a:xfrm>
+          <a:prstGeom prst="rect">
+            <a:avLst/>
+          </a:prstGeom>
+          <a:noFill/>
+        </p:spPr>
+        <p:txBody>
+          <a:bodyPr wrap="square">
+            <a:spAutoFit/>
+          </a:bodyPr>
+          <a:lstStyle/>
+          <a:p>
+            <a:pPr algn="l">
+              <a:defRPr sz="1600" b="1">
+                <a:solidFill>
+                  <a:srgbClr val="2563EB"/>
+                </a:solidFill>
+              </a:defRPr>
+            </a:pPr>
+            <a:r>
+              <a:t>Settlement / escrow</a:t>
+            </a:r>
+          </a:p>
+        </p:txBody>
+      </p:sp>
+      <p:sp>
+        <p:nvSpPr>
+          <p:cNvPr id="13" name="TextBox 12"/>
+          <p:cNvSpPr txBox="1"/>
+          <p:nvPr/>
+        </p:nvSpPr>
+        <p:spPr>
+          <a:xfrm>
+            <a:off x="4023360" y="3511296"/>
+            <a:ext cx="7406640" cy="457200"/>
+          </a:xfrm>
+          <a:prstGeom prst="rect">
+            <a:avLst/>
+          </a:prstGeom>
+          <a:noFill/>
+        </p:spPr>
+        <p:txBody>
+          <a:bodyPr wrap="square">
+            <a:spAutoFit/>
+          </a:bodyPr>
+          <a:lstStyle/>
+          <a:p>
+            <a:pPr algn="l">
+              <a:defRPr sz="1600" b="0">
                 <a:solidFill>
                   <a:srgbClr val="111827"/>
                 </a:solidFill>
               </a:defRPr>
             </a:pPr>
             <a:r>
-              <a:t>DIFC / challenge ecosystem for intros and pilot design</a:t>
-            </a:r>
-          </a:p>
-          <a:p>
-            <a:pPr>
-              <a:spcAft>
-                <a:spcPts val="644"/>
-              </a:spcAft>
-              <a:defRPr sz="1600">
+              <a:t>Basis points per fund/release vs. multi-day bank LC cost</a:t>
+            </a:r>
+          </a:p>
+        </p:txBody>
+      </p:sp>
+      <p:sp>
+        <p:nvSpPr>
+          <p:cNvPr id="14" name="TextBox 13"/>
+          <p:cNvSpPr txBox="1"/>
+          <p:nvPr/>
+        </p:nvSpPr>
+        <p:spPr>
+          <a:xfrm>
+            <a:off x="822960" y="4261104"/>
+            <a:ext cx="3108960" cy="365760"/>
+          </a:xfrm>
+          <a:prstGeom prst="rect">
+            <a:avLst/>
+          </a:prstGeom>
+          <a:noFill/>
+        </p:spPr>
+        <p:txBody>
+          <a:bodyPr wrap="square">
+            <a:spAutoFit/>
+          </a:bodyPr>
+          <a:lstStyle/>
+          <a:p>
+            <a:pPr algn="l">
+              <a:defRPr sz="1600" b="1">
+                <a:solidFill>
+                  <a:srgbClr val="2563EB"/>
+                </a:solidFill>
+              </a:defRPr>
+            </a:pPr>
+            <a:r>
+              <a:t>Credit scoring API</a:t>
+            </a:r>
+          </a:p>
+        </p:txBody>
+      </p:sp>
+      <p:sp>
+        <p:nvSpPr>
+          <p:cNvPr id="15" name="TextBox 14"/>
+          <p:cNvSpPr txBox="1"/>
+          <p:nvPr/>
+        </p:nvSpPr>
+        <p:spPr>
+          <a:xfrm>
+            <a:off x="4023360" y="4261104"/>
+            <a:ext cx="7406640" cy="457200"/>
+          </a:xfrm>
+          <a:prstGeom prst="rect">
+            <a:avLst/>
+          </a:prstGeom>
+          <a:noFill/>
+        </p:spPr>
+        <p:txBody>
+          <a:bodyPr wrap="square">
+            <a:spAutoFit/>
+          </a:bodyPr>
+          <a:lstStyle/>
+          <a:p>
+            <a:pPr algn="l">
+              <a:defRPr sz="1600" b="0">
                 <a:solidFill>
                   <a:srgbClr val="111827"/>
                 </a:solidFill>
               </a:defRPr>
             </a:pPr>
             <a:r>
-              <a:t>KPI: 7–10 day LC → same-day proof-to-funding</a:t>
-            </a:r>
-          </a:p>
-          <a:p>
-            <a:pPr>
-              <a:spcAft>
-                <a:spcPts val="644"/>
-              </a:spcAft>
-              <a:defRPr sz="1600">
-                <a:solidFill>
-                  <a:srgbClr val="111827"/>
-                </a:solidFill>
-              </a:defRPr>
-            </a:pPr>
-            <a:r>
-              <a:t>Expand: new corridors = issuer + IERC20 config, not rebuild</a:t>
-            </a:r>
-          </a:p>
-        </p:txBody>
-      </p:sp>
-      <p:sp>
-        <p:nvSpPr>
-          <p:cNvPr id="9" name="TextBox 8"/>
-          <p:cNvSpPr txBox="1"/>
-          <p:nvPr/>
-        </p:nvSpPr>
-        <p:spPr>
-          <a:xfrm>
-            <a:off x="6583680" y="1828800"/>
-            <a:ext cx="5029200" cy="457200"/>
+              <a:t>On-chain attestations for external lenders without full UI</a:t>
+            </a:r>
+          </a:p>
+        </p:txBody>
+      </p:sp>
+      <p:sp>
+        <p:nvSpPr>
+          <p:cNvPr id="16" name="TextBox 15"/>
+          <p:cNvSpPr txBox="1"/>
+          <p:nvPr/>
+        </p:nvSpPr>
+        <p:spPr>
+          <a:xfrm>
+            <a:off x="822960" y="5257800"/>
+            <a:ext cx="10515600" cy="502920"/>
           </a:xfrm>
           <a:prstGeom prst="rect">
             <a:avLst/>
@@ -3763,97 +3947,14 @@
           <a:lstStyle/>
           <a:p>
             <a:pPr algn="l">
-              <a:defRPr sz="1400" b="1">
-                <a:solidFill>
-                  <a:srgbClr val="2563EB"/>
-                </a:solidFill>
-              </a:defRPr>
-            </a:pPr>
-            <a:r>
-              <a:t>Roadmap</a:t>
-            </a:r>
-          </a:p>
-        </p:txBody>
-      </p:sp>
-      <p:sp>
-        <p:nvSpPr>
-          <p:cNvPr id="10" name="TextBox 9"/>
-          <p:cNvSpPr txBox="1"/>
-          <p:nvPr/>
-        </p:nvSpPr>
-        <p:spPr>
-          <a:xfrm>
-            <a:off x="6583680" y="2286000"/>
-            <a:ext cx="5029200" cy="3474720"/>
-          </a:xfrm>
-          <a:prstGeom prst="rect">
-            <a:avLst/>
-          </a:prstGeom>
-          <a:noFill/>
-        </p:spPr>
-        <p:txBody>
-          <a:bodyPr wrap="square">
-            <a:spAutoFit/>
-          </a:bodyPr>
-          <a:lstStyle/>
-          <a:p>
-            <a:pPr>
-              <a:spcAft>
-                <a:spcPts val="603"/>
-              </a:spcAft>
-              <a:defRPr sz="1500">
-                <a:solidFill>
-                  <a:srgbClr val="667085"/>
-                </a:solidFill>
-              </a:defRPr>
-            </a:pPr>
-            <a:r>
-              <a:t>Now: Amoy demo + Judge Mode (shipped)</a:t>
-            </a:r>
-          </a:p>
-          <a:p>
-            <a:pPr>
-              <a:spcAft>
-                <a:spcPts val="603"/>
-              </a:spcAft>
-              <a:defRPr sz="1500">
-                <a:solidFill>
-                  <a:srgbClr val="667085"/>
-                </a:solidFill>
-              </a:defRPr>
-            </a:pPr>
-            <a:r>
-              <a:t>Q1–Q2: Financier pilot LOIs + prod KYB</a:t>
-            </a:r>
-          </a:p>
-          <a:p>
-            <a:pPr>
-              <a:spcAft>
-                <a:spcPts val="603"/>
-              </a:spcAft>
-              <a:defRPr sz="1500">
-                <a:solidFill>
-                  <a:srgbClr val="667085"/>
-                </a:solidFill>
-              </a:defRPr>
-            </a:pPr>
-            <a:r>
-              <a:t>Phase 2: Licensed AED stablecoin partner</a:t>
-            </a:r>
-          </a:p>
-          <a:p>
-            <a:pPr>
-              <a:spcAft>
-                <a:spcPts val="603"/>
-              </a:spcAft>
-              <a:defRPr sz="1500">
-                <a:solidFill>
-                  <a:srgbClr val="667085"/>
-                </a:solidFill>
-              </a:defRPr>
-            </a:pPr>
-            <a:r>
-              <a:t>Phase 3: Polygon mainnet + partner APIs</a:t>
+              <a:defRPr sz="1500" b="1">
+                <a:solidFill>
+                  <a:srgbClr val="16A34A"/>
+                </a:solidFill>
+              </a:defRPr>
+            </a:pPr>
+            <a:r>
+              <a:t>Land financiers first — verified receivables pull SME supply onto the rail.</a:t>
             </a:r>
           </a:p>
         </p:txBody>
@@ -3872,7 +3973,7 @@
     <p:bg>
       <p:bgPr>
         <a:solidFill>
-          <a:srgbClr val="F8FAFC"/>
+          <a:srgbClr val="FFFFFF"/>
         </a:solidFill>
         <a:effectLst/>
       </p:bgPr>
@@ -3892,8 +3993,8 @@
         </p:nvSpPr>
         <p:spPr>
           <a:xfrm>
-            <a:off x="822960" y="548640"/>
-            <a:ext cx="10058400" cy="365760"/>
+            <a:off x="640080" y="411480"/>
+            <a:ext cx="10515600" cy="457200"/>
           </a:xfrm>
           <a:prstGeom prst="rect">
             <a:avLst/>
@@ -3914,7 +4015,7 @@
               </a:defRPr>
             </a:pPr>
             <a:r>
-              <a:t>SETTLEMENT ROADMAP</a:t>
+              <a:t>UNIT ECONOMICS &amp; ASK</a:t>
             </a:r>
           </a:p>
         </p:txBody>
@@ -3927,8 +4028,8 @@
         </p:nvSpPr>
         <p:spPr>
           <a:xfrm>
-            <a:off x="822960" y="1005840"/>
-            <a:ext cx="10058400" cy="1097280"/>
+            <a:off x="640080" y="777240"/>
+            <a:ext cx="10515600" cy="1097280"/>
           </a:xfrm>
           <a:prstGeom prst="rect">
             <a:avLst/>
@@ -3942,114 +4043,27 @@
           <a:lstStyle/>
           <a:p>
             <a:pPr algn="l">
-              <a:defRPr sz="2800" b="1">
+              <a:defRPr sz="3200" b="1">
                 <a:solidFill>
                   <a:srgbClr val="111827"/>
                 </a:solidFill>
               </a:defRPr>
             </a:pPr>
             <a:r>
-              <a:t>Today: MockUSDC on Amoy proves the escrow path.</a:t>
-            </a:r>
-            <a:br/>
-            <a:r>
-              <a:t>Tomorrow: regulated AED stablecoin on the same Smart LC rails.</a:t>
-            </a:r>
-          </a:p>
-        </p:txBody>
-      </p:sp>
-      <p:sp>
-        <p:nvSpPr>
-          <p:cNvPr id="4" name="TextBox 3"/>
-          <p:cNvSpPr txBox="1"/>
-          <p:nvPr/>
-        </p:nvSpPr>
-        <p:spPr>
-          <a:xfrm>
-            <a:off x="822960" y="2423160"/>
-            <a:ext cx="10058400" cy="3474720"/>
-          </a:xfrm>
-          <a:prstGeom prst="rect">
-            <a:avLst/>
-          </a:prstGeom>
-          <a:noFill/>
-        </p:spPr>
-        <p:txBody>
-          <a:bodyPr wrap="square">
-            <a:spAutoFit/>
-          </a:bodyPr>
-          <a:lstStyle/>
-          <a:p>
-            <a:pPr>
-              <a:spcAft>
-                <a:spcPts val="684"/>
-              </a:spcAft>
-              <a:defRPr sz="1700">
-                <a:solidFill>
-                  <a:srgbClr val="111827"/>
-                </a:solidFill>
-              </a:defRPr>
-            </a:pPr>
-            <a:r>
-              <a:t>Smart LC is token-agnostic — production is an issuer swap, not a rebuild</a:t>
-            </a:r>
-          </a:p>
-          <a:p>
-            <a:pPr>
-              <a:spcAft>
-                <a:spcPts val="684"/>
-              </a:spcAft>
-              <a:defRPr sz="1700">
-                <a:solidFill>
-                  <a:srgbClr val="111827"/>
-                </a:solidFill>
-              </a:defRPr>
-            </a:pPr>
-            <a:r>
-              <a:t>CBUAE PTSR-compliant AED from licensed partner when ready</a:t>
-            </a:r>
-          </a:p>
-          <a:p>
-            <a:pPr>
-              <a:spcAft>
-                <a:spcPts val="684"/>
-              </a:spcAft>
-              <a:defRPr sz="1700">
-                <a:solidFill>
-                  <a:srgbClr val="111827"/>
-                </a:solidFill>
-              </a:defRPr>
-            </a:pPr>
-            <a:r>
-              <a:t>B2B settlement along UAE corridors — not consumer remittance or POS</a:t>
-            </a:r>
-          </a:p>
-          <a:p>
-            <a:pPr>
-              <a:spcAft>
-                <a:spcPts val="684"/>
-              </a:spcAft>
-              <a:defRPr sz="1700">
-                <a:solidFill>
-                  <a:srgbClr val="111827"/>
-                </a:solidFill>
-              </a:defRPr>
-            </a:pPr>
-            <a:r>
-              <a:t>Credara is settlement-ready infrastructure; we do not issue AED</a:t>
-            </a:r>
-          </a:p>
-        </p:txBody>
-      </p:sp>
-      <p:sp>
-        <p:nvSpPr>
-          <p:cNvPr id="5" name="Rectangle 4"/>
+              <a:t>Illustrative pilot model — tighten with live pilot quotes</a:t>
+            </a:r>
+          </a:p>
+        </p:txBody>
+      </p:sp>
+      <p:sp>
+        <p:nvSpPr>
+          <p:cNvPr id="4" name="Rectangle 3"/>
           <p:cNvSpPr/>
           <p:nvPr/>
         </p:nvSpPr>
         <p:spPr>
           <a:xfrm>
-            <a:off x="640080" y="2286000"/>
+            <a:off x="640080" y="1600200"/>
             <a:ext cx="1097280" cy="54864"/>
           </a:xfrm>
           <a:prstGeom prst="rect">
@@ -4086,7 +4100,7 @@
       </p:sp>
       <p:sp>
         <p:nvSpPr>
-          <p:cNvPr id="6" name="Rectangle 5"/>
+          <p:cNvPr id="5" name="Rectangle 4"/>
           <p:cNvSpPr/>
           <p:nvPr/>
         </p:nvSpPr>
@@ -4129,7 +4143,7 @@
       </p:sp>
       <p:sp>
         <p:nvSpPr>
-          <p:cNvPr id="7" name="TextBox 6"/>
+          <p:cNvPr id="6" name="TextBox 5"/>
           <p:cNvSpPr txBox="1"/>
           <p:nvPr/>
         </p:nvSpPr>
@@ -4164,7 +4178,7 @@
       </p:sp>
       <p:sp>
         <p:nvSpPr>
-          <p:cNvPr id="8" name="TextBox 7"/>
+          <p:cNvPr id="7" name="TextBox 6"/>
           <p:cNvSpPr txBox="1"/>
           <p:nvPr/>
         </p:nvSpPr>
@@ -4193,6 +4207,745 @@
             </a:pPr>
             <a:r>
               <a:t>credara-jet.vercel.app</a:t>
+            </a:r>
+          </a:p>
+        </p:txBody>
+      </p:sp>
+      <p:sp>
+        <p:nvSpPr>
+          <p:cNvPr id="8" name="Rounded Rectangle 7"/>
+          <p:cNvSpPr/>
+          <p:nvPr/>
+        </p:nvSpPr>
+        <p:spPr>
+          <a:xfrm>
+            <a:off x="822960" y="1920240"/>
+            <a:ext cx="2286000" cy="1005840"/>
+          </a:xfrm>
+          <a:prstGeom prst="roundRect">
+            <a:avLst/>
+          </a:prstGeom>
+          <a:solidFill>
+            <a:srgbClr val="F8FAFC"/>
+          </a:solidFill>
+          <a:ln>
+            <a:solidFill>
+              <a:srgbClr val="E2E8F0"/>
+            </a:solidFill>
+          </a:ln>
+        </p:spPr>
+        <p:style>
+          <a:lnRef idx="1">
+            <a:schemeClr val="accent1"/>
+          </a:lnRef>
+          <a:fillRef idx="3">
+            <a:schemeClr val="accent1"/>
+          </a:fillRef>
+          <a:effectRef idx="2">
+            <a:schemeClr val="accent1"/>
+          </a:effectRef>
+          <a:fontRef idx="minor">
+            <a:schemeClr val="lt1"/>
+          </a:fontRef>
+        </p:style>
+        <p:txBody>
+          <a:bodyPr rtlCol="0" anchor="ctr"/>
+          <a:lstStyle/>
+          <a:p>
+            <a:pPr algn="ctr"/>
+          </a:p>
+        </p:txBody>
+      </p:sp>
+      <p:sp>
+        <p:nvSpPr>
+          <p:cNvPr id="9" name="TextBox 8"/>
+          <p:cNvSpPr txBox="1"/>
+          <p:nvPr/>
+        </p:nvSpPr>
+        <p:spPr>
+          <a:xfrm>
+            <a:off x="960120" y="2029968"/>
+            <a:ext cx="2011680" cy="502920"/>
+          </a:xfrm>
+          <a:prstGeom prst="rect">
+            <a:avLst/>
+          </a:prstGeom>
+          <a:noFill/>
+        </p:spPr>
+        <p:txBody>
+          <a:bodyPr wrap="square">
+            <a:spAutoFit/>
+          </a:bodyPr>
+          <a:lstStyle/>
+          <a:p>
+            <a:pPr algn="l">
+              <a:defRPr sz="2200" b="1">
+                <a:solidFill>
+                  <a:srgbClr val="2563EB"/>
+                </a:solidFill>
+              </a:defRPr>
+            </a:pPr>
+            <a:r>
+              <a:t>0.5%</a:t>
+            </a:r>
+          </a:p>
+        </p:txBody>
+      </p:sp>
+      <p:sp>
+        <p:nvSpPr>
+          <p:cNvPr id="10" name="TextBox 9"/>
+          <p:cNvSpPr txBox="1"/>
+          <p:nvPr/>
+        </p:nvSpPr>
+        <p:spPr>
+          <a:xfrm>
+            <a:off x="960120" y="2487168"/>
+            <a:ext cx="2011680" cy="411480"/>
+          </a:xfrm>
+          <a:prstGeom prst="rect">
+            <a:avLst/>
+          </a:prstGeom>
+          <a:noFill/>
+        </p:spPr>
+        <p:txBody>
+          <a:bodyPr wrap="square">
+            <a:spAutoFit/>
+          </a:bodyPr>
+          <a:lstStyle/>
+          <a:p>
+            <a:pPr algn="l">
+              <a:defRPr sz="1100" b="0">
+                <a:solidFill>
+                  <a:srgbClr val="667085"/>
+                </a:solidFill>
+              </a:defRPr>
+            </a:pPr>
+            <a:r>
+              <a:t>Platform fee (indicative)</a:t>
+            </a:r>
+          </a:p>
+        </p:txBody>
+      </p:sp>
+      <p:sp>
+        <p:nvSpPr>
+          <p:cNvPr id="11" name="Rounded Rectangle 10"/>
+          <p:cNvSpPr/>
+          <p:nvPr/>
+        </p:nvSpPr>
+        <p:spPr>
+          <a:xfrm>
+            <a:off x="3246120" y="1920240"/>
+            <a:ext cx="2286000" cy="1005840"/>
+          </a:xfrm>
+          <a:prstGeom prst="roundRect">
+            <a:avLst/>
+          </a:prstGeom>
+          <a:solidFill>
+            <a:srgbClr val="F8FAFC"/>
+          </a:solidFill>
+          <a:ln>
+            <a:solidFill>
+              <a:srgbClr val="E2E8F0"/>
+            </a:solidFill>
+          </a:ln>
+        </p:spPr>
+        <p:style>
+          <a:lnRef idx="1">
+            <a:schemeClr val="accent1"/>
+          </a:lnRef>
+          <a:fillRef idx="3">
+            <a:schemeClr val="accent1"/>
+          </a:fillRef>
+          <a:effectRef idx="2">
+            <a:schemeClr val="accent1"/>
+          </a:effectRef>
+          <a:fontRef idx="minor">
+            <a:schemeClr val="lt1"/>
+          </a:fontRef>
+        </p:style>
+        <p:txBody>
+          <a:bodyPr rtlCol="0" anchor="ctr"/>
+          <a:lstStyle/>
+          <a:p>
+            <a:pPr algn="ctr"/>
+          </a:p>
+        </p:txBody>
+      </p:sp>
+      <p:sp>
+        <p:nvSpPr>
+          <p:cNvPr id="12" name="TextBox 11"/>
+          <p:cNvSpPr txBox="1"/>
+          <p:nvPr/>
+        </p:nvSpPr>
+        <p:spPr>
+          <a:xfrm>
+            <a:off x="3383280" y="2029968"/>
+            <a:ext cx="2011680" cy="502920"/>
+          </a:xfrm>
+          <a:prstGeom prst="rect">
+            <a:avLst/>
+          </a:prstGeom>
+          <a:noFill/>
+        </p:spPr>
+        <p:txBody>
+          <a:bodyPr wrap="square">
+            <a:spAutoFit/>
+          </a:bodyPr>
+          <a:lstStyle/>
+          <a:p>
+            <a:pPr algn="l">
+              <a:defRPr sz="2200" b="1">
+                <a:solidFill>
+                  <a:srgbClr val="2563EB"/>
+                </a:solidFill>
+              </a:defRPr>
+            </a:pPr>
+            <a:r>
+              <a:t>80%</a:t>
+            </a:r>
+          </a:p>
+        </p:txBody>
+      </p:sp>
+      <p:sp>
+        <p:nvSpPr>
+          <p:cNvPr id="13" name="TextBox 12"/>
+          <p:cNvSpPr txBox="1"/>
+          <p:nvPr/>
+        </p:nvSpPr>
+        <p:spPr>
+          <a:xfrm>
+            <a:off x="3383280" y="2487168"/>
+            <a:ext cx="2011680" cy="411480"/>
+          </a:xfrm>
+          <a:prstGeom prst="rect">
+            <a:avLst/>
+          </a:prstGeom>
+          <a:noFill/>
+        </p:spPr>
+        <p:txBody>
+          <a:bodyPr wrap="square">
+            <a:spAutoFit/>
+          </a:bodyPr>
+          <a:lstStyle/>
+          <a:p>
+            <a:pPr algn="l">
+              <a:defRPr sz="1100" b="0">
+                <a:solidFill>
+                  <a:srgbClr val="667085"/>
+                </a:solidFill>
+              </a:defRPr>
+            </a:pPr>
+            <a:r>
+              <a:t>Advance rate (indicative)</a:t>
+            </a:r>
+          </a:p>
+        </p:txBody>
+      </p:sp>
+      <p:sp>
+        <p:nvSpPr>
+          <p:cNvPr id="14" name="Rounded Rectangle 13"/>
+          <p:cNvSpPr/>
+          <p:nvPr/>
+        </p:nvSpPr>
+        <p:spPr>
+          <a:xfrm>
+            <a:off x="5669280" y="1920240"/>
+            <a:ext cx="2286000" cy="1005840"/>
+          </a:xfrm>
+          <a:prstGeom prst="roundRect">
+            <a:avLst/>
+          </a:prstGeom>
+          <a:solidFill>
+            <a:srgbClr val="F8FAFC"/>
+          </a:solidFill>
+          <a:ln>
+            <a:solidFill>
+              <a:srgbClr val="E2E8F0"/>
+            </a:solidFill>
+          </a:ln>
+        </p:spPr>
+        <p:style>
+          <a:lnRef idx="1">
+            <a:schemeClr val="accent1"/>
+          </a:lnRef>
+          <a:fillRef idx="3">
+            <a:schemeClr val="accent1"/>
+          </a:fillRef>
+          <a:effectRef idx="2">
+            <a:schemeClr val="accent1"/>
+          </a:effectRef>
+          <a:fontRef idx="minor">
+            <a:schemeClr val="lt1"/>
+          </a:fontRef>
+        </p:style>
+        <p:txBody>
+          <a:bodyPr rtlCol="0" anchor="ctr"/>
+          <a:lstStyle/>
+          <a:p>
+            <a:pPr algn="ctr"/>
+          </a:p>
+        </p:txBody>
+      </p:sp>
+      <p:sp>
+        <p:nvSpPr>
+          <p:cNvPr id="15" name="TextBox 14"/>
+          <p:cNvSpPr txBox="1"/>
+          <p:nvPr/>
+        </p:nvSpPr>
+        <p:spPr>
+          <a:xfrm>
+            <a:off x="5806440" y="2029968"/>
+            <a:ext cx="2011680" cy="502920"/>
+          </a:xfrm>
+          <a:prstGeom prst="rect">
+            <a:avLst/>
+          </a:prstGeom>
+          <a:noFill/>
+        </p:spPr>
+        <p:txBody>
+          <a:bodyPr wrap="square">
+            <a:spAutoFit/>
+          </a:bodyPr>
+          <a:lstStyle/>
+          <a:p>
+            <a:pPr algn="l">
+              <a:defRPr sz="2200" b="1">
+                <a:solidFill>
+                  <a:srgbClr val="2563EB"/>
+                </a:solidFill>
+              </a:defRPr>
+            </a:pPr>
+            <a:r>
+              <a:t>AED 1.25k</a:t>
+            </a:r>
+          </a:p>
+        </p:txBody>
+      </p:sp>
+      <p:sp>
+        <p:nvSpPr>
+          <p:cNvPr id="16" name="TextBox 15"/>
+          <p:cNvSpPr txBox="1"/>
+          <p:nvPr/>
+        </p:nvSpPr>
+        <p:spPr>
+          <a:xfrm>
+            <a:off x="5806440" y="2487168"/>
+            <a:ext cx="2011680" cy="411480"/>
+          </a:xfrm>
+          <a:prstGeom prst="rect">
+            <a:avLst/>
+          </a:prstGeom>
+          <a:noFill/>
+        </p:spPr>
+        <p:txBody>
+          <a:bodyPr wrap="square">
+            <a:spAutoFit/>
+          </a:bodyPr>
+          <a:lstStyle/>
+          <a:p>
+            <a:pPr algn="l">
+              <a:defRPr sz="1100" b="0">
+                <a:solidFill>
+                  <a:srgbClr val="667085"/>
+                </a:solidFill>
+              </a:defRPr>
+            </a:pPr>
+            <a:r>
+              <a:t>Fee on AED 250k invoice</a:t>
+            </a:r>
+          </a:p>
+        </p:txBody>
+      </p:sp>
+      <p:sp>
+        <p:nvSpPr>
+          <p:cNvPr id="17" name="Rounded Rectangle 16"/>
+          <p:cNvSpPr/>
+          <p:nvPr/>
+        </p:nvSpPr>
+        <p:spPr>
+          <a:xfrm>
+            <a:off x="8092440" y="1920240"/>
+            <a:ext cx="2560320" cy="1005840"/>
+          </a:xfrm>
+          <a:prstGeom prst="roundRect">
+            <a:avLst/>
+          </a:prstGeom>
+          <a:solidFill>
+            <a:srgbClr val="F8FAFC"/>
+          </a:solidFill>
+          <a:ln>
+            <a:solidFill>
+              <a:srgbClr val="E2E8F0"/>
+            </a:solidFill>
+          </a:ln>
+        </p:spPr>
+        <p:style>
+          <a:lnRef idx="1">
+            <a:schemeClr val="accent1"/>
+          </a:lnRef>
+          <a:fillRef idx="3">
+            <a:schemeClr val="accent1"/>
+          </a:fillRef>
+          <a:effectRef idx="2">
+            <a:schemeClr val="accent1"/>
+          </a:effectRef>
+          <a:fontRef idx="minor">
+            <a:schemeClr val="lt1"/>
+          </a:fontRef>
+        </p:style>
+        <p:txBody>
+          <a:bodyPr rtlCol="0" anchor="ctr"/>
+          <a:lstStyle/>
+          <a:p>
+            <a:pPr algn="ctr"/>
+          </a:p>
+        </p:txBody>
+      </p:sp>
+      <p:sp>
+        <p:nvSpPr>
+          <p:cNvPr id="18" name="TextBox 17"/>
+          <p:cNvSpPr txBox="1"/>
+          <p:nvPr/>
+        </p:nvSpPr>
+        <p:spPr>
+          <a:xfrm>
+            <a:off x="8229600" y="2029968"/>
+            <a:ext cx="2286000" cy="502920"/>
+          </a:xfrm>
+          <a:prstGeom prst="rect">
+            <a:avLst/>
+          </a:prstGeom>
+          <a:noFill/>
+        </p:spPr>
+        <p:txBody>
+          <a:bodyPr wrap="square">
+            <a:spAutoFit/>
+          </a:bodyPr>
+          <a:lstStyle/>
+          <a:p>
+            <a:pPr algn="l">
+              <a:defRPr sz="2200" b="1">
+                <a:solidFill>
+                  <a:srgbClr val="2563EB"/>
+                </a:solidFill>
+              </a:defRPr>
+            </a:pPr>
+            <a:r>
+              <a:t>$15M</a:t>
+            </a:r>
+          </a:p>
+        </p:txBody>
+      </p:sp>
+      <p:sp>
+        <p:nvSpPr>
+          <p:cNvPr id="19" name="TextBox 18"/>
+          <p:cNvSpPr txBox="1"/>
+          <p:nvPr/>
+        </p:nvSpPr>
+        <p:spPr>
+          <a:xfrm>
+            <a:off x="8229600" y="2487168"/>
+            <a:ext cx="2286000" cy="411480"/>
+          </a:xfrm>
+          <a:prstGeom prst="rect">
+            <a:avLst/>
+          </a:prstGeom>
+          <a:noFill/>
+        </p:spPr>
+        <p:txBody>
+          <a:bodyPr wrap="square">
+            <a:spAutoFit/>
+          </a:bodyPr>
+          <a:lstStyle/>
+          <a:p>
+            <a:pPr algn="l">
+              <a:defRPr sz="1100" b="0">
+                <a:solidFill>
+                  <a:srgbClr val="667085"/>
+                </a:solidFill>
+              </a:defRPr>
+            </a:pPr>
+            <a:r>
+              <a:t>Pilot receivables pipe (Y1 target)</a:t>
+            </a:r>
+          </a:p>
+        </p:txBody>
+      </p:sp>
+      <p:sp>
+        <p:nvSpPr>
+          <p:cNvPr id="20" name="TextBox 19"/>
+          <p:cNvSpPr txBox="1"/>
+          <p:nvPr/>
+        </p:nvSpPr>
+        <p:spPr>
+          <a:xfrm>
+            <a:off x="822960" y="3154680"/>
+            <a:ext cx="5669280" cy="2926080"/>
+          </a:xfrm>
+          <a:prstGeom prst="rect">
+            <a:avLst/>
+          </a:prstGeom>
+          <a:noFill/>
+        </p:spPr>
+        <p:txBody>
+          <a:bodyPr wrap="square">
+            <a:spAutoFit/>
+          </a:bodyPr>
+          <a:lstStyle/>
+          <a:p>
+            <a:pPr>
+              <a:spcAft>
+                <a:spcPts val="603"/>
+              </a:spcAft>
+              <a:defRPr sz="1500">
+                <a:solidFill>
+                  <a:srgbClr val="111827"/>
+                </a:solidFill>
+              </a:defRPr>
+            </a:pPr>
+            <a:r>
+              <a:t>Pilot cohort: 3 financiers + 50 UAE SMEs (Jebel Ali supply chains)</a:t>
+            </a:r>
+          </a:p>
+          <a:p>
+            <a:pPr>
+              <a:spcAft>
+                <a:spcPts val="603"/>
+              </a:spcAft>
+              <a:defRPr sz="1500">
+                <a:solidFill>
+                  <a:srgbClr val="111827"/>
+                </a:solidFill>
+              </a:defRPr>
+            </a:pPr>
+            <a:r>
+              <a:t>Revenue scales with financed volume, not headcount</a:t>
+            </a:r>
+          </a:p>
+          <a:p>
+            <a:pPr>
+              <a:spcAft>
+                <a:spcPts val="603"/>
+              </a:spcAft>
+              <a:defRPr sz="1500">
+                <a:solidFill>
+                  <a:srgbClr val="111827"/>
+                </a:solidFill>
+              </a:defRPr>
+            </a:pPr>
+            <a:r>
+              <a:t>API-first: third parties integrate rails without Credara UI</a:t>
+            </a:r>
+          </a:p>
+          <a:p>
+            <a:pPr>
+              <a:spcAft>
+                <a:spcPts val="603"/>
+              </a:spcAft>
+              <a:defRPr sz="1500">
+                <a:solidFill>
+                  <a:srgbClr val="111827"/>
+                </a:solidFill>
+              </a:defRPr>
+            </a:pPr>
+            <a:r>
+              <a:t>Path to $1M ARR: ~$200M annual financed volume at ~50 bps blended take</a:t>
+            </a:r>
+          </a:p>
+        </p:txBody>
+      </p:sp>
+      <p:sp>
+        <p:nvSpPr>
+          <p:cNvPr id="21" name="Rounded Rectangle 20"/>
+          <p:cNvSpPr/>
+          <p:nvPr/>
+        </p:nvSpPr>
+        <p:spPr>
+          <a:xfrm>
+            <a:off x="6766560" y="3063240"/>
+            <a:ext cx="4754880" cy="2606040"/>
+          </a:xfrm>
+          <a:prstGeom prst="roundRect">
+            <a:avLst/>
+          </a:prstGeom>
+          <a:solidFill>
+            <a:srgbClr val="07142F"/>
+          </a:solidFill>
+          <a:ln>
+            <a:noFill/>
+          </a:ln>
+        </p:spPr>
+        <p:style>
+          <a:lnRef idx="1">
+            <a:schemeClr val="accent1"/>
+          </a:lnRef>
+          <a:fillRef idx="3">
+            <a:schemeClr val="accent1"/>
+          </a:fillRef>
+          <a:effectRef idx="2">
+            <a:schemeClr val="accent1"/>
+          </a:effectRef>
+          <a:fontRef idx="minor">
+            <a:schemeClr val="lt1"/>
+          </a:fontRef>
+        </p:style>
+        <p:txBody>
+          <a:bodyPr rtlCol="0" anchor="ctr"/>
+          <a:lstStyle/>
+          <a:p>
+            <a:pPr algn="ctr"/>
+          </a:p>
+        </p:txBody>
+      </p:sp>
+      <p:sp>
+        <p:nvSpPr>
+          <p:cNvPr id="22" name="TextBox 21"/>
+          <p:cNvSpPr txBox="1"/>
+          <p:nvPr/>
+        </p:nvSpPr>
+        <p:spPr>
+          <a:xfrm>
+            <a:off x="6949440" y="3246120"/>
+            <a:ext cx="4389120" cy="365760"/>
+          </a:xfrm>
+          <a:prstGeom prst="rect">
+            <a:avLst/>
+          </a:prstGeom>
+          <a:noFill/>
+        </p:spPr>
+        <p:txBody>
+          <a:bodyPr wrap="square">
+            <a:spAutoFit/>
+          </a:bodyPr>
+          <a:lstStyle/>
+          <a:p>
+            <a:pPr algn="l">
+              <a:defRPr sz="1200" b="1">
+                <a:solidFill>
+                  <a:srgbClr val="94A3B8"/>
+                </a:solidFill>
+              </a:defRPr>
+            </a:pPr>
+            <a:r>
+              <a:t>Raising (illustrative)</a:t>
+            </a:r>
+          </a:p>
+        </p:txBody>
+      </p:sp>
+      <p:sp>
+        <p:nvSpPr>
+          <p:cNvPr id="23" name="TextBox 22"/>
+          <p:cNvSpPr txBox="1"/>
+          <p:nvPr/>
+        </p:nvSpPr>
+        <p:spPr>
+          <a:xfrm>
+            <a:off x="6949440" y="3611880"/>
+            <a:ext cx="4389120" cy="502920"/>
+          </a:xfrm>
+          <a:prstGeom prst="rect">
+            <a:avLst/>
+          </a:prstGeom>
+          <a:noFill/>
+        </p:spPr>
+        <p:txBody>
+          <a:bodyPr wrap="square">
+            <a:spAutoFit/>
+          </a:bodyPr>
+          <a:lstStyle/>
+          <a:p>
+            <a:pPr algn="l">
+              <a:defRPr sz="2800" b="1">
+                <a:solidFill>
+                  <a:srgbClr val="FFFFFF"/>
+                </a:solidFill>
+              </a:defRPr>
+            </a:pPr>
+            <a:r>
+              <a:t>$500K pre-seed</a:t>
+            </a:r>
+          </a:p>
+        </p:txBody>
+      </p:sp>
+      <p:sp>
+        <p:nvSpPr>
+          <p:cNvPr id="24" name="TextBox 23"/>
+          <p:cNvSpPr txBox="1"/>
+          <p:nvPr/>
+        </p:nvSpPr>
+        <p:spPr>
+          <a:xfrm>
+            <a:off x="6949440" y="4251960"/>
+            <a:ext cx="4389120" cy="2194560"/>
+          </a:xfrm>
+          <a:prstGeom prst="rect">
+            <a:avLst/>
+          </a:prstGeom>
+          <a:noFill/>
+        </p:spPr>
+        <p:txBody>
+          <a:bodyPr wrap="square">
+            <a:spAutoFit/>
+          </a:bodyPr>
+          <a:lstStyle/>
+          <a:p>
+            <a:pPr>
+              <a:spcAft>
+                <a:spcPts val="523"/>
+              </a:spcAft>
+              <a:defRPr sz="1300">
+                <a:solidFill>
+                  <a:srgbClr val="CBD5E1"/>
+                </a:solidFill>
+              </a:defRPr>
+            </a:pPr>
+            <a:r>
+              <a:t>UAE 3-financier pilot + GTM hire</a:t>
+            </a:r>
+          </a:p>
+          <a:p>
+            <a:pPr>
+              <a:spcAft>
+                <a:spcPts val="523"/>
+              </a:spcAft>
+              <a:defRPr sz="1300">
+                <a:solidFill>
+                  <a:srgbClr val="CBD5E1"/>
+                </a:solidFill>
+              </a:defRPr>
+            </a:pPr>
+            <a:r>
+              <a:t>Didit KYB production + Solidity audit</a:t>
+            </a:r>
+          </a:p>
+          <a:p>
+            <a:pPr>
+              <a:spcAft>
+                <a:spcPts val="523"/>
+              </a:spcAft>
+              <a:defRPr sz="1300">
+                <a:solidFill>
+                  <a:srgbClr val="CBD5E1"/>
+                </a:solidFill>
+              </a:defRPr>
+            </a:pPr>
+            <a:r>
+              <a:t>AED stablecoin issuer partnership</a:t>
+            </a:r>
+          </a:p>
+          <a:p>
+            <a:pPr>
+              <a:spcAft>
+                <a:spcPts val="523"/>
+              </a:spcAft>
+              <a:defRPr sz="1300">
+                <a:solidFill>
+                  <a:srgbClr val="CBD5E1"/>
+                </a:solidFill>
+              </a:defRPr>
+            </a:pPr>
+            <a:r>
+              <a:t>18-mo: mainnet + API ecosystem</a:t>
             </a:r>
           </a:p>
         </p:txBody>
@@ -4253,7 +5006,7 @@
               </a:defRPr>
             </a:pPr>
             <a:r>
-              <a:t>TEAM</a:t>
+              <a:t>GO-TO-MARKET</a:t>
             </a:r>
           </a:p>
         </p:txBody>
@@ -4288,7 +5041,7 @@
               </a:defRPr>
             </a:pPr>
             <a:r>
-              <a:t>Founder + banking engineering leadership — regulated delivery at scale</a:t>
+              <a:t>One corridor, prove it, then replicate</a:t>
             </a:r>
           </a:p>
         </p:txBody>
@@ -4457,8 +5210,106 @@
         </p:nvSpPr>
         <p:spPr>
           <a:xfrm>
-            <a:off x="822960" y="1874519"/>
-            <a:ext cx="5120640" cy="365760"/>
+            <a:off x="822960" y="2011680"/>
+            <a:ext cx="5303520" cy="3840480"/>
+          </a:xfrm>
+          <a:prstGeom prst="rect">
+            <a:avLst/>
+          </a:prstGeom>
+          <a:noFill/>
+        </p:spPr>
+        <p:txBody>
+          <a:bodyPr wrap="square">
+            <a:spAutoFit/>
+          </a:bodyPr>
+          <a:lstStyle/>
+          <a:p>
+            <a:pPr>
+              <a:spcAft>
+                <a:spcPts val="644"/>
+              </a:spcAft>
+              <a:defRPr sz="1600">
+                <a:solidFill>
+                  <a:srgbClr val="111827"/>
+                </a:solidFill>
+              </a:defRPr>
+            </a:pPr>
+            <a:r>
+              <a:t>Wedge: UAE SME trade-finance slice — Jebel Ali suppliers</a:t>
+            </a:r>
+          </a:p>
+          <a:p>
+            <a:pPr>
+              <a:spcAft>
+                <a:spcPts val="644"/>
+              </a:spcAft>
+              <a:defRPr sz="1600">
+                <a:solidFill>
+                  <a:srgbClr val="111827"/>
+                </a:solidFill>
+              </a:defRPr>
+            </a:pPr>
+            <a:r>
+              <a:t>Beachhead: 1–2 non-bank financiers + SME cohort</a:t>
+            </a:r>
+          </a:p>
+          <a:p>
+            <a:pPr>
+              <a:spcAft>
+                <a:spcPts val="644"/>
+              </a:spcAft>
+              <a:defRPr sz="1600">
+                <a:solidFill>
+                  <a:srgbClr val="111827"/>
+                </a:solidFill>
+              </a:defRPr>
+            </a:pPr>
+            <a:r>
+              <a:t>DIFC / challenge ecosystem for intros and pilot design</a:t>
+            </a:r>
+          </a:p>
+          <a:p>
+            <a:pPr>
+              <a:spcAft>
+                <a:spcPts val="644"/>
+              </a:spcAft>
+              <a:defRPr sz="1600">
+                <a:solidFill>
+                  <a:srgbClr val="111827"/>
+                </a:solidFill>
+              </a:defRPr>
+            </a:pPr>
+            <a:r>
+              <a:t>KPI: 7–10 day LC → same-day proof-to-funding</a:t>
+            </a:r>
+          </a:p>
+          <a:p>
+            <a:pPr>
+              <a:spcAft>
+                <a:spcPts val="644"/>
+              </a:spcAft>
+              <a:defRPr sz="1600">
+                <a:solidFill>
+                  <a:srgbClr val="111827"/>
+                </a:solidFill>
+              </a:defRPr>
+            </a:pPr>
+            <a:r>
+              <a:t>Expand: new corridors = issuer + IERC20 config, not rebuild</a:t>
+            </a:r>
+          </a:p>
+        </p:txBody>
+      </p:sp>
+      <p:sp>
+        <p:nvSpPr>
+          <p:cNvPr id="9" name="TextBox 8"/>
+          <p:cNvSpPr txBox="1"/>
+          <p:nvPr/>
+        </p:nvSpPr>
+        <p:spPr>
+          <a:xfrm>
+            <a:off x="6583680" y="1828800"/>
+            <a:ext cx="5029200" cy="457200"/>
           </a:xfrm>
           <a:prstGeom prst="rect">
             <a:avLst/>
@@ -4479,21 +5330,21 @@
               </a:defRPr>
             </a:pPr>
             <a:r>
-              <a:t>Othniel Obasi — Founder, NOVTIA Ltd (London)</a:t>
-            </a:r>
-          </a:p>
-        </p:txBody>
-      </p:sp>
-      <p:sp>
-        <p:nvSpPr>
-          <p:cNvPr id="9" name="TextBox 8"/>
-          <p:cNvSpPr txBox="1"/>
-          <p:nvPr/>
-        </p:nvSpPr>
-        <p:spPr>
-          <a:xfrm>
-            <a:off x="822960" y="2240280"/>
-            <a:ext cx="5120640" cy="3200400"/>
+              <a:t>Roadmap</a:t>
+            </a:r>
+          </a:p>
+        </p:txBody>
+      </p:sp>
+      <p:sp>
+        <p:nvSpPr>
+          <p:cNvPr id="10" name="TextBox 9"/>
+          <p:cNvSpPr txBox="1"/>
+          <p:nvPr/>
+        </p:nvSpPr>
+        <p:spPr>
+          <a:xfrm>
+            <a:off x="6583680" y="2286000"/>
+            <a:ext cx="5029200" cy="3474720"/>
           </a:xfrm>
           <a:prstGeom prst="rect">
             <a:avLst/>
@@ -4512,12 +5363,12 @@
               </a:spcAft>
               <a:defRPr sz="1500">
                 <a:solidFill>
-                  <a:srgbClr val="111827"/>
-                </a:solidFill>
-              </a:defRPr>
-            </a:pPr>
-            <a:r>
-              <a:t>Creditville MFBank 40K → 100K+ users</a:t>
+                  <a:srgbClr val="667085"/>
+                </a:solidFill>
+              </a:defRPr>
+            </a:pPr>
+            <a:r>
+              <a:t>Now: Amoy demo + Judge Mode (shipped)</a:t>
             </a:r>
           </a:p>
           <a:p>
@@ -4527,12 +5378,12 @@
               </a:spcAft>
               <a:defRPr sz="1500">
                 <a:solidFill>
-                  <a:srgbClr val="111827"/>
-                </a:solidFill>
-              </a:defRPr>
-            </a:pPr>
-            <a:r>
-              <a:t>PHED utilities — 5M+ customers, $96M+ revenue growth</a:t>
+                  <a:srgbClr val="667085"/>
+                </a:solidFill>
+              </a:defRPr>
+            </a:pPr>
+            <a:r>
+              <a:t>Q1–Q2: Financier pilot LOIs + prod KYB</a:t>
             </a:r>
           </a:p>
           <a:p>
@@ -4542,12 +5393,12 @@
               </a:spcAft>
               <a:defRPr sz="1500">
                 <a:solidFill>
-                  <a:srgbClr val="111827"/>
-                </a:solidFill>
-              </a:defRPr>
-            </a:pPr>
-            <a:r>
-              <a:t>AIRG + SURGE v2 → Credara evidence model</a:t>
+                  <a:srgbClr val="667085"/>
+                </a:solidFill>
+              </a:defRPr>
+            </a:pPr>
+            <a:r>
+              <a:t>Phase 2: Licensed AED stablecoin partner</a:t>
             </a:r>
           </a:p>
           <a:p>
@@ -4557,208 +5408,12 @@
               </a:spcAft>
               <a:defRPr sz="1500">
                 <a:solidFill>
-                  <a:srgbClr val="111827"/>
-                </a:solidFill>
-              </a:defRPr>
-            </a:pPr>
-            <a:r>
-              <a:t>Portfolio: NorthBridge, Kairos, ProofSource, Autonix</a:t>
-            </a:r>
-          </a:p>
-        </p:txBody>
-      </p:sp>
-      <p:sp>
-        <p:nvSpPr>
-          <p:cNvPr id="10" name="TextBox 9"/>
-          <p:cNvSpPr txBox="1"/>
-          <p:nvPr/>
-        </p:nvSpPr>
-        <p:spPr>
-          <a:xfrm>
-            <a:off x="6309360" y="1874519"/>
-            <a:ext cx="5120640" cy="365760"/>
-          </a:xfrm>
-          <a:prstGeom prst="rect">
-            <a:avLst/>
-          </a:prstGeom>
-          <a:noFill/>
-        </p:spPr>
-        <p:txBody>
-          <a:bodyPr wrap="square">
-            <a:spAutoFit/>
-          </a:bodyPr>
-          <a:lstStyle/>
-          <a:p>
-            <a:pPr algn="l">
-              <a:defRPr sz="1400" b="1">
-                <a:solidFill>
-                  <a:srgbClr val="2563EB"/>
-                </a:solidFill>
-              </a:defRPr>
-            </a:pPr>
-            <a:r>
-              <a:t>Martins Nwanu — Head of IT, Creditville Group</a:t>
-            </a:r>
-          </a:p>
-        </p:txBody>
-      </p:sp>
-      <p:sp>
-        <p:nvSpPr>
-          <p:cNvPr id="11" name="TextBox 10"/>
-          <p:cNvSpPr txBox="1"/>
-          <p:nvPr/>
-        </p:nvSpPr>
-        <p:spPr>
-          <a:xfrm>
-            <a:off x="6309360" y="2240280"/>
-            <a:ext cx="5120640" cy="3200400"/>
-          </a:xfrm>
-          <a:prstGeom prst="rect">
-            <a:avLst/>
-          </a:prstGeom>
-          <a:noFill/>
-        </p:spPr>
-        <p:txBody>
-          <a:bodyPr wrap="square">
-            <a:spAutoFit/>
-          </a:bodyPr>
-          <a:lstStyle/>
-          <a:p>
-            <a:pPr>
-              <a:spcAft>
-                <a:spcPts val="603"/>
-              </a:spcAft>
-              <a:defRPr sz="1500">
-                <a:solidFill>
-                  <a:srgbClr val="111827"/>
-                </a:solidFill>
-              </a:defRPr>
-            </a:pPr>
-            <a:r>
-              <a:t>11-engineer leadership; core banking platform delivery</a:t>
-            </a:r>
-          </a:p>
-          <a:p>
-            <a:pPr>
-              <a:spcAft>
-                <a:spcPts val="603"/>
-              </a:spcAft>
-              <a:defRPr sz="1500">
-                <a:solidFill>
-                  <a:srgbClr val="111827"/>
-                </a:solidFill>
-              </a:defRPr>
-            </a:pPr>
-            <a:r>
-              <a:t>C Money 30K → 100K+ users; in-house mobile rebuild</a:t>
-            </a:r>
-          </a:p>
-          <a:p>
-            <a:pPr>
-              <a:spcAft>
-                <a:spcPts val="603"/>
-              </a:spcAft>
-              <a:defRPr sz="1500">
-                <a:solidFill>
-                  <a:srgbClr val="111827"/>
-                </a:solidFill>
-              </a:defRPr>
-            </a:pPr>
-            <a:r>
-              <a:t>Loan ops scaled to ₦800M–₦1B/month disbursements</a:t>
-            </a:r>
-          </a:p>
-          <a:p>
-            <a:pPr>
-              <a:spcAft>
-                <a:spcPts val="603"/>
-              </a:spcAft>
-              <a:defRPr sz="1500">
-                <a:solidFill>
-                  <a:srgbClr val="111827"/>
-                </a:solidFill>
-              </a:defRPr>
-            </a:pPr>
-            <a:r>
-              <a:t>Credara: production API, workspace UX, deploy discipline</a:t>
-            </a:r>
-          </a:p>
-        </p:txBody>
-      </p:sp>
-      <p:sp>
-        <p:nvSpPr>
-          <p:cNvPr id="12" name="Rectangle 11"/>
-          <p:cNvSpPr/>
-          <p:nvPr/>
-        </p:nvSpPr>
-        <p:spPr>
-          <a:xfrm>
-            <a:off x="6080760" y="1783080"/>
-            <a:ext cx="45720" cy="3840480"/>
-          </a:xfrm>
-          <a:prstGeom prst="rect">
-            <a:avLst/>
-          </a:prstGeom>
-          <a:solidFill>
-            <a:srgbClr val="E7EAF1"/>
-          </a:solidFill>
-          <a:ln>
-            <a:noFill/>
-          </a:ln>
-        </p:spPr>
-        <p:style>
-          <a:lnRef idx="1">
-            <a:schemeClr val="accent1"/>
-          </a:lnRef>
-          <a:fillRef idx="3">
-            <a:schemeClr val="accent1"/>
-          </a:fillRef>
-          <a:effectRef idx="2">
-            <a:schemeClr val="accent1"/>
-          </a:effectRef>
-          <a:fontRef idx="minor">
-            <a:schemeClr val="lt1"/>
-          </a:fontRef>
-        </p:style>
-        <p:txBody>
-          <a:bodyPr rtlCol="0" anchor="ctr"/>
-          <a:lstStyle/>
-          <a:p>
-            <a:pPr algn="ctr"/>
-          </a:p>
-        </p:txBody>
-      </p:sp>
-      <p:sp>
-        <p:nvSpPr>
-          <p:cNvPr id="13" name="TextBox 12"/>
-          <p:cNvSpPr txBox="1"/>
-          <p:nvPr/>
-        </p:nvSpPr>
-        <p:spPr>
-          <a:xfrm>
-            <a:off x="822960" y="5349240"/>
-            <a:ext cx="10515600" cy="502920"/>
-          </a:xfrm>
-          <a:prstGeom prst="rect">
-            <a:avLst/>
-          </a:prstGeom>
-          <a:noFill/>
-        </p:spPr>
-        <p:txBody>
-          <a:bodyPr wrap="square">
-            <a:spAutoFit/>
-          </a:bodyPr>
-          <a:lstStyle/>
-          <a:p>
-            <a:pPr algn="l">
-              <a:defRPr sz="1400" b="0">
-                <a:solidFill>
                   <a:srgbClr val="667085"/>
                 </a:solidFill>
               </a:defRPr>
             </a:pPr>
             <a:r>
-              <a:t>Hiring with raise: UAE GTM / trade-finance partnerships · compliance advisor (DIFC)</a:t>
+              <a:t>Phase 3: Polygon mainnet + partner APIs</a:t>
             </a:r>
           </a:p>
         </p:txBody>
@@ -4772,6 +5427,345 @@
 </file>
 
 <file path=ppt/slides/slide13.xml><?xml version="1.0" encoding="utf-8"?>
+<p:sld xmlns:a="http://schemas.openxmlformats.org/drawingml/2006/main" xmlns:p="http://schemas.openxmlformats.org/presentationml/2006/main" xmlns:r="http://schemas.openxmlformats.org/officeDocument/2006/relationships">
+  <p:cSld>
+    <p:bg>
+      <p:bgPr>
+        <a:solidFill>
+          <a:srgbClr val="F8FAFC"/>
+        </a:solidFill>
+        <a:effectLst/>
+      </p:bgPr>
+    </p:bg>
+    <p:spTree>
+      <p:nvGrpSpPr>
+        <p:cNvPr id="1" name=""/>
+        <p:cNvGrpSpPr/>
+        <p:nvPr/>
+      </p:nvGrpSpPr>
+      <p:grpSpPr/>
+      <p:sp>
+        <p:nvSpPr>
+          <p:cNvPr id="2" name="TextBox 1"/>
+          <p:cNvSpPr txBox="1"/>
+          <p:nvPr/>
+        </p:nvSpPr>
+        <p:spPr>
+          <a:xfrm>
+            <a:off x="822960" y="548640"/>
+            <a:ext cx="10058400" cy="365760"/>
+          </a:xfrm>
+          <a:prstGeom prst="rect">
+            <a:avLst/>
+          </a:prstGeom>
+          <a:noFill/>
+        </p:spPr>
+        <p:txBody>
+          <a:bodyPr wrap="square">
+            <a:spAutoFit/>
+          </a:bodyPr>
+          <a:lstStyle/>
+          <a:p>
+            <a:pPr algn="l">
+              <a:defRPr sz="1100" b="1">
+                <a:solidFill>
+                  <a:srgbClr val="2563EB"/>
+                </a:solidFill>
+              </a:defRPr>
+            </a:pPr>
+            <a:r>
+              <a:t>SETTLEMENT ROADMAP</a:t>
+            </a:r>
+          </a:p>
+        </p:txBody>
+      </p:sp>
+      <p:sp>
+        <p:nvSpPr>
+          <p:cNvPr id="3" name="TextBox 2"/>
+          <p:cNvSpPr txBox="1"/>
+          <p:nvPr/>
+        </p:nvSpPr>
+        <p:spPr>
+          <a:xfrm>
+            <a:off x="822960" y="1005840"/>
+            <a:ext cx="10058400" cy="1097280"/>
+          </a:xfrm>
+          <a:prstGeom prst="rect">
+            <a:avLst/>
+          </a:prstGeom>
+          <a:noFill/>
+        </p:spPr>
+        <p:txBody>
+          <a:bodyPr wrap="square">
+            <a:spAutoFit/>
+          </a:bodyPr>
+          <a:lstStyle/>
+          <a:p>
+            <a:pPr algn="l">
+              <a:defRPr sz="2800" b="1">
+                <a:solidFill>
+                  <a:srgbClr val="111827"/>
+                </a:solidFill>
+              </a:defRPr>
+            </a:pPr>
+            <a:r>
+              <a:t>Today: MockUSDC on Amoy proves the escrow path.</a:t>
+            </a:r>
+            <a:br/>
+            <a:r>
+              <a:t>Tomorrow: regulated AED stablecoin on the same Smart LC rails.</a:t>
+            </a:r>
+          </a:p>
+        </p:txBody>
+      </p:sp>
+      <p:sp>
+        <p:nvSpPr>
+          <p:cNvPr id="4" name="TextBox 3"/>
+          <p:cNvSpPr txBox="1"/>
+          <p:nvPr/>
+        </p:nvSpPr>
+        <p:spPr>
+          <a:xfrm>
+            <a:off x="822960" y="2423160"/>
+            <a:ext cx="10058400" cy="3474720"/>
+          </a:xfrm>
+          <a:prstGeom prst="rect">
+            <a:avLst/>
+          </a:prstGeom>
+          <a:noFill/>
+        </p:spPr>
+        <p:txBody>
+          <a:bodyPr wrap="square">
+            <a:spAutoFit/>
+          </a:bodyPr>
+          <a:lstStyle/>
+          <a:p>
+            <a:pPr>
+              <a:spcAft>
+                <a:spcPts val="684"/>
+              </a:spcAft>
+              <a:defRPr sz="1700">
+                <a:solidFill>
+                  <a:srgbClr val="111827"/>
+                </a:solidFill>
+              </a:defRPr>
+            </a:pPr>
+            <a:r>
+              <a:t>Smart LC is token-agnostic — production is an issuer swap, not a rebuild</a:t>
+            </a:r>
+          </a:p>
+          <a:p>
+            <a:pPr>
+              <a:spcAft>
+                <a:spcPts val="684"/>
+              </a:spcAft>
+              <a:defRPr sz="1700">
+                <a:solidFill>
+                  <a:srgbClr val="111827"/>
+                </a:solidFill>
+              </a:defRPr>
+            </a:pPr>
+            <a:r>
+              <a:t>CBUAE PTSR-compliant AED from licensed partner when ready</a:t>
+            </a:r>
+          </a:p>
+          <a:p>
+            <a:pPr>
+              <a:spcAft>
+                <a:spcPts val="684"/>
+              </a:spcAft>
+              <a:defRPr sz="1700">
+                <a:solidFill>
+                  <a:srgbClr val="111827"/>
+                </a:solidFill>
+              </a:defRPr>
+            </a:pPr>
+            <a:r>
+              <a:t>B2B settlement along UAE corridors — not consumer remittance or POS</a:t>
+            </a:r>
+          </a:p>
+          <a:p>
+            <a:pPr>
+              <a:spcAft>
+                <a:spcPts val="684"/>
+              </a:spcAft>
+              <a:defRPr sz="1700">
+                <a:solidFill>
+                  <a:srgbClr val="111827"/>
+                </a:solidFill>
+              </a:defRPr>
+            </a:pPr>
+            <a:r>
+              <a:t>Credara is settlement-ready infrastructure; we do not issue AED</a:t>
+            </a:r>
+          </a:p>
+        </p:txBody>
+      </p:sp>
+      <p:sp>
+        <p:nvSpPr>
+          <p:cNvPr id="5" name="Rectangle 4"/>
+          <p:cNvSpPr/>
+          <p:nvPr/>
+        </p:nvSpPr>
+        <p:spPr>
+          <a:xfrm>
+            <a:off x="640080" y="2286000"/>
+            <a:ext cx="1097280" cy="54864"/>
+          </a:xfrm>
+          <a:prstGeom prst="rect">
+            <a:avLst/>
+          </a:prstGeom>
+          <a:solidFill>
+            <a:srgbClr val="2563EB"/>
+          </a:solidFill>
+          <a:ln>
+            <a:noFill/>
+          </a:ln>
+        </p:spPr>
+        <p:style>
+          <a:lnRef idx="1">
+            <a:schemeClr val="accent1"/>
+          </a:lnRef>
+          <a:fillRef idx="3">
+            <a:schemeClr val="accent1"/>
+          </a:fillRef>
+          <a:effectRef idx="2">
+            <a:schemeClr val="accent1"/>
+          </a:effectRef>
+          <a:fontRef idx="minor">
+            <a:schemeClr val="lt1"/>
+          </a:fontRef>
+        </p:style>
+        <p:txBody>
+          <a:bodyPr rtlCol="0" anchor="ctr"/>
+          <a:lstStyle/>
+          <a:p>
+            <a:pPr algn="ctr"/>
+          </a:p>
+        </p:txBody>
+      </p:sp>
+      <p:sp>
+        <p:nvSpPr>
+          <p:cNvPr id="6" name="Rectangle 5"/>
+          <p:cNvSpPr/>
+          <p:nvPr/>
+        </p:nvSpPr>
+        <p:spPr>
+          <a:xfrm>
+            <a:off x="0" y="6446520"/>
+            <a:ext cx="12191695" cy="411480"/>
+          </a:xfrm>
+          <a:prstGeom prst="rect">
+            <a:avLst/>
+          </a:prstGeom>
+          <a:solidFill>
+            <a:srgbClr val="F1F5F9"/>
+          </a:solidFill>
+          <a:ln>
+            <a:noFill/>
+          </a:ln>
+        </p:spPr>
+        <p:style>
+          <a:lnRef idx="1">
+            <a:schemeClr val="accent1"/>
+          </a:lnRef>
+          <a:fillRef idx="3">
+            <a:schemeClr val="accent1"/>
+          </a:fillRef>
+          <a:effectRef idx="2">
+            <a:schemeClr val="accent1"/>
+          </a:effectRef>
+          <a:fontRef idx="minor">
+            <a:schemeClr val="lt1"/>
+          </a:fontRef>
+        </p:style>
+        <p:txBody>
+          <a:bodyPr rtlCol="0" anchor="ctr"/>
+          <a:lstStyle/>
+          <a:p>
+            <a:pPr algn="ctr"/>
+          </a:p>
+        </p:txBody>
+      </p:sp>
+      <p:sp>
+        <p:nvSpPr>
+          <p:cNvPr id="7" name="TextBox 6"/>
+          <p:cNvSpPr txBox="1"/>
+          <p:nvPr/>
+        </p:nvSpPr>
+        <p:spPr>
+          <a:xfrm>
+            <a:off x="640080" y="6510528"/>
+            <a:ext cx="5486400" cy="274320"/>
+          </a:xfrm>
+          <a:prstGeom prst="rect">
+            <a:avLst/>
+          </a:prstGeom>
+          <a:noFill/>
+        </p:spPr>
+        <p:txBody>
+          <a:bodyPr wrap="square">
+            <a:spAutoFit/>
+          </a:bodyPr>
+          <a:lstStyle/>
+          <a:p>
+            <a:pPr algn="l">
+              <a:defRPr sz="1000" b="0">
+                <a:solidFill>
+                  <a:srgbClr val="667085"/>
+                </a:solidFill>
+              </a:defRPr>
+            </a:pPr>
+            <a:r>
+              <a:t>Credara · Smart Commerce Infrastructure</a:t>
+            </a:r>
+          </a:p>
+        </p:txBody>
+      </p:sp>
+      <p:sp>
+        <p:nvSpPr>
+          <p:cNvPr id="8" name="TextBox 7"/>
+          <p:cNvSpPr txBox="1"/>
+          <p:nvPr/>
+        </p:nvSpPr>
+        <p:spPr>
+          <a:xfrm>
+            <a:off x="8686800" y="6510528"/>
+            <a:ext cx="3200400" cy="274320"/>
+          </a:xfrm>
+          <a:prstGeom prst="rect">
+            <a:avLst/>
+          </a:prstGeom>
+          <a:noFill/>
+        </p:spPr>
+        <p:txBody>
+          <a:bodyPr wrap="square">
+            <a:spAutoFit/>
+          </a:bodyPr>
+          <a:lstStyle/>
+          <a:p>
+            <a:pPr algn="r">
+              <a:defRPr sz="1000" b="0">
+                <a:solidFill>
+                  <a:srgbClr val="667085"/>
+                </a:solidFill>
+              </a:defRPr>
+            </a:pPr>
+            <a:r>
+              <a:t>credara-jet.vercel.app</a:t>
+            </a:r>
+          </a:p>
+        </p:txBody>
+      </p:sp>
+    </p:spTree>
+  </p:cSld>
+  <p:clrMapOvr>
+    <a:masterClrMapping/>
+  </p:clrMapOvr>
+</p:sld>
+</file>
+
+<file path=ppt/slides/slide14.xml><?xml version="1.0" encoding="utf-8"?>
 <p:sld xmlns:a="http://schemas.openxmlformats.org/drawingml/2006/main" xmlns:p="http://schemas.openxmlformats.org/presentationml/2006/main" xmlns:r="http://schemas.openxmlformats.org/officeDocument/2006/relationships">
   <p:cSld>
     <p:bg>
@@ -4819,7 +5813,7 @@
               </a:defRPr>
             </a:pPr>
             <a:r>
-              <a:t>TECH APPENDIX</a:t>
+              <a:t>TEAM</a:t>
             </a:r>
           </a:p>
         </p:txBody>
@@ -4854,7 +5848,7 @@
               </a:defRPr>
             </a:pPr>
             <a:r>
-              <a:t>For diligence — full architecture in repo README</a:t>
+              <a:t>Founder + banking engineering leadership — regulated delivery at scale</a:t>
             </a:r>
           </a:p>
         </p:txBody>
@@ -5023,8 +6017,43 @@
         </p:nvSpPr>
         <p:spPr>
           <a:xfrm>
-            <a:off x="822960" y="1828800"/>
-            <a:ext cx="5029200" cy="4114800"/>
+            <a:off x="822960" y="1874519"/>
+            <a:ext cx="5120640" cy="365760"/>
+          </a:xfrm>
+          <a:prstGeom prst="rect">
+            <a:avLst/>
+          </a:prstGeom>
+          <a:noFill/>
+        </p:spPr>
+        <p:txBody>
+          <a:bodyPr wrap="square">
+            <a:spAutoFit/>
+          </a:bodyPr>
+          <a:lstStyle/>
+          <a:p>
+            <a:pPr algn="l">
+              <a:defRPr sz="1400" b="1">
+                <a:solidFill>
+                  <a:srgbClr val="2563EB"/>
+                </a:solidFill>
+              </a:defRPr>
+            </a:pPr>
+            <a:r>
+              <a:t>Othniel Obasi — Founder, NOVTIA Ltd (London)</a:t>
+            </a:r>
+          </a:p>
+        </p:txBody>
+      </p:sp>
+      <p:sp>
+        <p:nvSpPr>
+          <p:cNvPr id="9" name="TextBox 8"/>
+          <p:cNvSpPr txBox="1"/>
+          <p:nvPr/>
+        </p:nvSpPr>
+        <p:spPr>
+          <a:xfrm>
+            <a:off x="822960" y="2240280"/>
+            <a:ext cx="5120640" cy="3200400"/>
           </a:xfrm>
           <a:prstGeom prst="rect">
             <a:avLst/>
@@ -5048,7 +6077,7 @@
               </a:defRPr>
             </a:pPr>
             <a:r>
-              <a:t>Monorepo: Next.js · FastAPI · workers · Solidity 0.8.28</a:t>
+              <a:t>Creditville MFBank 40K → 100K+ users</a:t>
             </a:r>
           </a:p>
           <a:p>
@@ -5063,7 +6092,7 @@
               </a:defRPr>
             </a:pPr>
             <a:r>
-              <a:t>ProofRegistry · ReceivableRegistry · SmartLCFactory</a:t>
+              <a:t>PHED utilities — 5M+ customers, $96M+ revenue growth</a:t>
             </a:r>
           </a:p>
           <a:p>
@@ -5078,7 +6107,7 @@
               </a:defRPr>
             </a:pPr>
             <a:r>
-              <a:t>CreditScoreAttestation · MockUSDC (IERC20-agnostic)</a:t>
+              <a:t>AIRG + SURGE v2 → Credara evidence model</a:t>
             </a:r>
           </a:p>
           <a:p>
@@ -5093,21 +6122,56 @@
               </a:defRPr>
             </a:pPr>
             <a:r>
-              <a:t>Outbox relayer · idempotency · AccessControl / Pausable</a:t>
-            </a:r>
-          </a:p>
-        </p:txBody>
-      </p:sp>
-      <p:sp>
-        <p:nvSpPr>
-          <p:cNvPr id="9" name="TextBox 8"/>
-          <p:cNvSpPr txBox="1"/>
-          <p:nvPr/>
-        </p:nvSpPr>
-        <p:spPr>
-          <a:xfrm>
-            <a:off x="6217920" y="1828800"/>
-            <a:ext cx="5303520" cy="4114800"/>
+              <a:t>Portfolio: NorthBridge, Kairos, ProofSource, Autonix</a:t>
+            </a:r>
+          </a:p>
+        </p:txBody>
+      </p:sp>
+      <p:sp>
+        <p:nvSpPr>
+          <p:cNvPr id="10" name="TextBox 9"/>
+          <p:cNvSpPr txBox="1"/>
+          <p:nvPr/>
+        </p:nvSpPr>
+        <p:spPr>
+          <a:xfrm>
+            <a:off x="6309360" y="1874519"/>
+            <a:ext cx="5120640" cy="365760"/>
+          </a:xfrm>
+          <a:prstGeom prst="rect">
+            <a:avLst/>
+          </a:prstGeom>
+          <a:noFill/>
+        </p:spPr>
+        <p:txBody>
+          <a:bodyPr wrap="square">
+            <a:spAutoFit/>
+          </a:bodyPr>
+          <a:lstStyle/>
+          <a:p>
+            <a:pPr algn="l">
+              <a:defRPr sz="1400" b="1">
+                <a:solidFill>
+                  <a:srgbClr val="2563EB"/>
+                </a:solidFill>
+              </a:defRPr>
+            </a:pPr>
+            <a:r>
+              <a:t>Martins Nwanu — Head of IT, Creditville Group</a:t>
+            </a:r>
+          </a:p>
+        </p:txBody>
+      </p:sp>
+      <p:sp>
+        <p:nvSpPr>
+          <p:cNvPr id="11" name="TextBox 10"/>
+          <p:cNvSpPr txBox="1"/>
+          <p:nvPr/>
+        </p:nvSpPr>
+        <p:spPr>
+          <a:xfrm>
+            <a:off x="6309360" y="2240280"/>
+            <a:ext cx="5120640" cy="3200400"/>
           </a:xfrm>
           <a:prstGeom prst="rect">
             <a:avLst/>
@@ -5126,12 +6190,12 @@
               </a:spcAft>
               <a:defRPr sz="1500">
                 <a:solidFill>
-                  <a:srgbClr val="667085"/>
-                </a:solidFill>
-              </a:defRPr>
-            </a:pPr>
-            <a:r>
-              <a:t>Non-goals: no remittance MVP · no POS · no AED issuance</a:t>
+                  <a:srgbClr val="111827"/>
+                </a:solidFill>
+              </a:defRPr>
+            </a:pPr>
+            <a:r>
+              <a:t>11-engineer leadership; core banking platform delivery</a:t>
             </a:r>
           </a:p>
           <a:p>
@@ -5141,12 +6205,12 @@
               </a:spcAft>
               <a:defRPr sz="1500">
                 <a:solidFill>
-                  <a:srgbClr val="667085"/>
-                </a:solidFill>
-              </a:defRPr>
-            </a:pPr>
-            <a:r>
-              <a:t>Docs: README · SUBMISSION.md · PROCESS_FLOWS.md</a:t>
+                  <a:srgbClr val="111827"/>
+                </a:solidFill>
+              </a:defRPr>
+            </a:pPr>
+            <a:r>
+              <a:t>C Money 30K → 100K+ users; in-house mobile rebuild</a:t>
             </a:r>
           </a:p>
           <a:p>
@@ -5156,12 +6220,12 @@
               </a:spcAft>
               <a:defRPr sz="1500">
                 <a:solidFill>
-                  <a:srgbClr val="667085"/>
-                </a:solidFill>
-              </a:defRPr>
-            </a:pPr>
-            <a:r>
-              <a:t>API: credara-api.vercel.app/docs</a:t>
+                  <a:srgbClr val="111827"/>
+                </a:solidFill>
+              </a:defRPr>
+            </a:pPr>
+            <a:r>
+              <a:t>Loan ops scaled to ₦800M–₦1B/month disbursements</a:t>
             </a:r>
           </a:p>
           <a:p>
@@ -5171,26 +6235,26 @@
               </a:spcAft>
               <a:defRPr sz="1500">
                 <a:solidFill>
-                  <a:srgbClr val="667085"/>
-                </a:solidFill>
-              </a:defRPr>
-            </a:pPr>
-            <a:r>
-              <a:t>Contracts: Slither CI + Hardhat test suite</a:t>
-            </a:r>
-          </a:p>
-        </p:txBody>
-      </p:sp>
-      <p:sp>
-        <p:nvSpPr>
-          <p:cNvPr id="10" name="Rectangle 9"/>
+                  <a:srgbClr val="111827"/>
+                </a:solidFill>
+              </a:defRPr>
+            </a:pPr>
+            <a:r>
+              <a:t>Credara: production API, workspace UX, deploy discipline</a:t>
+            </a:r>
+          </a:p>
+        </p:txBody>
+      </p:sp>
+      <p:sp>
+        <p:nvSpPr>
+          <p:cNvPr id="12" name="Rectangle 11"/>
           <p:cNvSpPr/>
           <p:nvPr/>
         </p:nvSpPr>
         <p:spPr>
           <a:xfrm>
-            <a:off x="5943600" y="1691640"/>
-            <a:ext cx="45720" cy="4389120"/>
+            <a:off x="6080760" y="1783080"/>
+            <a:ext cx="45720" cy="3840480"/>
           </a:xfrm>
           <a:prstGeom prst="rect">
             <a:avLst/>
@@ -5221,6 +6285,41 @@
           <a:lstStyle/>
           <a:p>
             <a:pPr algn="ctr"/>
+          </a:p>
+        </p:txBody>
+      </p:sp>
+      <p:sp>
+        <p:nvSpPr>
+          <p:cNvPr id="13" name="TextBox 12"/>
+          <p:cNvSpPr txBox="1"/>
+          <p:nvPr/>
+        </p:nvSpPr>
+        <p:spPr>
+          <a:xfrm>
+            <a:off x="822960" y="5349240"/>
+            <a:ext cx="10515600" cy="502920"/>
+          </a:xfrm>
+          <a:prstGeom prst="rect">
+            <a:avLst/>
+          </a:prstGeom>
+          <a:noFill/>
+        </p:spPr>
+        <p:txBody>
+          <a:bodyPr wrap="square">
+            <a:spAutoFit/>
+          </a:bodyPr>
+          <a:lstStyle/>
+          <a:p>
+            <a:pPr algn="l">
+              <a:defRPr sz="1400" b="0">
+                <a:solidFill>
+                  <a:srgbClr val="667085"/>
+                </a:solidFill>
+              </a:defRPr>
+            </a:pPr>
+            <a:r>
+              <a:t>Hiring with raise: UAE GTM / trade-finance partnerships · compliance advisor (DIFC)</a:t>
+            </a:r>
           </a:p>
         </p:txBody>
       </p:sp>
@@ -5232,7 +6331,468 @@
 </p:sld>
 </file>
 
-<file path=ppt/slides/slide14.xml><?xml version="1.0" encoding="utf-8"?>
+<file path=ppt/slides/slide15.xml><?xml version="1.0" encoding="utf-8"?>
+<p:sld xmlns:a="http://schemas.openxmlformats.org/drawingml/2006/main" xmlns:p="http://schemas.openxmlformats.org/presentationml/2006/main" xmlns:r="http://schemas.openxmlformats.org/officeDocument/2006/relationships">
+  <p:cSld>
+    <p:bg>
+      <p:bgPr>
+        <a:solidFill>
+          <a:srgbClr val="FFFFFF"/>
+        </a:solidFill>
+        <a:effectLst/>
+      </p:bgPr>
+    </p:bg>
+    <p:spTree>
+      <p:nvGrpSpPr>
+        <p:cNvPr id="1" name=""/>
+        <p:cNvGrpSpPr/>
+        <p:nvPr/>
+      </p:nvGrpSpPr>
+      <p:grpSpPr/>
+      <p:sp>
+        <p:nvSpPr>
+          <p:cNvPr id="2" name="TextBox 1"/>
+          <p:cNvSpPr txBox="1"/>
+          <p:nvPr/>
+        </p:nvSpPr>
+        <p:spPr>
+          <a:xfrm>
+            <a:off x="640080" y="411480"/>
+            <a:ext cx="10515600" cy="457200"/>
+          </a:xfrm>
+          <a:prstGeom prst="rect">
+            <a:avLst/>
+          </a:prstGeom>
+          <a:noFill/>
+        </p:spPr>
+        <p:txBody>
+          <a:bodyPr wrap="square">
+            <a:spAutoFit/>
+          </a:bodyPr>
+          <a:lstStyle/>
+          <a:p>
+            <a:pPr algn="l">
+              <a:defRPr sz="1100" b="1">
+                <a:solidFill>
+                  <a:srgbClr val="2563EB"/>
+                </a:solidFill>
+              </a:defRPr>
+            </a:pPr>
+            <a:r>
+              <a:t>TECH APPENDIX</a:t>
+            </a:r>
+          </a:p>
+        </p:txBody>
+      </p:sp>
+      <p:sp>
+        <p:nvSpPr>
+          <p:cNvPr id="3" name="TextBox 2"/>
+          <p:cNvSpPr txBox="1"/>
+          <p:nvPr/>
+        </p:nvSpPr>
+        <p:spPr>
+          <a:xfrm>
+            <a:off x="640080" y="777240"/>
+            <a:ext cx="10515600" cy="1097280"/>
+          </a:xfrm>
+          <a:prstGeom prst="rect">
+            <a:avLst/>
+          </a:prstGeom>
+          <a:noFill/>
+        </p:spPr>
+        <p:txBody>
+          <a:bodyPr wrap="square">
+            <a:spAutoFit/>
+          </a:bodyPr>
+          <a:lstStyle/>
+          <a:p>
+            <a:pPr algn="l">
+              <a:defRPr sz="3200" b="1">
+                <a:solidFill>
+                  <a:srgbClr val="111827"/>
+                </a:solidFill>
+              </a:defRPr>
+            </a:pPr>
+            <a:r>
+              <a:t>For diligence — full architecture in repo README</a:t>
+            </a:r>
+          </a:p>
+        </p:txBody>
+      </p:sp>
+      <p:sp>
+        <p:nvSpPr>
+          <p:cNvPr id="4" name="Rectangle 3"/>
+          <p:cNvSpPr/>
+          <p:nvPr/>
+        </p:nvSpPr>
+        <p:spPr>
+          <a:xfrm>
+            <a:off x="640080" y="1600200"/>
+            <a:ext cx="1097280" cy="54864"/>
+          </a:xfrm>
+          <a:prstGeom prst="rect">
+            <a:avLst/>
+          </a:prstGeom>
+          <a:solidFill>
+            <a:srgbClr val="2563EB"/>
+          </a:solidFill>
+          <a:ln>
+            <a:noFill/>
+          </a:ln>
+        </p:spPr>
+        <p:style>
+          <a:lnRef idx="1">
+            <a:schemeClr val="accent1"/>
+          </a:lnRef>
+          <a:fillRef idx="3">
+            <a:schemeClr val="accent1"/>
+          </a:fillRef>
+          <a:effectRef idx="2">
+            <a:schemeClr val="accent1"/>
+          </a:effectRef>
+          <a:fontRef idx="minor">
+            <a:schemeClr val="lt1"/>
+          </a:fontRef>
+        </p:style>
+        <p:txBody>
+          <a:bodyPr rtlCol="0" anchor="ctr"/>
+          <a:lstStyle/>
+          <a:p>
+            <a:pPr algn="ctr"/>
+          </a:p>
+        </p:txBody>
+      </p:sp>
+      <p:sp>
+        <p:nvSpPr>
+          <p:cNvPr id="5" name="Rectangle 4"/>
+          <p:cNvSpPr/>
+          <p:nvPr/>
+        </p:nvSpPr>
+        <p:spPr>
+          <a:xfrm>
+            <a:off x="0" y="6446520"/>
+            <a:ext cx="12191695" cy="411480"/>
+          </a:xfrm>
+          <a:prstGeom prst="rect">
+            <a:avLst/>
+          </a:prstGeom>
+          <a:solidFill>
+            <a:srgbClr val="F1F5F9"/>
+          </a:solidFill>
+          <a:ln>
+            <a:noFill/>
+          </a:ln>
+        </p:spPr>
+        <p:style>
+          <a:lnRef idx="1">
+            <a:schemeClr val="accent1"/>
+          </a:lnRef>
+          <a:fillRef idx="3">
+            <a:schemeClr val="accent1"/>
+          </a:fillRef>
+          <a:effectRef idx="2">
+            <a:schemeClr val="accent1"/>
+          </a:effectRef>
+          <a:fontRef idx="minor">
+            <a:schemeClr val="lt1"/>
+          </a:fontRef>
+        </p:style>
+        <p:txBody>
+          <a:bodyPr rtlCol="0" anchor="ctr"/>
+          <a:lstStyle/>
+          <a:p>
+            <a:pPr algn="ctr"/>
+          </a:p>
+        </p:txBody>
+      </p:sp>
+      <p:sp>
+        <p:nvSpPr>
+          <p:cNvPr id="6" name="TextBox 5"/>
+          <p:cNvSpPr txBox="1"/>
+          <p:nvPr/>
+        </p:nvSpPr>
+        <p:spPr>
+          <a:xfrm>
+            <a:off x="640080" y="6510528"/>
+            <a:ext cx="5486400" cy="274320"/>
+          </a:xfrm>
+          <a:prstGeom prst="rect">
+            <a:avLst/>
+          </a:prstGeom>
+          <a:noFill/>
+        </p:spPr>
+        <p:txBody>
+          <a:bodyPr wrap="square">
+            <a:spAutoFit/>
+          </a:bodyPr>
+          <a:lstStyle/>
+          <a:p>
+            <a:pPr algn="l">
+              <a:defRPr sz="1000" b="0">
+                <a:solidFill>
+                  <a:srgbClr val="667085"/>
+                </a:solidFill>
+              </a:defRPr>
+            </a:pPr>
+            <a:r>
+              <a:t>Credara · Smart Commerce Infrastructure</a:t>
+            </a:r>
+          </a:p>
+        </p:txBody>
+      </p:sp>
+      <p:sp>
+        <p:nvSpPr>
+          <p:cNvPr id="7" name="TextBox 6"/>
+          <p:cNvSpPr txBox="1"/>
+          <p:nvPr/>
+        </p:nvSpPr>
+        <p:spPr>
+          <a:xfrm>
+            <a:off x="8686800" y="6510528"/>
+            <a:ext cx="3200400" cy="274320"/>
+          </a:xfrm>
+          <a:prstGeom prst="rect">
+            <a:avLst/>
+          </a:prstGeom>
+          <a:noFill/>
+        </p:spPr>
+        <p:txBody>
+          <a:bodyPr wrap="square">
+            <a:spAutoFit/>
+          </a:bodyPr>
+          <a:lstStyle/>
+          <a:p>
+            <a:pPr algn="r">
+              <a:defRPr sz="1000" b="0">
+                <a:solidFill>
+                  <a:srgbClr val="667085"/>
+                </a:solidFill>
+              </a:defRPr>
+            </a:pPr>
+            <a:r>
+              <a:t>credara-jet.vercel.app</a:t>
+            </a:r>
+          </a:p>
+        </p:txBody>
+      </p:sp>
+      <p:sp>
+        <p:nvSpPr>
+          <p:cNvPr id="8" name="TextBox 7"/>
+          <p:cNvSpPr txBox="1"/>
+          <p:nvPr/>
+        </p:nvSpPr>
+        <p:spPr>
+          <a:xfrm>
+            <a:off x="822960" y="1828800"/>
+            <a:ext cx="5029200" cy="4114800"/>
+          </a:xfrm>
+          <a:prstGeom prst="rect">
+            <a:avLst/>
+          </a:prstGeom>
+          <a:noFill/>
+        </p:spPr>
+        <p:txBody>
+          <a:bodyPr wrap="square">
+            <a:spAutoFit/>
+          </a:bodyPr>
+          <a:lstStyle/>
+          <a:p>
+            <a:pPr>
+              <a:spcAft>
+                <a:spcPts val="603"/>
+              </a:spcAft>
+              <a:defRPr sz="1500">
+                <a:solidFill>
+                  <a:srgbClr val="111827"/>
+                </a:solidFill>
+              </a:defRPr>
+            </a:pPr>
+            <a:r>
+              <a:t>Monorepo: Next.js · FastAPI · workers · Solidity 0.8.28</a:t>
+            </a:r>
+          </a:p>
+          <a:p>
+            <a:pPr>
+              <a:spcAft>
+                <a:spcPts val="603"/>
+              </a:spcAft>
+              <a:defRPr sz="1500">
+                <a:solidFill>
+                  <a:srgbClr val="111827"/>
+                </a:solidFill>
+              </a:defRPr>
+            </a:pPr>
+            <a:r>
+              <a:t>ProofRegistry · ReceivableRegistry · SmartLCFactory</a:t>
+            </a:r>
+          </a:p>
+          <a:p>
+            <a:pPr>
+              <a:spcAft>
+                <a:spcPts val="603"/>
+              </a:spcAft>
+              <a:defRPr sz="1500">
+                <a:solidFill>
+                  <a:srgbClr val="111827"/>
+                </a:solidFill>
+              </a:defRPr>
+            </a:pPr>
+            <a:r>
+              <a:t>CreditScoreAttestation · MockUSDC (IERC20-agnostic)</a:t>
+            </a:r>
+          </a:p>
+          <a:p>
+            <a:pPr>
+              <a:spcAft>
+                <a:spcPts val="603"/>
+              </a:spcAft>
+              <a:defRPr sz="1500">
+                <a:solidFill>
+                  <a:srgbClr val="111827"/>
+                </a:solidFill>
+              </a:defRPr>
+            </a:pPr>
+            <a:r>
+              <a:t>Outbox relayer · idempotency · AccessControl / Pausable</a:t>
+            </a:r>
+          </a:p>
+        </p:txBody>
+      </p:sp>
+      <p:sp>
+        <p:nvSpPr>
+          <p:cNvPr id="9" name="TextBox 8"/>
+          <p:cNvSpPr txBox="1"/>
+          <p:nvPr/>
+        </p:nvSpPr>
+        <p:spPr>
+          <a:xfrm>
+            <a:off x="6217920" y="1828800"/>
+            <a:ext cx="5303520" cy="4114800"/>
+          </a:xfrm>
+          <a:prstGeom prst="rect">
+            <a:avLst/>
+          </a:prstGeom>
+          <a:noFill/>
+        </p:spPr>
+        <p:txBody>
+          <a:bodyPr wrap="square">
+            <a:spAutoFit/>
+          </a:bodyPr>
+          <a:lstStyle/>
+          <a:p>
+            <a:pPr>
+              <a:spcAft>
+                <a:spcPts val="603"/>
+              </a:spcAft>
+              <a:defRPr sz="1500">
+                <a:solidFill>
+                  <a:srgbClr val="667085"/>
+                </a:solidFill>
+              </a:defRPr>
+            </a:pPr>
+            <a:r>
+              <a:t>Non-goals: no remittance MVP · no POS · no AED issuance</a:t>
+            </a:r>
+          </a:p>
+          <a:p>
+            <a:pPr>
+              <a:spcAft>
+                <a:spcPts val="603"/>
+              </a:spcAft>
+              <a:defRPr sz="1500">
+                <a:solidFill>
+                  <a:srgbClr val="667085"/>
+                </a:solidFill>
+              </a:defRPr>
+            </a:pPr>
+            <a:r>
+              <a:t>Docs: README · SUBMISSION.md · PROCESS_FLOWS.md</a:t>
+            </a:r>
+          </a:p>
+          <a:p>
+            <a:pPr>
+              <a:spcAft>
+                <a:spcPts val="603"/>
+              </a:spcAft>
+              <a:defRPr sz="1500">
+                <a:solidFill>
+                  <a:srgbClr val="667085"/>
+                </a:solidFill>
+              </a:defRPr>
+            </a:pPr>
+            <a:r>
+              <a:t>API: credara-api.vercel.app/docs</a:t>
+            </a:r>
+          </a:p>
+          <a:p>
+            <a:pPr>
+              <a:spcAft>
+                <a:spcPts val="603"/>
+              </a:spcAft>
+              <a:defRPr sz="1500">
+                <a:solidFill>
+                  <a:srgbClr val="667085"/>
+                </a:solidFill>
+              </a:defRPr>
+            </a:pPr>
+            <a:r>
+              <a:t>Contracts: Slither CI + Hardhat test suite</a:t>
+            </a:r>
+          </a:p>
+        </p:txBody>
+      </p:sp>
+      <p:sp>
+        <p:nvSpPr>
+          <p:cNvPr id="10" name="Rectangle 9"/>
+          <p:cNvSpPr/>
+          <p:nvPr/>
+        </p:nvSpPr>
+        <p:spPr>
+          <a:xfrm>
+            <a:off x="5943600" y="1691640"/>
+            <a:ext cx="45720" cy="4389120"/>
+          </a:xfrm>
+          <a:prstGeom prst="rect">
+            <a:avLst/>
+          </a:prstGeom>
+          <a:solidFill>
+            <a:srgbClr val="E7EAF1"/>
+          </a:solidFill>
+          <a:ln>
+            <a:noFill/>
+          </a:ln>
+        </p:spPr>
+        <p:style>
+          <a:lnRef idx="1">
+            <a:schemeClr val="accent1"/>
+          </a:lnRef>
+          <a:fillRef idx="3">
+            <a:schemeClr val="accent1"/>
+          </a:fillRef>
+          <a:effectRef idx="2">
+            <a:schemeClr val="accent1"/>
+          </a:effectRef>
+          <a:fontRef idx="minor">
+            <a:schemeClr val="lt1"/>
+          </a:fontRef>
+        </p:style>
+        <p:txBody>
+          <a:bodyPr rtlCol="0" anchor="ctr"/>
+          <a:lstStyle/>
+          <a:p>
+            <a:pPr algn="ctr"/>
+          </a:p>
+        </p:txBody>
+      </p:sp>
+    </p:spTree>
+  </p:cSld>
+  <p:clrMapOvr>
+    <a:masterClrMapping/>
+  </p:clrMapOvr>
+</p:sld>
+</file>
+
+<file path=ppt/slides/slide16.xml><?xml version="1.0" encoding="utf-8"?>
 <p:sld xmlns:a="http://schemas.openxmlformats.org/drawingml/2006/main" xmlns:p="http://schemas.openxmlformats.org/presentationml/2006/main" xmlns:r="http://schemas.openxmlformats.org/officeDocument/2006/relationships">
   <p:cSld>
     <p:bg>
@@ -5559,7 +7119,7 @@
               </a:defRPr>
             </a:pPr>
             <a:r>
-              <a:t>PROBLEM</a:t>
+              <a:t>THE AHA MOMENT</a:t>
             </a:r>
           </a:p>
         </p:txBody>
@@ -5594,7 +7154,7 @@
               </a:defRPr>
             </a:pPr>
             <a:r>
-              <a:t>Suppliers finance the world's trade — and wait months to get paid</a:t>
+              <a:t>Supplier paid after verified delivery — not after 45 days of paperwork</a:t>
             </a:r>
           </a:p>
         </p:txBody>
@@ -5757,24 +7317,122 @@
       </p:sp>
       <p:sp>
         <p:nvSpPr>
-          <p:cNvPr id="8" name="Rounded Rectangle 7"/>
+          <p:cNvPr id="8" name="TextBox 7"/>
+          <p:cNvSpPr txBox="1"/>
+          <p:nvPr/>
+        </p:nvSpPr>
+        <p:spPr>
+          <a:xfrm>
+            <a:off x="822960" y="1965960"/>
+            <a:ext cx="5303520" cy="1234440"/>
+          </a:xfrm>
+          <a:prstGeom prst="rect">
+            <a:avLst/>
+          </a:prstGeom>
+          <a:noFill/>
+        </p:spPr>
+        <p:txBody>
+          <a:bodyPr wrap="square">
+            <a:spAutoFit/>
+          </a:bodyPr>
+          <a:lstStyle/>
+          <a:p>
+            <a:pPr algn="l">
+              <a:defRPr sz="1800" b="1">
+                <a:solidFill>
+                  <a:srgbClr val="111827"/>
+                </a:solidFill>
+              </a:defRPr>
+            </a:pPr>
+            <a:r>
+              <a:t>1,000 MockUSDC released on Polygon Amoy after Smart LC verified delivery.</a:t>
+            </a:r>
+            <a:br/>
+            <a:r>
+              <a:t>Bank LC would still be on day 3 of manual processing.</a:t>
+            </a:r>
+          </a:p>
+        </p:txBody>
+      </p:sp>
+      <p:sp>
+        <p:nvSpPr>
+          <p:cNvPr id="9" name="TextBox 8"/>
+          <p:cNvSpPr txBox="1"/>
+          <p:nvPr/>
+        </p:nvSpPr>
+        <p:spPr>
+          <a:xfrm>
+            <a:off x="822960" y="3246120"/>
+            <a:ext cx="5303520" cy="822960"/>
+          </a:xfrm>
+          <a:prstGeom prst="rect">
+            <a:avLst/>
+          </a:prstGeom>
+          <a:noFill/>
+        </p:spPr>
+        <p:txBody>
+          <a:bodyPr wrap="square">
+            <a:spAutoFit/>
+          </a:bodyPr>
+          <a:lstStyle/>
+          <a:p>
+            <a:pPr algn="l">
+              <a:defRPr sz="1500" b="0">
+                <a:solidFill>
+                  <a:srgbClr val="667085"/>
+                </a:solidFill>
+              </a:defRPr>
+            </a:pPr>
+            <a:r>
+              <a:t>Example: AED 250k invoice → 80% advance → funded same afternoon → released after delivery verify.</a:t>
+            </a:r>
+          </a:p>
+        </p:txBody>
+      </p:sp>
+      <p:pic>
+        <p:nvPicPr>
+          <p:cNvPr id="10" name="Picture 9" descr="polygonscan-tx.png"/>
+          <p:cNvPicPr>
+            <a:picLocks noChangeAspect="1"/>
+          </p:cNvPicPr>
+          <p:nvPr/>
+        </p:nvPicPr>
+        <p:blipFill>
+          <a:blip r:embed="rId2"/>
+          <a:stretch>
+            <a:fillRect/>
+          </a:stretch>
+        </p:blipFill>
+        <p:spPr>
+          <a:xfrm>
+            <a:off x="6400800" y="1920240"/>
+            <a:ext cx="5303520" cy="2983230"/>
+          </a:xfrm>
+          <a:prstGeom prst="rect">
+            <a:avLst/>
+          </a:prstGeom>
+        </p:spPr>
+      </p:pic>
+      <p:sp>
+        <p:nvSpPr>
+          <p:cNvPr id="11" name="Rounded Rectangle 10"/>
           <p:cNvSpPr/>
           <p:nvPr/>
         </p:nvSpPr>
         <p:spPr>
           <a:xfrm>
-            <a:off x="822960" y="1965960"/>
-            <a:ext cx="2377440" cy="1051560"/>
+            <a:off x="822960" y="5349240"/>
+            <a:ext cx="10515600" cy="685800"/>
           </a:xfrm>
           <a:prstGeom prst="roundRect">
             <a:avLst/>
           </a:prstGeom>
           <a:solidFill>
-            <a:srgbClr val="F8FAFC"/>
+            <a:srgbClr val="ECFDF5"/>
           </a:solidFill>
           <a:ln>
             <a:solidFill>
-              <a:srgbClr val="E2E8F0"/>
+              <a:srgbClr val="16A34A"/>
             </a:solidFill>
           </a:ln>
         </p:spPr>
@@ -5802,14 +7460,14 @@
       </p:sp>
       <p:sp>
         <p:nvSpPr>
-          <p:cNvPr id="9" name="TextBox 8"/>
-          <p:cNvSpPr txBox="1"/>
-          <p:nvPr/>
-        </p:nvSpPr>
-        <p:spPr>
-          <a:xfrm>
-            <a:off x="960120" y="2075688"/>
-            <a:ext cx="2103120" cy="502920"/>
+          <p:cNvPr id="12" name="TextBox 11"/>
+          <p:cNvSpPr txBox="1"/>
+          <p:nvPr/>
+        </p:nvSpPr>
+        <p:spPr>
+          <a:xfrm>
+            <a:off x="960120" y="5486400"/>
+            <a:ext cx="10241280" cy="457200"/>
           </a:xfrm>
           <a:prstGeom prst="rect">
             <a:avLst/>
@@ -5823,477 +7481,14 @@
           <a:lstStyle/>
           <a:p>
             <a:pPr algn="l">
-              <a:defRPr sz="2200" b="1">
-                <a:solidFill>
-                  <a:srgbClr val="2563EB"/>
-                </a:solidFill>
-              </a:defRPr>
-            </a:pPr>
-            <a:r>
-              <a:t>$2T+</a:t>
-            </a:r>
-          </a:p>
-        </p:txBody>
-      </p:sp>
-      <p:sp>
-        <p:nvSpPr>
-          <p:cNvPr id="10" name="TextBox 9"/>
-          <p:cNvSpPr txBox="1"/>
-          <p:nvPr/>
-        </p:nvSpPr>
-        <p:spPr>
-          <a:xfrm>
-            <a:off x="960120" y="2532888"/>
-            <a:ext cx="2103120" cy="411480"/>
-          </a:xfrm>
-          <a:prstGeom prst="rect">
-            <a:avLst/>
-          </a:prstGeom>
-          <a:noFill/>
-        </p:spPr>
-        <p:txBody>
-          <a:bodyPr wrap="square">
-            <a:spAutoFit/>
-          </a:bodyPr>
-          <a:lstStyle/>
-          <a:p>
-            <a:pPr algn="l">
-              <a:defRPr sz="1100" b="0">
-                <a:solidFill>
-                  <a:srgbClr val="667085"/>
-                </a:solidFill>
-              </a:defRPr>
-            </a:pPr>
-            <a:r>
-              <a:t>Unfilled trade finance demand</a:t>
-            </a:r>
-          </a:p>
-        </p:txBody>
-      </p:sp>
-      <p:sp>
-        <p:nvSpPr>
-          <p:cNvPr id="11" name="Rounded Rectangle 10"/>
-          <p:cNvSpPr/>
-          <p:nvPr/>
-        </p:nvSpPr>
-        <p:spPr>
-          <a:xfrm>
-            <a:off x="3337560" y="1965960"/>
-            <a:ext cx="2377440" cy="1051560"/>
-          </a:xfrm>
-          <a:prstGeom prst="roundRect">
-            <a:avLst/>
-          </a:prstGeom>
-          <a:solidFill>
-            <a:srgbClr val="F8FAFC"/>
-          </a:solidFill>
-          <a:ln>
-            <a:solidFill>
-              <a:srgbClr val="E2E8F0"/>
-            </a:solidFill>
-          </a:ln>
-        </p:spPr>
-        <p:style>
-          <a:lnRef idx="1">
-            <a:schemeClr val="accent1"/>
-          </a:lnRef>
-          <a:fillRef idx="3">
-            <a:schemeClr val="accent1"/>
-          </a:fillRef>
-          <a:effectRef idx="2">
-            <a:schemeClr val="accent1"/>
-          </a:effectRef>
-          <a:fontRef idx="minor">
-            <a:schemeClr val="lt1"/>
-          </a:fontRef>
-        </p:style>
-        <p:txBody>
-          <a:bodyPr rtlCol="0" anchor="ctr"/>
-          <a:lstStyle/>
-          <a:p>
-            <a:pPr algn="ctr"/>
-          </a:p>
-        </p:txBody>
-      </p:sp>
-      <p:sp>
-        <p:nvSpPr>
-          <p:cNvPr id="12" name="TextBox 11"/>
-          <p:cNvSpPr txBox="1"/>
-          <p:nvPr/>
-        </p:nvSpPr>
-        <p:spPr>
-          <a:xfrm>
-            <a:off x="3474720" y="2075688"/>
-            <a:ext cx="2103120" cy="502920"/>
-          </a:xfrm>
-          <a:prstGeom prst="rect">
-            <a:avLst/>
-          </a:prstGeom>
-          <a:noFill/>
-        </p:spPr>
-        <p:txBody>
-          <a:bodyPr wrap="square">
-            <a:spAutoFit/>
-          </a:bodyPr>
-          <a:lstStyle/>
-          <a:p>
-            <a:pPr algn="l">
-              <a:defRPr sz="2200" b="1">
-                <a:solidFill>
-                  <a:srgbClr val="2563EB"/>
-                </a:solidFill>
-              </a:defRPr>
-            </a:pPr>
-            <a:r>
-              <a:t>~40%</a:t>
-            </a:r>
-          </a:p>
-        </p:txBody>
-      </p:sp>
-      <p:sp>
-        <p:nvSpPr>
-          <p:cNvPr id="13" name="TextBox 12"/>
-          <p:cNvSpPr txBox="1"/>
-          <p:nvPr/>
-        </p:nvSpPr>
-        <p:spPr>
-          <a:xfrm>
-            <a:off x="3474720" y="2532888"/>
-            <a:ext cx="2103120" cy="411480"/>
-          </a:xfrm>
-          <a:prstGeom prst="rect">
-            <a:avLst/>
-          </a:prstGeom>
-          <a:noFill/>
-        </p:spPr>
-        <p:txBody>
-          <a:bodyPr wrap="square">
-            <a:spAutoFit/>
-          </a:bodyPr>
-          <a:lstStyle/>
-          <a:p>
-            <a:pPr algn="l">
-              <a:defRPr sz="1100" b="0">
-                <a:solidFill>
-                  <a:srgbClr val="667085"/>
-                </a:solidFill>
-              </a:defRPr>
-            </a:pPr>
-            <a:r>
-              <a:t>SME applications rejected</a:t>
-            </a:r>
-          </a:p>
-        </p:txBody>
-      </p:sp>
-      <p:sp>
-        <p:nvSpPr>
-          <p:cNvPr id="14" name="Rounded Rectangle 13"/>
-          <p:cNvSpPr/>
-          <p:nvPr/>
-        </p:nvSpPr>
-        <p:spPr>
-          <a:xfrm>
-            <a:off x="5852160" y="1965960"/>
-            <a:ext cx="2377440" cy="1051560"/>
-          </a:xfrm>
-          <a:prstGeom prst="roundRect">
-            <a:avLst/>
-          </a:prstGeom>
-          <a:solidFill>
-            <a:srgbClr val="F8FAFC"/>
-          </a:solidFill>
-          <a:ln>
-            <a:solidFill>
-              <a:srgbClr val="E2E8F0"/>
-            </a:solidFill>
-          </a:ln>
-        </p:spPr>
-        <p:style>
-          <a:lnRef idx="1">
-            <a:schemeClr val="accent1"/>
-          </a:lnRef>
-          <a:fillRef idx="3">
-            <a:schemeClr val="accent1"/>
-          </a:fillRef>
-          <a:effectRef idx="2">
-            <a:schemeClr val="accent1"/>
-          </a:effectRef>
-          <a:fontRef idx="minor">
-            <a:schemeClr val="lt1"/>
-          </a:fontRef>
-        </p:style>
-        <p:txBody>
-          <a:bodyPr rtlCol="0" anchor="ctr"/>
-          <a:lstStyle/>
-          <a:p>
-            <a:pPr algn="ctr"/>
-          </a:p>
-        </p:txBody>
-      </p:sp>
-      <p:sp>
-        <p:nvSpPr>
-          <p:cNvPr id="15" name="TextBox 14"/>
-          <p:cNvSpPr txBox="1"/>
-          <p:nvPr/>
-        </p:nvSpPr>
-        <p:spPr>
-          <a:xfrm>
-            <a:off x="5989320" y="2075688"/>
-            <a:ext cx="2103120" cy="502920"/>
-          </a:xfrm>
-          <a:prstGeom prst="rect">
-            <a:avLst/>
-          </a:prstGeom>
-          <a:noFill/>
-        </p:spPr>
-        <p:txBody>
-          <a:bodyPr wrap="square">
-            <a:spAutoFit/>
-          </a:bodyPr>
-          <a:lstStyle/>
-          <a:p>
-            <a:pPr algn="l">
-              <a:defRPr sz="2200" b="1">
-                <a:solidFill>
-                  <a:srgbClr val="2563EB"/>
-                </a:solidFill>
-              </a:defRPr>
-            </a:pPr>
-            <a:r>
-              <a:t>7–10 days</a:t>
-            </a:r>
-          </a:p>
-        </p:txBody>
-      </p:sp>
-      <p:sp>
-        <p:nvSpPr>
-          <p:cNvPr id="16" name="TextBox 15"/>
-          <p:cNvSpPr txBox="1"/>
-          <p:nvPr/>
-        </p:nvSpPr>
-        <p:spPr>
-          <a:xfrm>
-            <a:off x="5989320" y="2532888"/>
-            <a:ext cx="2103120" cy="411480"/>
-          </a:xfrm>
-          <a:prstGeom prst="rect">
-            <a:avLst/>
-          </a:prstGeom>
-          <a:noFill/>
-        </p:spPr>
-        <p:txBody>
-          <a:bodyPr wrap="square">
-            <a:spAutoFit/>
-          </a:bodyPr>
-          <a:lstStyle/>
-          <a:p>
-            <a:pPr algn="l">
-              <a:defRPr sz="1100" b="0">
-                <a:solidFill>
-                  <a:srgbClr val="667085"/>
-                </a:solidFill>
-              </a:defRPr>
-            </a:pPr>
-            <a:r>
-              <a:t>Traditional LC processing</a:t>
-            </a:r>
-          </a:p>
-        </p:txBody>
-      </p:sp>
-      <p:sp>
-        <p:nvSpPr>
-          <p:cNvPr id="17" name="Rounded Rectangle 16"/>
-          <p:cNvSpPr/>
-          <p:nvPr/>
-        </p:nvSpPr>
-        <p:spPr>
-          <a:xfrm>
-            <a:off x="8366760" y="1965960"/>
-            <a:ext cx="2377440" cy="1051560"/>
-          </a:xfrm>
-          <a:prstGeom prst="roundRect">
-            <a:avLst/>
-          </a:prstGeom>
-          <a:solidFill>
-            <a:srgbClr val="F8FAFC"/>
-          </a:solidFill>
-          <a:ln>
-            <a:solidFill>
-              <a:srgbClr val="E2E8F0"/>
-            </a:solidFill>
-          </a:ln>
-        </p:spPr>
-        <p:style>
-          <a:lnRef idx="1">
-            <a:schemeClr val="accent1"/>
-          </a:lnRef>
-          <a:fillRef idx="3">
-            <a:schemeClr val="accent1"/>
-          </a:fillRef>
-          <a:effectRef idx="2">
-            <a:schemeClr val="accent1"/>
-          </a:effectRef>
-          <a:fontRef idx="minor">
-            <a:schemeClr val="lt1"/>
-          </a:fontRef>
-        </p:style>
-        <p:txBody>
-          <a:bodyPr rtlCol="0" anchor="ctr"/>
-          <a:lstStyle/>
-          <a:p>
-            <a:pPr algn="ctr"/>
-          </a:p>
-        </p:txBody>
-      </p:sp>
-      <p:sp>
-        <p:nvSpPr>
-          <p:cNvPr id="18" name="TextBox 17"/>
-          <p:cNvSpPr txBox="1"/>
-          <p:nvPr/>
-        </p:nvSpPr>
-        <p:spPr>
-          <a:xfrm>
-            <a:off x="8503920" y="2075688"/>
-            <a:ext cx="2103120" cy="502920"/>
-          </a:xfrm>
-          <a:prstGeom prst="rect">
-            <a:avLst/>
-          </a:prstGeom>
-          <a:noFill/>
-        </p:spPr>
-        <p:txBody>
-          <a:bodyPr wrap="square">
-            <a:spAutoFit/>
-          </a:bodyPr>
-          <a:lstStyle/>
-          <a:p>
-            <a:pPr algn="l">
-              <a:defRPr sz="2200" b="1">
-                <a:solidFill>
-                  <a:srgbClr val="2563EB"/>
-                </a:solidFill>
-              </a:defRPr>
-            </a:pPr>
-            <a:r>
-              <a:t>45–90 days</a:t>
-            </a:r>
-          </a:p>
-        </p:txBody>
-      </p:sp>
-      <p:sp>
-        <p:nvSpPr>
-          <p:cNvPr id="19" name="TextBox 18"/>
-          <p:cNvSpPr txBox="1"/>
-          <p:nvPr/>
-        </p:nvSpPr>
-        <p:spPr>
-          <a:xfrm>
-            <a:off x="8503920" y="2532888"/>
-            <a:ext cx="2103120" cy="411480"/>
-          </a:xfrm>
-          <a:prstGeom prst="rect">
-            <a:avLst/>
-          </a:prstGeom>
-          <a:noFill/>
-        </p:spPr>
-        <p:txBody>
-          <a:bodyPr wrap="square">
-            <a:spAutoFit/>
-          </a:bodyPr>
-          <a:lstStyle/>
-          <a:p>
-            <a:pPr algn="l">
-              <a:defRPr sz="1100" b="0">
-                <a:solidFill>
-                  <a:srgbClr val="667085"/>
-                </a:solidFill>
-              </a:defRPr>
-            </a:pPr>
-            <a:r>
-              <a:t>Typical SME payment wait</a:t>
-            </a:r>
-          </a:p>
-        </p:txBody>
-      </p:sp>
-      <p:sp>
-        <p:nvSpPr>
-          <p:cNvPr id="20" name="TextBox 19"/>
-          <p:cNvSpPr txBox="1"/>
-          <p:nvPr/>
-        </p:nvSpPr>
-        <p:spPr>
-          <a:xfrm>
-            <a:off x="822960" y="3246120"/>
-            <a:ext cx="10515600" cy="2926080"/>
-          </a:xfrm>
-          <a:prstGeom prst="rect">
-            <a:avLst/>
-          </a:prstGeom>
-          <a:noFill/>
-        </p:spPr>
-        <p:txBody>
-          <a:bodyPr wrap="square">
-            <a:spAutoFit/>
-          </a:bodyPr>
-          <a:lstStyle/>
-          <a:p>
-            <a:pPr>
-              <a:spcAft>
-                <a:spcPts val="684"/>
-              </a:spcAft>
-              <a:defRPr sz="1700">
-                <a:solidFill>
-                  <a:srgbClr val="111827"/>
-                </a:solidFill>
-              </a:defRPr>
-            </a:pPr>
-            <a:r>
-              <a:t>Banks reject SMEs with weak paper trails — not weak businesses</a:t>
-            </a:r>
-          </a:p>
-          <a:p>
-            <a:pPr>
-              <a:spcAft>
-                <a:spcPts val="684"/>
-              </a:spcAft>
-              <a:defRPr sz="1700">
-                <a:solidFill>
-                  <a:srgbClr val="111827"/>
-                </a:solidFill>
-              </a:defRPr>
-            </a:pPr>
-            <a:r>
-              <a:t>Invoice fraud and duplicate financing make lenders blind to real delivery</a:t>
-            </a:r>
-          </a:p>
-          <a:p>
-            <a:pPr>
-              <a:spcAft>
-                <a:spcPts val="684"/>
-              </a:spcAft>
-              <a:defRPr sz="1700">
-                <a:solidFill>
-                  <a:srgbClr val="111827"/>
-                </a:solidFill>
-              </a:defRPr>
-            </a:pPr>
-            <a:r>
-              <a:t>UAE/Jebel Ali corridor: massive volume, same friction for suppliers</a:t>
-            </a:r>
-          </a:p>
-          <a:p>
-            <a:pPr>
-              <a:spcAft>
-                <a:spcPts val="684"/>
-              </a:spcAft>
-              <a:defRPr sz="1700">
-                <a:solidFill>
-                  <a:srgbClr val="111827"/>
-                </a:solidFill>
-              </a:defRPr>
-            </a:pPr>
-            <a:r>
-              <a:t>Consumer remittance and POS are crowded — the SME trade-finance slice is underserved</a:t>
+              <a:defRPr sz="1100" b="1">
+                <a:solidFill>
+                  <a:srgbClr val="16A34A"/>
+                </a:solidFill>
+              </a:defRPr>
+            </a:pPr>
+            <a:r>
+              <a:t>Verified release tx: https://amoy.polygonscan.com/tx/0x5743a885e54063da6c4056d73e4b49113918558fd09d8973c9074de8e57af9de</a:t>
             </a:r>
           </a:p>
         </p:txBody>
@@ -6354,7 +7549,7 @@
               </a:defRPr>
             </a:pPr>
             <a:r>
-              <a:t>SOLUTION</a:t>
+              <a:t>BEFORE · AFTER</a:t>
             </a:r>
           </a:p>
         </p:txBody>
@@ -6389,7 +7584,7 @@
               </a:defRPr>
             </a:pPr>
             <a:r>
-              <a:t>Turn delivery proof into finance-ready receivables — settle in hours, not months</a:t>
+              <a:t>Collapse 7–10 day LC friction → same-day proof-to-funding</a:t>
             </a:r>
           </a:p>
         </p:txBody>
@@ -6558,92 +7753,847 @@
         </p:nvSpPr>
         <p:spPr>
           <a:xfrm>
-            <a:off x="822960" y="2011680"/>
-            <a:ext cx="10515600" cy="4114800"/>
-          </a:xfrm>
-          <a:prstGeom prst="rect">
-            <a:avLst/>
-          </a:prstGeom>
-          <a:noFill/>
-        </p:spPr>
-        <p:txBody>
-          <a:bodyPr wrap="square">
-            <a:spAutoFit/>
-          </a:bodyPr>
-          <a:lstStyle/>
-          <a:p>
-            <a:pPr>
-              <a:spcAft>
-                <a:spcPts val="724"/>
-              </a:spcAft>
-              <a:defRPr sz="1800">
+            <a:off x="822960" y="1874519"/>
+            <a:ext cx="5029200" cy="365760"/>
+          </a:xfrm>
+          <a:prstGeom prst="rect">
+            <a:avLst/>
+          </a:prstGeom>
+          <a:noFill/>
+        </p:spPr>
+        <p:txBody>
+          <a:bodyPr wrap="square">
+            <a:spAutoFit/>
+          </a:bodyPr>
+          <a:lstStyle/>
+          <a:p>
+            <a:pPr algn="l">
+              <a:defRPr sz="1400" b="1">
+                <a:solidFill>
+                  <a:srgbClr val="667085"/>
+                </a:solidFill>
+              </a:defRPr>
+            </a:pPr>
+            <a:r>
+              <a:t>Traditional bank LC</a:t>
+            </a:r>
+          </a:p>
+        </p:txBody>
+      </p:sp>
+      <p:sp>
+        <p:nvSpPr>
+          <p:cNvPr id="9" name="TextBox 8"/>
+          <p:cNvSpPr txBox="1"/>
+          <p:nvPr/>
+        </p:nvSpPr>
+        <p:spPr>
+          <a:xfrm>
+            <a:off x="822960" y="2286000"/>
+            <a:ext cx="5029200" cy="411480"/>
+          </a:xfrm>
+          <a:prstGeom prst="rect">
+            <a:avLst/>
+          </a:prstGeom>
+          <a:noFill/>
+        </p:spPr>
+        <p:txBody>
+          <a:bodyPr wrap="square">
+            <a:spAutoFit/>
+          </a:bodyPr>
+          <a:lstStyle/>
+          <a:p>
+            <a:pPr algn="l">
+              <a:defRPr sz="1500" b="0">
+                <a:solidFill>
+                  <a:srgbClr val="667085"/>
+                </a:solidFill>
+              </a:defRPr>
+            </a:pPr>
+            <a:r>
+              <a:t>✗  7–10 days manual processing</a:t>
+            </a:r>
+          </a:p>
+        </p:txBody>
+      </p:sp>
+      <p:sp>
+        <p:nvSpPr>
+          <p:cNvPr id="10" name="TextBox 9"/>
+          <p:cNvSpPr txBox="1"/>
+          <p:nvPr/>
+        </p:nvSpPr>
+        <p:spPr>
+          <a:xfrm>
+            <a:off x="822960" y="2852928"/>
+            <a:ext cx="5029200" cy="411480"/>
+          </a:xfrm>
+          <a:prstGeom prst="rect">
+            <a:avLst/>
+          </a:prstGeom>
+          <a:noFill/>
+        </p:spPr>
+        <p:txBody>
+          <a:bodyPr wrap="square">
+            <a:spAutoFit/>
+          </a:bodyPr>
+          <a:lstStyle/>
+          <a:p>
+            <a:pPr algn="l">
+              <a:defRPr sz="1500" b="0">
+                <a:solidFill>
+                  <a:srgbClr val="667085"/>
+                </a:solidFill>
+              </a:defRPr>
+            </a:pPr>
+            <a:r>
+              <a:t>✗  Paper trails banks can't verify fast</a:t>
+            </a:r>
+          </a:p>
+        </p:txBody>
+      </p:sp>
+      <p:sp>
+        <p:nvSpPr>
+          <p:cNvPr id="11" name="TextBox 10"/>
+          <p:cNvSpPr txBox="1"/>
+          <p:nvPr/>
+        </p:nvSpPr>
+        <p:spPr>
+          <a:xfrm>
+            <a:off x="822960" y="3419856"/>
+            <a:ext cx="5029200" cy="411480"/>
+          </a:xfrm>
+          <a:prstGeom prst="rect">
+            <a:avLst/>
+          </a:prstGeom>
+          <a:noFill/>
+        </p:spPr>
+        <p:txBody>
+          <a:bodyPr wrap="square">
+            <a:spAutoFit/>
+          </a:bodyPr>
+          <a:lstStyle/>
+          <a:p>
+            <a:pPr algn="l">
+              <a:defRPr sz="1500" b="0">
+                <a:solidFill>
+                  <a:srgbClr val="667085"/>
+                </a:solidFill>
+              </a:defRPr>
+            </a:pPr>
+            <a:r>
+              <a:t>✗  ~40% SME applications rejected</a:t>
+            </a:r>
+          </a:p>
+        </p:txBody>
+      </p:sp>
+      <p:sp>
+        <p:nvSpPr>
+          <p:cNvPr id="12" name="TextBox 11"/>
+          <p:cNvSpPr txBox="1"/>
+          <p:nvPr/>
+        </p:nvSpPr>
+        <p:spPr>
+          <a:xfrm>
+            <a:off x="822960" y="3986784"/>
+            <a:ext cx="5029200" cy="411480"/>
+          </a:xfrm>
+          <a:prstGeom prst="rect">
+            <a:avLst/>
+          </a:prstGeom>
+          <a:noFill/>
+        </p:spPr>
+        <p:txBody>
+          <a:bodyPr wrap="square">
+            <a:spAutoFit/>
+          </a:bodyPr>
+          <a:lstStyle/>
+          <a:p>
+            <a:pPr algn="l">
+              <a:defRPr sz="1500" b="0">
+                <a:solidFill>
+                  <a:srgbClr val="667085"/>
+                </a:solidFill>
+              </a:defRPr>
+            </a:pPr>
+            <a:r>
+              <a:t>✗  Supplier waits 45–90 days to get paid</a:t>
+            </a:r>
+          </a:p>
+        </p:txBody>
+      </p:sp>
+      <p:sp>
+        <p:nvSpPr>
+          <p:cNvPr id="13" name="TextBox 12"/>
+          <p:cNvSpPr txBox="1"/>
+          <p:nvPr/>
+        </p:nvSpPr>
+        <p:spPr>
+          <a:xfrm>
+            <a:off x="6400800" y="1874519"/>
+            <a:ext cx="5029200" cy="365760"/>
+          </a:xfrm>
+          <a:prstGeom prst="rect">
+            <a:avLst/>
+          </a:prstGeom>
+          <a:noFill/>
+        </p:spPr>
+        <p:txBody>
+          <a:bodyPr wrap="square">
+            <a:spAutoFit/>
+          </a:bodyPr>
+          <a:lstStyle/>
+          <a:p>
+            <a:pPr algn="l">
+              <a:defRPr sz="1400" b="1">
+                <a:solidFill>
+                  <a:srgbClr val="2563EB"/>
+                </a:solidFill>
+              </a:defRPr>
+            </a:pPr>
+            <a:r>
+              <a:t>Credara (live today)</a:t>
+            </a:r>
+          </a:p>
+        </p:txBody>
+      </p:sp>
+      <p:sp>
+        <p:nvSpPr>
+          <p:cNvPr id="14" name="TextBox 13"/>
+          <p:cNvSpPr txBox="1"/>
+          <p:nvPr/>
+        </p:nvSpPr>
+        <p:spPr>
+          <a:xfrm>
+            <a:off x="6400800" y="2286000"/>
+            <a:ext cx="5029200" cy="411480"/>
+          </a:xfrm>
+          <a:prstGeom prst="rect">
+            <a:avLst/>
+          </a:prstGeom>
+          <a:noFill/>
+        </p:spPr>
+        <p:txBody>
+          <a:bodyPr wrap="square">
+            <a:spAutoFit/>
+          </a:bodyPr>
+          <a:lstStyle/>
+          <a:p>
+            <a:pPr algn="l">
+              <a:defRPr sz="1500" b="1">
                 <a:solidFill>
                   <a:srgbClr val="111827"/>
                 </a:solidFill>
               </a:defRPr>
             </a:pPr>
             <a:r>
-              <a:t>Buyer confirms the invoice; delivery proof is verified — receivable becomes financiable</a:t>
-            </a:r>
-          </a:p>
-          <a:p>
-            <a:pPr>
-              <a:spcAft>
-                <a:spcPts val="724"/>
-              </a:spcAft>
-              <a:defRPr sz="1800">
+              <a:t>✓  Buyer confirms + delivery proof verified</a:t>
+            </a:r>
+          </a:p>
+        </p:txBody>
+      </p:sp>
+      <p:sp>
+        <p:nvSpPr>
+          <p:cNvPr id="15" name="TextBox 14"/>
+          <p:cNvSpPr txBox="1"/>
+          <p:nvPr/>
+        </p:nvSpPr>
+        <p:spPr>
+          <a:xfrm>
+            <a:off x="6400800" y="2852928"/>
+            <a:ext cx="5029200" cy="411480"/>
+          </a:xfrm>
+          <a:prstGeom prst="rect">
+            <a:avLst/>
+          </a:prstGeom>
+          <a:noFill/>
+        </p:spPr>
+        <p:txBody>
+          <a:bodyPr wrap="square">
+            <a:spAutoFit/>
+          </a:bodyPr>
+          <a:lstStyle/>
+          <a:p>
+            <a:pPr algn="l">
+              <a:defRPr sz="1500" b="1">
                 <a:solidFill>
                   <a:srgbClr val="111827"/>
                 </a:solidFill>
               </a:defRPr>
             </a:pPr>
             <a:r>
-              <a:t>Proof anchored on Polygon (documents stay private; hashes are tamper-evident)</a:t>
-            </a:r>
-          </a:p>
-          <a:p>
-            <a:pPr>
-              <a:spcAft>
-                <a:spcPts val="724"/>
-              </a:spcAft>
-              <a:defRPr sz="1800">
+              <a:t>✓  Proof hash anchored on Polygon</a:t>
+            </a:r>
+          </a:p>
+        </p:txBody>
+      </p:sp>
+      <p:sp>
+        <p:nvSpPr>
+          <p:cNvPr id="16" name="TextBox 15"/>
+          <p:cNvSpPr txBox="1"/>
+          <p:nvPr/>
+        </p:nvSpPr>
+        <p:spPr>
+          <a:xfrm>
+            <a:off x="6400800" y="3419856"/>
+            <a:ext cx="5029200" cy="411480"/>
+          </a:xfrm>
+          <a:prstGeom prst="rect">
+            <a:avLst/>
+          </a:prstGeom>
+          <a:noFill/>
+        </p:spPr>
+        <p:txBody>
+          <a:bodyPr wrap="square">
+            <a:spAutoFit/>
+          </a:bodyPr>
+          <a:lstStyle/>
+          <a:p>
+            <a:pPr algn="l">
+              <a:defRPr sz="1500" b="1">
                 <a:solidFill>
                   <a:srgbClr val="111827"/>
                 </a:solidFill>
               </a:defRPr>
             </a:pPr>
             <a:r>
-              <a:t>Financier funds programmable Smart LC escrow; release only after verified delivery</a:t>
-            </a:r>
-          </a:p>
-          <a:p>
-            <a:pPr>
-              <a:spcAft>
-                <a:spcPts val="724"/>
-              </a:spcAft>
-              <a:defRPr sz="1800">
+              <a:t>✓  Financier funds Smart LC escrow</a:t>
+            </a:r>
+          </a:p>
+        </p:txBody>
+      </p:sp>
+      <p:sp>
+        <p:nvSpPr>
+          <p:cNvPr id="17" name="TextBox 16"/>
+          <p:cNvSpPr txBox="1"/>
+          <p:nvPr/>
+        </p:nvSpPr>
+        <p:spPr>
+          <a:xfrm>
+            <a:off x="6400800" y="3986784"/>
+            <a:ext cx="5029200" cy="411480"/>
+          </a:xfrm>
+          <a:prstGeom prst="rect">
+            <a:avLst/>
+          </a:prstGeom>
+          <a:noFill/>
+        </p:spPr>
+        <p:txBody>
+          <a:bodyPr wrap="square">
+            <a:spAutoFit/>
+          </a:bodyPr>
+          <a:lstStyle/>
+          <a:p>
+            <a:pPr algn="l">
+              <a:defRPr sz="1500" b="1">
                 <a:solidFill>
                   <a:srgbClr val="111827"/>
                 </a:solidFill>
               </a:defRPr>
             </a:pPr>
             <a:r>
-              <a:t>Four enterprise workspaces — SME, Buyer, Financier, Admin — one shared trust record</a:t>
-            </a:r>
-          </a:p>
-          <a:p>
-            <a:pPr>
-              <a:spcAft>
-                <a:spcPts val="724"/>
-              </a:spcAft>
-              <a:defRPr sz="1800">
-                <a:solidFill>
-                  <a:srgbClr val="111827"/>
-                </a:solidFill>
-              </a:defRPr>
-            </a:pPr>
-            <a:r>
-              <a:t>Outcome: collapse 7–10 day LC friction toward same-day proof-to-funding in one corridor</a:t>
+              <a:t>✓  Stablecoin released same day after verify</a:t>
+            </a:r>
+          </a:p>
+        </p:txBody>
+      </p:sp>
+      <p:sp>
+        <p:nvSpPr>
+          <p:cNvPr id="18" name="Rectangle 17"/>
+          <p:cNvSpPr/>
+          <p:nvPr/>
+        </p:nvSpPr>
+        <p:spPr>
+          <a:xfrm>
+            <a:off x="6172200" y="1783080"/>
+            <a:ext cx="45720" cy="4114800"/>
+          </a:xfrm>
+          <a:prstGeom prst="rect">
+            <a:avLst/>
+          </a:prstGeom>
+          <a:solidFill>
+            <a:srgbClr val="E7EAF1"/>
+          </a:solidFill>
+          <a:ln>
+            <a:noFill/>
+          </a:ln>
+        </p:spPr>
+        <p:style>
+          <a:lnRef idx="1">
+            <a:schemeClr val="accent1"/>
+          </a:lnRef>
+          <a:fillRef idx="3">
+            <a:schemeClr val="accent1"/>
+          </a:fillRef>
+          <a:effectRef idx="2">
+            <a:schemeClr val="accent1"/>
+          </a:effectRef>
+          <a:fontRef idx="minor">
+            <a:schemeClr val="lt1"/>
+          </a:fontRef>
+        </p:style>
+        <p:txBody>
+          <a:bodyPr rtlCol="0" anchor="ctr"/>
+          <a:lstStyle/>
+          <a:p>
+            <a:pPr algn="ctr"/>
+          </a:p>
+        </p:txBody>
+      </p:sp>
+      <p:sp>
+        <p:nvSpPr>
+          <p:cNvPr id="19" name="Rounded Rectangle 18"/>
+          <p:cNvSpPr/>
+          <p:nvPr/>
+        </p:nvSpPr>
+        <p:spPr>
+          <a:xfrm>
+            <a:off x="822960" y="4892040"/>
+            <a:ext cx="2377440" cy="960120"/>
+          </a:xfrm>
+          <a:prstGeom prst="roundRect">
+            <a:avLst/>
+          </a:prstGeom>
+          <a:solidFill>
+            <a:srgbClr val="F8FAFC"/>
+          </a:solidFill>
+          <a:ln>
+            <a:solidFill>
+              <a:srgbClr val="E2E8F0"/>
+            </a:solidFill>
+          </a:ln>
+        </p:spPr>
+        <p:style>
+          <a:lnRef idx="1">
+            <a:schemeClr val="accent1"/>
+          </a:lnRef>
+          <a:fillRef idx="3">
+            <a:schemeClr val="accent1"/>
+          </a:fillRef>
+          <a:effectRef idx="2">
+            <a:schemeClr val="accent1"/>
+          </a:effectRef>
+          <a:fontRef idx="minor">
+            <a:schemeClr val="lt1"/>
+          </a:fontRef>
+        </p:style>
+        <p:txBody>
+          <a:bodyPr rtlCol="0" anchor="ctr"/>
+          <a:lstStyle/>
+          <a:p>
+            <a:pPr algn="ctr"/>
+          </a:p>
+        </p:txBody>
+      </p:sp>
+      <p:sp>
+        <p:nvSpPr>
+          <p:cNvPr id="20" name="TextBox 19"/>
+          <p:cNvSpPr txBox="1"/>
+          <p:nvPr/>
+        </p:nvSpPr>
+        <p:spPr>
+          <a:xfrm>
+            <a:off x="960120" y="5001768"/>
+            <a:ext cx="2103120" cy="502920"/>
+          </a:xfrm>
+          <a:prstGeom prst="rect">
+            <a:avLst/>
+          </a:prstGeom>
+          <a:noFill/>
+        </p:spPr>
+        <p:txBody>
+          <a:bodyPr wrap="square">
+            <a:spAutoFit/>
+          </a:bodyPr>
+          <a:lstStyle/>
+          <a:p>
+            <a:pPr algn="l">
+              <a:defRPr sz="2200" b="1">
+                <a:solidFill>
+                  <a:srgbClr val="2563EB"/>
+                </a:solidFill>
+              </a:defRPr>
+            </a:pPr>
+            <a:r>
+              <a:t>7–10 days</a:t>
+            </a:r>
+          </a:p>
+        </p:txBody>
+      </p:sp>
+      <p:sp>
+        <p:nvSpPr>
+          <p:cNvPr id="21" name="TextBox 20"/>
+          <p:cNvSpPr txBox="1"/>
+          <p:nvPr/>
+        </p:nvSpPr>
+        <p:spPr>
+          <a:xfrm>
+            <a:off x="960120" y="5458968"/>
+            <a:ext cx="2103120" cy="411480"/>
+          </a:xfrm>
+          <a:prstGeom prst="rect">
+            <a:avLst/>
+          </a:prstGeom>
+          <a:noFill/>
+        </p:spPr>
+        <p:txBody>
+          <a:bodyPr wrap="square">
+            <a:spAutoFit/>
+          </a:bodyPr>
+          <a:lstStyle/>
+          <a:p>
+            <a:pPr algn="l">
+              <a:defRPr sz="1100" b="0">
+                <a:solidFill>
+                  <a:srgbClr val="667085"/>
+                </a:solidFill>
+              </a:defRPr>
+            </a:pPr>
+            <a:r>
+              <a:t>Bank LC</a:t>
+            </a:r>
+          </a:p>
+        </p:txBody>
+      </p:sp>
+      <p:sp>
+        <p:nvSpPr>
+          <p:cNvPr id="22" name="Rounded Rectangle 21"/>
+          <p:cNvSpPr/>
+          <p:nvPr/>
+        </p:nvSpPr>
+        <p:spPr>
+          <a:xfrm>
+            <a:off x="3337560" y="4892040"/>
+            <a:ext cx="2377440" cy="960120"/>
+          </a:xfrm>
+          <a:prstGeom prst="roundRect">
+            <a:avLst/>
+          </a:prstGeom>
+          <a:solidFill>
+            <a:srgbClr val="F8FAFC"/>
+          </a:solidFill>
+          <a:ln>
+            <a:solidFill>
+              <a:srgbClr val="E2E8F0"/>
+            </a:solidFill>
+          </a:ln>
+        </p:spPr>
+        <p:style>
+          <a:lnRef idx="1">
+            <a:schemeClr val="accent1"/>
+          </a:lnRef>
+          <a:fillRef idx="3">
+            <a:schemeClr val="accent1"/>
+          </a:fillRef>
+          <a:effectRef idx="2">
+            <a:schemeClr val="accent1"/>
+          </a:effectRef>
+          <a:fontRef idx="minor">
+            <a:schemeClr val="lt1"/>
+          </a:fontRef>
+        </p:style>
+        <p:txBody>
+          <a:bodyPr rtlCol="0" anchor="ctr"/>
+          <a:lstStyle/>
+          <a:p>
+            <a:pPr algn="ctr"/>
+          </a:p>
+        </p:txBody>
+      </p:sp>
+      <p:sp>
+        <p:nvSpPr>
+          <p:cNvPr id="23" name="TextBox 22"/>
+          <p:cNvSpPr txBox="1"/>
+          <p:nvPr/>
+        </p:nvSpPr>
+        <p:spPr>
+          <a:xfrm>
+            <a:off x="3474720" y="5001768"/>
+            <a:ext cx="2103120" cy="502920"/>
+          </a:xfrm>
+          <a:prstGeom prst="rect">
+            <a:avLst/>
+          </a:prstGeom>
+          <a:noFill/>
+        </p:spPr>
+        <p:txBody>
+          <a:bodyPr wrap="square">
+            <a:spAutoFit/>
+          </a:bodyPr>
+          <a:lstStyle/>
+          <a:p>
+            <a:pPr algn="l">
+              <a:defRPr sz="2200" b="1">
+                <a:solidFill>
+                  <a:srgbClr val="2563EB"/>
+                </a:solidFill>
+              </a:defRPr>
+            </a:pPr>
+            <a:r>
+              <a:t>45–90 days</a:t>
+            </a:r>
+          </a:p>
+        </p:txBody>
+      </p:sp>
+      <p:sp>
+        <p:nvSpPr>
+          <p:cNvPr id="24" name="TextBox 23"/>
+          <p:cNvSpPr txBox="1"/>
+          <p:nvPr/>
+        </p:nvSpPr>
+        <p:spPr>
+          <a:xfrm>
+            <a:off x="3474720" y="5458968"/>
+            <a:ext cx="2103120" cy="411480"/>
+          </a:xfrm>
+          <a:prstGeom prst="rect">
+            <a:avLst/>
+          </a:prstGeom>
+          <a:noFill/>
+        </p:spPr>
+        <p:txBody>
+          <a:bodyPr wrap="square">
+            <a:spAutoFit/>
+          </a:bodyPr>
+          <a:lstStyle/>
+          <a:p>
+            <a:pPr algn="l">
+              <a:defRPr sz="1100" b="0">
+                <a:solidFill>
+                  <a:srgbClr val="667085"/>
+                </a:solidFill>
+              </a:defRPr>
+            </a:pPr>
+            <a:r>
+              <a:t>SME wait</a:t>
+            </a:r>
+          </a:p>
+        </p:txBody>
+      </p:sp>
+      <p:sp>
+        <p:nvSpPr>
+          <p:cNvPr id="25" name="Rounded Rectangle 24"/>
+          <p:cNvSpPr/>
+          <p:nvPr/>
+        </p:nvSpPr>
+        <p:spPr>
+          <a:xfrm>
+            <a:off x="5852160" y="4892040"/>
+            <a:ext cx="2377440" cy="960120"/>
+          </a:xfrm>
+          <a:prstGeom prst="roundRect">
+            <a:avLst/>
+          </a:prstGeom>
+          <a:solidFill>
+            <a:srgbClr val="F8FAFC"/>
+          </a:solidFill>
+          <a:ln>
+            <a:solidFill>
+              <a:srgbClr val="E2E8F0"/>
+            </a:solidFill>
+          </a:ln>
+        </p:spPr>
+        <p:style>
+          <a:lnRef idx="1">
+            <a:schemeClr val="accent1"/>
+          </a:lnRef>
+          <a:fillRef idx="3">
+            <a:schemeClr val="accent1"/>
+          </a:fillRef>
+          <a:effectRef idx="2">
+            <a:schemeClr val="accent1"/>
+          </a:effectRef>
+          <a:fontRef idx="minor">
+            <a:schemeClr val="lt1"/>
+          </a:fontRef>
+        </p:style>
+        <p:txBody>
+          <a:bodyPr rtlCol="0" anchor="ctr"/>
+          <a:lstStyle/>
+          <a:p>
+            <a:pPr algn="ctr"/>
+          </a:p>
+        </p:txBody>
+      </p:sp>
+      <p:sp>
+        <p:nvSpPr>
+          <p:cNvPr id="26" name="TextBox 25"/>
+          <p:cNvSpPr txBox="1"/>
+          <p:nvPr/>
+        </p:nvSpPr>
+        <p:spPr>
+          <a:xfrm>
+            <a:off x="5989320" y="5001768"/>
+            <a:ext cx="2103120" cy="502920"/>
+          </a:xfrm>
+          <a:prstGeom prst="rect">
+            <a:avLst/>
+          </a:prstGeom>
+          <a:noFill/>
+        </p:spPr>
+        <p:txBody>
+          <a:bodyPr wrap="square">
+            <a:spAutoFit/>
+          </a:bodyPr>
+          <a:lstStyle/>
+          <a:p>
+            <a:pPr algn="l">
+              <a:defRPr sz="2200" b="1">
+                <a:solidFill>
+                  <a:srgbClr val="2563EB"/>
+                </a:solidFill>
+              </a:defRPr>
+            </a:pPr>
+            <a:r>
+              <a:t>Same day</a:t>
+            </a:r>
+          </a:p>
+        </p:txBody>
+      </p:sp>
+      <p:sp>
+        <p:nvSpPr>
+          <p:cNvPr id="27" name="TextBox 26"/>
+          <p:cNvSpPr txBox="1"/>
+          <p:nvPr/>
+        </p:nvSpPr>
+        <p:spPr>
+          <a:xfrm>
+            <a:off x="5989320" y="5458968"/>
+            <a:ext cx="2103120" cy="411480"/>
+          </a:xfrm>
+          <a:prstGeom prst="rect">
+            <a:avLst/>
+          </a:prstGeom>
+          <a:noFill/>
+        </p:spPr>
+        <p:txBody>
+          <a:bodyPr wrap="square">
+            <a:spAutoFit/>
+          </a:bodyPr>
+          <a:lstStyle/>
+          <a:p>
+            <a:pPr algn="l">
+              <a:defRPr sz="1100" b="0">
+                <a:solidFill>
+                  <a:srgbClr val="667085"/>
+                </a:solidFill>
+              </a:defRPr>
+            </a:pPr>
+            <a:r>
+              <a:t>Proof-to-fund</a:t>
+            </a:r>
+          </a:p>
+        </p:txBody>
+      </p:sp>
+      <p:sp>
+        <p:nvSpPr>
+          <p:cNvPr id="28" name="Rounded Rectangle 27"/>
+          <p:cNvSpPr/>
+          <p:nvPr/>
+        </p:nvSpPr>
+        <p:spPr>
+          <a:xfrm>
+            <a:off x="8366760" y="4892040"/>
+            <a:ext cx="2377440" cy="960120"/>
+          </a:xfrm>
+          <a:prstGeom prst="roundRect">
+            <a:avLst/>
+          </a:prstGeom>
+          <a:solidFill>
+            <a:srgbClr val="F8FAFC"/>
+          </a:solidFill>
+          <a:ln>
+            <a:solidFill>
+              <a:srgbClr val="E2E8F0"/>
+            </a:solidFill>
+          </a:ln>
+        </p:spPr>
+        <p:style>
+          <a:lnRef idx="1">
+            <a:schemeClr val="accent1"/>
+          </a:lnRef>
+          <a:fillRef idx="3">
+            <a:schemeClr val="accent1"/>
+          </a:fillRef>
+          <a:effectRef idx="2">
+            <a:schemeClr val="accent1"/>
+          </a:effectRef>
+          <a:fontRef idx="minor">
+            <a:schemeClr val="lt1"/>
+          </a:fontRef>
+        </p:style>
+        <p:txBody>
+          <a:bodyPr rtlCol="0" anchor="ctr"/>
+          <a:lstStyle/>
+          <a:p>
+            <a:pPr algn="ctr"/>
+          </a:p>
+        </p:txBody>
+      </p:sp>
+      <p:sp>
+        <p:nvSpPr>
+          <p:cNvPr id="29" name="TextBox 28"/>
+          <p:cNvSpPr txBox="1"/>
+          <p:nvPr/>
+        </p:nvSpPr>
+        <p:spPr>
+          <a:xfrm>
+            <a:off x="8503920" y="5001768"/>
+            <a:ext cx="2103120" cy="502920"/>
+          </a:xfrm>
+          <a:prstGeom prst="rect">
+            <a:avLst/>
+          </a:prstGeom>
+          <a:noFill/>
+        </p:spPr>
+        <p:txBody>
+          <a:bodyPr wrap="square">
+            <a:spAutoFit/>
+          </a:bodyPr>
+          <a:lstStyle/>
+          <a:p>
+            <a:pPr algn="l">
+              <a:defRPr sz="2200" b="1">
+                <a:solidFill>
+                  <a:srgbClr val="2563EB"/>
+                </a:solidFill>
+              </a:defRPr>
+            </a:pPr>
+            <a:r>
+              <a:t>3 min</a:t>
+            </a:r>
+          </a:p>
+        </p:txBody>
+      </p:sp>
+      <p:sp>
+        <p:nvSpPr>
+          <p:cNvPr id="30" name="TextBox 29"/>
+          <p:cNvSpPr txBox="1"/>
+          <p:nvPr/>
+        </p:nvSpPr>
+        <p:spPr>
+          <a:xfrm>
+            <a:off x="8503920" y="5458968"/>
+            <a:ext cx="2103120" cy="411480"/>
+          </a:xfrm>
+          <a:prstGeom prst="rect">
+            <a:avLst/>
+          </a:prstGeom>
+          <a:noFill/>
+        </p:spPr>
+        <p:txBody>
+          <a:bodyPr wrap="square">
+            <a:spAutoFit/>
+          </a:bodyPr>
+          <a:lstStyle/>
+          <a:p>
+            <a:pPr algn="l">
+              <a:defRPr sz="1100" b="0">
+                <a:solidFill>
+                  <a:srgbClr val="667085"/>
+                </a:solidFill>
+              </a:defRPr>
+            </a:pPr>
+            <a:r>
+              <a:t>Judge Mode demo</a:t>
             </a:r>
           </a:p>
         </p:txBody>
@@ -6704,7 +8654,7 @@
               </a:defRPr>
             </a:pPr>
             <a:r>
-              <a:t>WHY NOW · WHY US</a:t>
+              <a:t>PROBLEM</a:t>
             </a:r>
           </a:p>
         </p:txBody>
@@ -6739,7 +8689,7 @@
               </a:defRPr>
             </a:pPr>
             <a:r>
-              <a:t>Regulation, market pain, and a shipped stack converge</a:t>
+              <a:t>Suppliers finance the world's trade — and wait months to get paid</a:t>
             </a:r>
           </a:p>
         </p:txBody>
@@ -6902,259 +8852,25 @@
       </p:sp>
       <p:sp>
         <p:nvSpPr>
-          <p:cNvPr id="8" name="TextBox 7"/>
-          <p:cNvSpPr txBox="1"/>
-          <p:nvPr/>
-        </p:nvSpPr>
-        <p:spPr>
-          <a:xfrm>
-            <a:off x="822960" y="1874519"/>
-            <a:ext cx="5029200" cy="365760"/>
-          </a:xfrm>
-          <a:prstGeom prst="rect">
-            <a:avLst/>
-          </a:prstGeom>
-          <a:noFill/>
-        </p:spPr>
-        <p:txBody>
-          <a:bodyPr wrap="square">
-            <a:spAutoFit/>
-          </a:bodyPr>
-          <a:lstStyle/>
-          <a:p>
-            <a:pPr algn="l">
-              <a:defRPr sz="1400" b="1">
-                <a:solidFill>
-                  <a:srgbClr val="2563EB"/>
-                </a:solidFill>
-              </a:defRPr>
-            </a:pPr>
-            <a:r>
-              <a:t>Why now</a:t>
-            </a:r>
-          </a:p>
-        </p:txBody>
-      </p:sp>
-      <p:sp>
-        <p:nvSpPr>
-          <p:cNvPr id="9" name="TextBox 8"/>
-          <p:cNvSpPr txBox="1"/>
-          <p:nvPr/>
-        </p:nvSpPr>
-        <p:spPr>
-          <a:xfrm>
-            <a:off x="822960" y="2240280"/>
-            <a:ext cx="5303520" cy="3657600"/>
-          </a:xfrm>
-          <a:prstGeom prst="rect">
-            <a:avLst/>
-          </a:prstGeom>
-          <a:noFill/>
-        </p:spPr>
-        <p:txBody>
-          <a:bodyPr wrap="square">
-            <a:spAutoFit/>
-          </a:bodyPr>
-          <a:lstStyle/>
-          <a:p>
-            <a:pPr>
-              <a:spcAft>
-                <a:spcPts val="603"/>
-              </a:spcAft>
-              <a:defRPr sz="1500">
-                <a:solidFill>
-                  <a:srgbClr val="111827"/>
-                </a:solidFill>
-              </a:defRPr>
-            </a:pPr>
-            <a:r>
-              <a:t>UAE CBUAE PTSR opens regulated AED stablecoin B2B settlement</a:t>
-            </a:r>
-          </a:p>
-          <a:p>
-            <a:pPr>
-              <a:spcAft>
-                <a:spcPts val="603"/>
-              </a:spcAft>
-              <a:defRPr sz="1500">
-                <a:solidFill>
-                  <a:srgbClr val="111827"/>
-                </a:solidFill>
-              </a:defRPr>
-            </a:pPr>
-            <a:r>
-              <a:t>Polygon enterprise infra: low-cost escrow + proof anchoring at scale</a:t>
-            </a:r>
-          </a:p>
-          <a:p>
-            <a:pPr>
-              <a:spcAft>
-                <a:spcPts val="603"/>
-              </a:spcAft>
-              <a:defRPr sz="1500">
-                <a:solidFill>
-                  <a:srgbClr val="111827"/>
-                </a:solidFill>
-              </a:defRPr>
-            </a:pPr>
-            <a:r>
-              <a:t>SME trade-finance gap widening as corridors digitize faster than bank LC rails</a:t>
-            </a:r>
-          </a:p>
-          <a:p>
-            <a:pPr>
-              <a:spcAft>
-                <a:spcPts val="603"/>
-              </a:spcAft>
-              <a:defRPr sz="1500">
-                <a:solidFill>
-                  <a:srgbClr val="111827"/>
-                </a:solidFill>
-              </a:defRPr>
-            </a:pPr>
-            <a:r>
-              <a:t>Smart Commerce / DIFC ecosystem primed for corridor pilots</a:t>
-            </a:r>
-          </a:p>
-        </p:txBody>
-      </p:sp>
-      <p:sp>
-        <p:nvSpPr>
-          <p:cNvPr id="10" name="TextBox 9"/>
-          <p:cNvSpPr txBox="1"/>
-          <p:nvPr/>
-        </p:nvSpPr>
-        <p:spPr>
-          <a:xfrm>
-            <a:off x="6400800" y="1874519"/>
-            <a:ext cx="5029200" cy="365760"/>
-          </a:xfrm>
-          <a:prstGeom prst="rect">
-            <a:avLst/>
-          </a:prstGeom>
-          <a:noFill/>
-        </p:spPr>
-        <p:txBody>
-          <a:bodyPr wrap="square">
-            <a:spAutoFit/>
-          </a:bodyPr>
-          <a:lstStyle/>
-          <a:p>
-            <a:pPr algn="l">
-              <a:defRPr sz="1400" b="1">
-                <a:solidFill>
-                  <a:srgbClr val="2563EB"/>
-                </a:solidFill>
-              </a:defRPr>
-            </a:pPr>
-            <a:r>
-              <a:t>Why Credara</a:t>
-            </a:r>
-          </a:p>
-        </p:txBody>
-      </p:sp>
-      <p:sp>
-        <p:nvSpPr>
-          <p:cNvPr id="11" name="TextBox 10"/>
-          <p:cNvSpPr txBox="1"/>
-          <p:nvPr/>
-        </p:nvSpPr>
-        <p:spPr>
-          <a:xfrm>
-            <a:off x="6400800" y="2240280"/>
-            <a:ext cx="5303520" cy="3657600"/>
-          </a:xfrm>
-          <a:prstGeom prst="rect">
-            <a:avLst/>
-          </a:prstGeom>
-          <a:noFill/>
-        </p:spPr>
-        <p:txBody>
-          <a:bodyPr wrap="square">
-            <a:spAutoFit/>
-          </a:bodyPr>
-          <a:lstStyle/>
-          <a:p>
-            <a:pPr>
-              <a:spcAft>
-                <a:spcPts val="603"/>
-              </a:spcAft>
-              <a:defRPr sz="1500">
-                <a:solidFill>
-                  <a:srgbClr val="111827"/>
-                </a:solidFill>
-              </a:defRPr>
-            </a:pPr>
-            <a:r>
-              <a:t>Live monorepo on Vercel + Amoy — not slideware (test today)</a:t>
-            </a:r>
-          </a:p>
-          <a:p>
-            <a:pPr>
-              <a:spcAft>
-                <a:spcPts val="603"/>
-              </a:spcAft>
-              <a:defRPr sz="1500">
-                <a:solidFill>
-                  <a:srgbClr val="111827"/>
-                </a:solidFill>
-              </a:defRPr>
-            </a:pPr>
-            <a:r>
-              <a:t>Fail-closed chain: no fake Polygonscan; honest simulated vs anchored</a:t>
-            </a:r>
-          </a:p>
-          <a:p>
-            <a:pPr>
-              <a:spcAft>
-                <a:spcPts val="603"/>
-              </a:spcAft>
-              <a:defRPr sz="1500">
-                <a:solidFill>
-                  <a:srgbClr val="111827"/>
-                </a:solidFill>
-              </a:defRPr>
-            </a:pPr>
-            <a:r>
-              <a:t>Token-agnostic Smart LC — swap MockUSDC for licensed AED without rebuild</a:t>
-            </a:r>
-          </a:p>
-          <a:p>
-            <a:pPr>
-              <a:spcAft>
-                <a:spcPts val="603"/>
-              </a:spcAft>
-              <a:defRPr sz="1500">
-                <a:solidFill>
-                  <a:srgbClr val="111827"/>
-                </a:solidFill>
-              </a:defRPr>
-            </a:pPr>
-            <a:r>
-              <a:t>Founder: regulated banking + utilities scale + cryptographic governance (AIRG)</a:t>
-            </a:r>
-          </a:p>
-        </p:txBody>
-      </p:sp>
-      <p:sp>
-        <p:nvSpPr>
-          <p:cNvPr id="12" name="Rectangle 11"/>
+          <p:cNvPr id="8" name="Rounded Rectangle 7"/>
           <p:cNvSpPr/>
           <p:nvPr/>
         </p:nvSpPr>
         <p:spPr>
           <a:xfrm>
-            <a:off x="6172200" y="1783080"/>
-            <a:ext cx="45720" cy="4206240"/>
-          </a:xfrm>
-          <a:prstGeom prst="rect">
+            <a:off x="822960" y="1965960"/>
+            <a:ext cx="2377440" cy="1051560"/>
+          </a:xfrm>
+          <a:prstGeom prst="roundRect">
             <a:avLst/>
           </a:prstGeom>
           <a:solidFill>
-            <a:srgbClr val="E7EAF1"/>
+            <a:srgbClr val="F8FAFC"/>
           </a:solidFill>
           <a:ln>
-            <a:noFill/>
+            <a:solidFill>
+              <a:srgbClr val="E2E8F0"/>
+            </a:solidFill>
           </a:ln>
         </p:spPr>
         <p:style>
@@ -7176,6 +8892,504 @@
           <a:lstStyle/>
           <a:p>
             <a:pPr algn="ctr"/>
+          </a:p>
+        </p:txBody>
+      </p:sp>
+      <p:sp>
+        <p:nvSpPr>
+          <p:cNvPr id="9" name="TextBox 8"/>
+          <p:cNvSpPr txBox="1"/>
+          <p:nvPr/>
+        </p:nvSpPr>
+        <p:spPr>
+          <a:xfrm>
+            <a:off x="960120" y="2075688"/>
+            <a:ext cx="2103120" cy="502920"/>
+          </a:xfrm>
+          <a:prstGeom prst="rect">
+            <a:avLst/>
+          </a:prstGeom>
+          <a:noFill/>
+        </p:spPr>
+        <p:txBody>
+          <a:bodyPr wrap="square">
+            <a:spAutoFit/>
+          </a:bodyPr>
+          <a:lstStyle/>
+          <a:p>
+            <a:pPr algn="l">
+              <a:defRPr sz="2200" b="1">
+                <a:solidFill>
+                  <a:srgbClr val="2563EB"/>
+                </a:solidFill>
+              </a:defRPr>
+            </a:pPr>
+            <a:r>
+              <a:t>$2T+</a:t>
+            </a:r>
+          </a:p>
+        </p:txBody>
+      </p:sp>
+      <p:sp>
+        <p:nvSpPr>
+          <p:cNvPr id="10" name="TextBox 9"/>
+          <p:cNvSpPr txBox="1"/>
+          <p:nvPr/>
+        </p:nvSpPr>
+        <p:spPr>
+          <a:xfrm>
+            <a:off x="960120" y="2532888"/>
+            <a:ext cx="2103120" cy="411480"/>
+          </a:xfrm>
+          <a:prstGeom prst="rect">
+            <a:avLst/>
+          </a:prstGeom>
+          <a:noFill/>
+        </p:spPr>
+        <p:txBody>
+          <a:bodyPr wrap="square">
+            <a:spAutoFit/>
+          </a:bodyPr>
+          <a:lstStyle/>
+          <a:p>
+            <a:pPr algn="l">
+              <a:defRPr sz="1100" b="0">
+                <a:solidFill>
+                  <a:srgbClr val="667085"/>
+                </a:solidFill>
+              </a:defRPr>
+            </a:pPr>
+            <a:r>
+              <a:t>Unfilled trade finance demand</a:t>
+            </a:r>
+          </a:p>
+        </p:txBody>
+      </p:sp>
+      <p:sp>
+        <p:nvSpPr>
+          <p:cNvPr id="11" name="Rounded Rectangle 10"/>
+          <p:cNvSpPr/>
+          <p:nvPr/>
+        </p:nvSpPr>
+        <p:spPr>
+          <a:xfrm>
+            <a:off x="3337560" y="1965960"/>
+            <a:ext cx="2377440" cy="1051560"/>
+          </a:xfrm>
+          <a:prstGeom prst="roundRect">
+            <a:avLst/>
+          </a:prstGeom>
+          <a:solidFill>
+            <a:srgbClr val="F8FAFC"/>
+          </a:solidFill>
+          <a:ln>
+            <a:solidFill>
+              <a:srgbClr val="E2E8F0"/>
+            </a:solidFill>
+          </a:ln>
+        </p:spPr>
+        <p:style>
+          <a:lnRef idx="1">
+            <a:schemeClr val="accent1"/>
+          </a:lnRef>
+          <a:fillRef idx="3">
+            <a:schemeClr val="accent1"/>
+          </a:fillRef>
+          <a:effectRef idx="2">
+            <a:schemeClr val="accent1"/>
+          </a:effectRef>
+          <a:fontRef idx="minor">
+            <a:schemeClr val="lt1"/>
+          </a:fontRef>
+        </p:style>
+        <p:txBody>
+          <a:bodyPr rtlCol="0" anchor="ctr"/>
+          <a:lstStyle/>
+          <a:p>
+            <a:pPr algn="ctr"/>
+          </a:p>
+        </p:txBody>
+      </p:sp>
+      <p:sp>
+        <p:nvSpPr>
+          <p:cNvPr id="12" name="TextBox 11"/>
+          <p:cNvSpPr txBox="1"/>
+          <p:nvPr/>
+        </p:nvSpPr>
+        <p:spPr>
+          <a:xfrm>
+            <a:off x="3474720" y="2075688"/>
+            <a:ext cx="2103120" cy="502920"/>
+          </a:xfrm>
+          <a:prstGeom prst="rect">
+            <a:avLst/>
+          </a:prstGeom>
+          <a:noFill/>
+        </p:spPr>
+        <p:txBody>
+          <a:bodyPr wrap="square">
+            <a:spAutoFit/>
+          </a:bodyPr>
+          <a:lstStyle/>
+          <a:p>
+            <a:pPr algn="l">
+              <a:defRPr sz="2200" b="1">
+                <a:solidFill>
+                  <a:srgbClr val="2563EB"/>
+                </a:solidFill>
+              </a:defRPr>
+            </a:pPr>
+            <a:r>
+              <a:t>~40%</a:t>
+            </a:r>
+          </a:p>
+        </p:txBody>
+      </p:sp>
+      <p:sp>
+        <p:nvSpPr>
+          <p:cNvPr id="13" name="TextBox 12"/>
+          <p:cNvSpPr txBox="1"/>
+          <p:nvPr/>
+        </p:nvSpPr>
+        <p:spPr>
+          <a:xfrm>
+            <a:off x="3474720" y="2532888"/>
+            <a:ext cx="2103120" cy="411480"/>
+          </a:xfrm>
+          <a:prstGeom prst="rect">
+            <a:avLst/>
+          </a:prstGeom>
+          <a:noFill/>
+        </p:spPr>
+        <p:txBody>
+          <a:bodyPr wrap="square">
+            <a:spAutoFit/>
+          </a:bodyPr>
+          <a:lstStyle/>
+          <a:p>
+            <a:pPr algn="l">
+              <a:defRPr sz="1100" b="0">
+                <a:solidFill>
+                  <a:srgbClr val="667085"/>
+                </a:solidFill>
+              </a:defRPr>
+            </a:pPr>
+            <a:r>
+              <a:t>SME applications rejected</a:t>
+            </a:r>
+          </a:p>
+        </p:txBody>
+      </p:sp>
+      <p:sp>
+        <p:nvSpPr>
+          <p:cNvPr id="14" name="Rounded Rectangle 13"/>
+          <p:cNvSpPr/>
+          <p:nvPr/>
+        </p:nvSpPr>
+        <p:spPr>
+          <a:xfrm>
+            <a:off x="5852160" y="1965960"/>
+            <a:ext cx="2377440" cy="1051560"/>
+          </a:xfrm>
+          <a:prstGeom prst="roundRect">
+            <a:avLst/>
+          </a:prstGeom>
+          <a:solidFill>
+            <a:srgbClr val="F8FAFC"/>
+          </a:solidFill>
+          <a:ln>
+            <a:solidFill>
+              <a:srgbClr val="E2E8F0"/>
+            </a:solidFill>
+          </a:ln>
+        </p:spPr>
+        <p:style>
+          <a:lnRef idx="1">
+            <a:schemeClr val="accent1"/>
+          </a:lnRef>
+          <a:fillRef idx="3">
+            <a:schemeClr val="accent1"/>
+          </a:fillRef>
+          <a:effectRef idx="2">
+            <a:schemeClr val="accent1"/>
+          </a:effectRef>
+          <a:fontRef idx="minor">
+            <a:schemeClr val="lt1"/>
+          </a:fontRef>
+        </p:style>
+        <p:txBody>
+          <a:bodyPr rtlCol="0" anchor="ctr"/>
+          <a:lstStyle/>
+          <a:p>
+            <a:pPr algn="ctr"/>
+          </a:p>
+        </p:txBody>
+      </p:sp>
+      <p:sp>
+        <p:nvSpPr>
+          <p:cNvPr id="15" name="TextBox 14"/>
+          <p:cNvSpPr txBox="1"/>
+          <p:nvPr/>
+        </p:nvSpPr>
+        <p:spPr>
+          <a:xfrm>
+            <a:off x="5989320" y="2075688"/>
+            <a:ext cx="2103120" cy="502920"/>
+          </a:xfrm>
+          <a:prstGeom prst="rect">
+            <a:avLst/>
+          </a:prstGeom>
+          <a:noFill/>
+        </p:spPr>
+        <p:txBody>
+          <a:bodyPr wrap="square">
+            <a:spAutoFit/>
+          </a:bodyPr>
+          <a:lstStyle/>
+          <a:p>
+            <a:pPr algn="l">
+              <a:defRPr sz="2200" b="1">
+                <a:solidFill>
+                  <a:srgbClr val="2563EB"/>
+                </a:solidFill>
+              </a:defRPr>
+            </a:pPr>
+            <a:r>
+              <a:t>7–10 days</a:t>
+            </a:r>
+          </a:p>
+        </p:txBody>
+      </p:sp>
+      <p:sp>
+        <p:nvSpPr>
+          <p:cNvPr id="16" name="TextBox 15"/>
+          <p:cNvSpPr txBox="1"/>
+          <p:nvPr/>
+        </p:nvSpPr>
+        <p:spPr>
+          <a:xfrm>
+            <a:off x="5989320" y="2532888"/>
+            <a:ext cx="2103120" cy="411480"/>
+          </a:xfrm>
+          <a:prstGeom prst="rect">
+            <a:avLst/>
+          </a:prstGeom>
+          <a:noFill/>
+        </p:spPr>
+        <p:txBody>
+          <a:bodyPr wrap="square">
+            <a:spAutoFit/>
+          </a:bodyPr>
+          <a:lstStyle/>
+          <a:p>
+            <a:pPr algn="l">
+              <a:defRPr sz="1100" b="0">
+                <a:solidFill>
+                  <a:srgbClr val="667085"/>
+                </a:solidFill>
+              </a:defRPr>
+            </a:pPr>
+            <a:r>
+              <a:t>Traditional LC processing</a:t>
+            </a:r>
+          </a:p>
+        </p:txBody>
+      </p:sp>
+      <p:sp>
+        <p:nvSpPr>
+          <p:cNvPr id="17" name="Rounded Rectangle 16"/>
+          <p:cNvSpPr/>
+          <p:nvPr/>
+        </p:nvSpPr>
+        <p:spPr>
+          <a:xfrm>
+            <a:off x="8366760" y="1965960"/>
+            <a:ext cx="2377440" cy="1051560"/>
+          </a:xfrm>
+          <a:prstGeom prst="roundRect">
+            <a:avLst/>
+          </a:prstGeom>
+          <a:solidFill>
+            <a:srgbClr val="F8FAFC"/>
+          </a:solidFill>
+          <a:ln>
+            <a:solidFill>
+              <a:srgbClr val="E2E8F0"/>
+            </a:solidFill>
+          </a:ln>
+        </p:spPr>
+        <p:style>
+          <a:lnRef idx="1">
+            <a:schemeClr val="accent1"/>
+          </a:lnRef>
+          <a:fillRef idx="3">
+            <a:schemeClr val="accent1"/>
+          </a:fillRef>
+          <a:effectRef idx="2">
+            <a:schemeClr val="accent1"/>
+          </a:effectRef>
+          <a:fontRef idx="minor">
+            <a:schemeClr val="lt1"/>
+          </a:fontRef>
+        </p:style>
+        <p:txBody>
+          <a:bodyPr rtlCol="0" anchor="ctr"/>
+          <a:lstStyle/>
+          <a:p>
+            <a:pPr algn="ctr"/>
+          </a:p>
+        </p:txBody>
+      </p:sp>
+      <p:sp>
+        <p:nvSpPr>
+          <p:cNvPr id="18" name="TextBox 17"/>
+          <p:cNvSpPr txBox="1"/>
+          <p:nvPr/>
+        </p:nvSpPr>
+        <p:spPr>
+          <a:xfrm>
+            <a:off x="8503920" y="2075688"/>
+            <a:ext cx="2103120" cy="502920"/>
+          </a:xfrm>
+          <a:prstGeom prst="rect">
+            <a:avLst/>
+          </a:prstGeom>
+          <a:noFill/>
+        </p:spPr>
+        <p:txBody>
+          <a:bodyPr wrap="square">
+            <a:spAutoFit/>
+          </a:bodyPr>
+          <a:lstStyle/>
+          <a:p>
+            <a:pPr algn="l">
+              <a:defRPr sz="2200" b="1">
+                <a:solidFill>
+                  <a:srgbClr val="2563EB"/>
+                </a:solidFill>
+              </a:defRPr>
+            </a:pPr>
+            <a:r>
+              <a:t>45–90 days</a:t>
+            </a:r>
+          </a:p>
+        </p:txBody>
+      </p:sp>
+      <p:sp>
+        <p:nvSpPr>
+          <p:cNvPr id="19" name="TextBox 18"/>
+          <p:cNvSpPr txBox="1"/>
+          <p:nvPr/>
+        </p:nvSpPr>
+        <p:spPr>
+          <a:xfrm>
+            <a:off x="8503920" y="2532888"/>
+            <a:ext cx="2103120" cy="411480"/>
+          </a:xfrm>
+          <a:prstGeom prst="rect">
+            <a:avLst/>
+          </a:prstGeom>
+          <a:noFill/>
+        </p:spPr>
+        <p:txBody>
+          <a:bodyPr wrap="square">
+            <a:spAutoFit/>
+          </a:bodyPr>
+          <a:lstStyle/>
+          <a:p>
+            <a:pPr algn="l">
+              <a:defRPr sz="1100" b="0">
+                <a:solidFill>
+                  <a:srgbClr val="667085"/>
+                </a:solidFill>
+              </a:defRPr>
+            </a:pPr>
+            <a:r>
+              <a:t>Typical SME payment wait</a:t>
+            </a:r>
+          </a:p>
+        </p:txBody>
+      </p:sp>
+      <p:sp>
+        <p:nvSpPr>
+          <p:cNvPr id="20" name="TextBox 19"/>
+          <p:cNvSpPr txBox="1"/>
+          <p:nvPr/>
+        </p:nvSpPr>
+        <p:spPr>
+          <a:xfrm>
+            <a:off x="822960" y="3246120"/>
+            <a:ext cx="10515600" cy="2926080"/>
+          </a:xfrm>
+          <a:prstGeom prst="rect">
+            <a:avLst/>
+          </a:prstGeom>
+          <a:noFill/>
+        </p:spPr>
+        <p:txBody>
+          <a:bodyPr wrap="square">
+            <a:spAutoFit/>
+          </a:bodyPr>
+          <a:lstStyle/>
+          <a:p>
+            <a:pPr>
+              <a:spcAft>
+                <a:spcPts val="684"/>
+              </a:spcAft>
+              <a:defRPr sz="1700">
+                <a:solidFill>
+                  <a:srgbClr val="111827"/>
+                </a:solidFill>
+              </a:defRPr>
+            </a:pPr>
+            <a:r>
+              <a:t>Banks reject SMEs with weak paper trails — not weak businesses</a:t>
+            </a:r>
+          </a:p>
+          <a:p>
+            <a:pPr>
+              <a:spcAft>
+                <a:spcPts val="684"/>
+              </a:spcAft>
+              <a:defRPr sz="1700">
+                <a:solidFill>
+                  <a:srgbClr val="111827"/>
+                </a:solidFill>
+              </a:defRPr>
+            </a:pPr>
+            <a:r>
+              <a:t>Invoice fraud and duplicate financing make lenders blind to real delivery</a:t>
+            </a:r>
+          </a:p>
+          <a:p>
+            <a:pPr>
+              <a:spcAft>
+                <a:spcPts val="684"/>
+              </a:spcAft>
+              <a:defRPr sz="1700">
+                <a:solidFill>
+                  <a:srgbClr val="111827"/>
+                </a:solidFill>
+              </a:defRPr>
+            </a:pPr>
+            <a:r>
+              <a:t>UAE/Jebel Ali corridor: massive volume, same friction for suppliers</a:t>
+            </a:r>
+          </a:p>
+          <a:p>
+            <a:pPr>
+              <a:spcAft>
+                <a:spcPts val="684"/>
+              </a:spcAft>
+              <a:defRPr sz="1700">
+                <a:solidFill>
+                  <a:srgbClr val="111827"/>
+                </a:solidFill>
+              </a:defRPr>
+            </a:pPr>
+            <a:r>
+              <a:t>Consumer remittance and POS are crowded — the SME trade-finance slice is underserved</a:t>
+            </a:r>
           </a:p>
         </p:txBody>
       </p:sp>
@@ -7235,7 +9449,7 @@
               </a:defRPr>
             </a:pPr>
             <a:r>
-              <a:t>HOW IT WORKS</a:t>
+              <a:t>SOLUTION</a:t>
             </a:r>
           </a:p>
         </p:txBody>
@@ -7270,7 +9484,7 @@
               </a:defRPr>
             </a:pPr>
             <a:r>
-              <a:t>One trade, five actors — ~3 minutes in Judge Mode</a:t>
+              <a:t>Turn delivery proof into finance-ready receivables — settle in hours, not months</a:t>
             </a:r>
           </a:p>
         </p:txBody>
@@ -7433,820 +9647,98 @@
       </p:sp>
       <p:sp>
         <p:nvSpPr>
-          <p:cNvPr id="8" name="Rounded Rectangle 7"/>
-          <p:cNvSpPr/>
-          <p:nvPr/>
-        </p:nvSpPr>
-        <p:spPr>
-          <a:xfrm>
-            <a:off x="822960" y="1920240"/>
-            <a:ext cx="457200" cy="457200"/>
-          </a:xfrm>
-          <a:prstGeom prst="roundRect">
-            <a:avLst/>
-          </a:prstGeom>
-          <a:solidFill>
-            <a:srgbClr val="2563EB"/>
-          </a:solidFill>
-          <a:ln>
-            <a:noFill/>
-          </a:ln>
-        </p:spPr>
-        <p:style>
-          <a:lnRef idx="1">
-            <a:schemeClr val="accent1"/>
-          </a:lnRef>
-          <a:fillRef idx="3">
-            <a:schemeClr val="accent1"/>
-          </a:fillRef>
-          <a:effectRef idx="2">
-            <a:schemeClr val="accent1"/>
-          </a:effectRef>
-          <a:fontRef idx="minor">
-            <a:schemeClr val="lt1"/>
-          </a:fontRef>
-        </p:style>
-        <p:txBody>
-          <a:bodyPr rtlCol="0" anchor="ctr"/>
-          <a:lstStyle/>
-          <a:p>
-            <a:pPr algn="ctr"/>
-          </a:p>
-        </p:txBody>
-      </p:sp>
-      <p:sp>
-        <p:nvSpPr>
-          <p:cNvPr id="9" name="TextBox 8"/>
-          <p:cNvSpPr txBox="1"/>
-          <p:nvPr/>
-        </p:nvSpPr>
-        <p:spPr>
-          <a:xfrm>
-            <a:off x="822960" y="1975104"/>
-            <a:ext cx="457200" cy="365760"/>
-          </a:xfrm>
-          <a:prstGeom prst="rect">
-            <a:avLst/>
-          </a:prstGeom>
-          <a:noFill/>
-        </p:spPr>
-        <p:txBody>
-          <a:bodyPr wrap="square">
-            <a:spAutoFit/>
-          </a:bodyPr>
-          <a:lstStyle/>
-          <a:p>
-            <a:pPr algn="ctr">
-              <a:defRPr sz="1500" b="1">
-                <a:solidFill>
-                  <a:srgbClr val="FFFFFF"/>
-                </a:solidFill>
-              </a:defRPr>
-            </a:pPr>
-            <a:r>
-              <a:t>1</a:t>
-            </a:r>
-          </a:p>
-        </p:txBody>
-      </p:sp>
-      <p:sp>
-        <p:nvSpPr>
-          <p:cNvPr id="10" name="TextBox 9"/>
-          <p:cNvSpPr txBox="1"/>
-          <p:nvPr/>
-        </p:nvSpPr>
-        <p:spPr>
-          <a:xfrm>
-            <a:off x="1417320" y="1965960"/>
-            <a:ext cx="1828800" cy="320040"/>
-          </a:xfrm>
-          <a:prstGeom prst="rect">
-            <a:avLst/>
-          </a:prstGeom>
-          <a:noFill/>
-        </p:spPr>
-        <p:txBody>
-          <a:bodyPr wrap="square">
-            <a:spAutoFit/>
-          </a:bodyPr>
-          <a:lstStyle/>
-          <a:p>
-            <a:pPr algn="l">
-              <a:defRPr sz="1300" b="1">
-                <a:solidFill>
-                  <a:srgbClr val="2563EB"/>
-                </a:solidFill>
-              </a:defRPr>
-            </a:pPr>
-            <a:r>
-              <a:t>SME</a:t>
-            </a:r>
-          </a:p>
-        </p:txBody>
-      </p:sp>
-      <p:sp>
-        <p:nvSpPr>
-          <p:cNvPr id="11" name="TextBox 10"/>
-          <p:cNvSpPr txBox="1"/>
-          <p:nvPr/>
-        </p:nvSpPr>
-        <p:spPr>
-          <a:xfrm>
-            <a:off x="3291840" y="1938528"/>
-            <a:ext cx="8046720" cy="502920"/>
-          </a:xfrm>
-          <a:prstGeom prst="rect">
-            <a:avLst/>
-          </a:prstGeom>
-          <a:noFill/>
-        </p:spPr>
-        <p:txBody>
-          <a:bodyPr wrap="square">
-            <a:spAutoFit/>
-          </a:bodyPr>
-          <a:lstStyle/>
-          <a:p>
-            <a:pPr algn="l">
-              <a:defRPr sz="1600" b="0">
+          <p:cNvPr id="8" name="TextBox 7"/>
+          <p:cNvSpPr txBox="1"/>
+          <p:nvPr/>
+        </p:nvSpPr>
+        <p:spPr>
+          <a:xfrm>
+            <a:off x="822960" y="2011680"/>
+            <a:ext cx="10515600" cy="4114800"/>
+          </a:xfrm>
+          <a:prstGeom prst="rect">
+            <a:avLst/>
+          </a:prstGeom>
+          <a:noFill/>
+        </p:spPr>
+        <p:txBody>
+          <a:bodyPr wrap="square">
+            <a:spAutoFit/>
+          </a:bodyPr>
+          <a:lstStyle/>
+          <a:p>
+            <a:pPr>
+              <a:spcAft>
+                <a:spcPts val="724"/>
+              </a:spcAft>
+              <a:defRPr sz="1800">
                 <a:solidFill>
                   <a:srgbClr val="111827"/>
                 </a:solidFill>
               </a:defRPr>
             </a:pPr>
             <a:r>
-              <a:t>Order → invoice → delivery proof</a:t>
-            </a:r>
-          </a:p>
-        </p:txBody>
-      </p:sp>
-      <p:sp>
-        <p:nvSpPr>
-          <p:cNvPr id="12" name="Rounded Rectangle 11"/>
-          <p:cNvSpPr/>
-          <p:nvPr/>
-        </p:nvSpPr>
-        <p:spPr>
-          <a:xfrm>
-            <a:off x="822960" y="2761488"/>
-            <a:ext cx="457200" cy="457200"/>
-          </a:xfrm>
-          <a:prstGeom prst="roundRect">
-            <a:avLst/>
-          </a:prstGeom>
-          <a:solidFill>
-            <a:srgbClr val="2563EB"/>
-          </a:solidFill>
-          <a:ln>
-            <a:noFill/>
-          </a:ln>
-        </p:spPr>
-        <p:style>
-          <a:lnRef idx="1">
-            <a:schemeClr val="accent1"/>
-          </a:lnRef>
-          <a:fillRef idx="3">
-            <a:schemeClr val="accent1"/>
-          </a:fillRef>
-          <a:effectRef idx="2">
-            <a:schemeClr val="accent1"/>
-          </a:effectRef>
-          <a:fontRef idx="minor">
-            <a:schemeClr val="lt1"/>
-          </a:fontRef>
-        </p:style>
-        <p:txBody>
-          <a:bodyPr rtlCol="0" anchor="ctr"/>
-          <a:lstStyle/>
-          <a:p>
-            <a:pPr algn="ctr"/>
-          </a:p>
-        </p:txBody>
-      </p:sp>
-      <p:sp>
-        <p:nvSpPr>
-          <p:cNvPr id="13" name="TextBox 12"/>
-          <p:cNvSpPr txBox="1"/>
-          <p:nvPr/>
-        </p:nvSpPr>
-        <p:spPr>
-          <a:xfrm>
-            <a:off x="822960" y="2816352"/>
-            <a:ext cx="457200" cy="365760"/>
-          </a:xfrm>
-          <a:prstGeom prst="rect">
-            <a:avLst/>
-          </a:prstGeom>
-          <a:noFill/>
-        </p:spPr>
-        <p:txBody>
-          <a:bodyPr wrap="square">
-            <a:spAutoFit/>
-          </a:bodyPr>
-          <a:lstStyle/>
-          <a:p>
-            <a:pPr algn="ctr">
-              <a:defRPr sz="1500" b="1">
-                <a:solidFill>
-                  <a:srgbClr val="FFFFFF"/>
-                </a:solidFill>
-              </a:defRPr>
-            </a:pPr>
-            <a:r>
-              <a:t>2</a:t>
-            </a:r>
-          </a:p>
-        </p:txBody>
-      </p:sp>
-      <p:sp>
-        <p:nvSpPr>
-          <p:cNvPr id="14" name="TextBox 13"/>
-          <p:cNvSpPr txBox="1"/>
-          <p:nvPr/>
-        </p:nvSpPr>
-        <p:spPr>
-          <a:xfrm>
-            <a:off x="1417320" y="2807208"/>
-            <a:ext cx="1828800" cy="320040"/>
-          </a:xfrm>
-          <a:prstGeom prst="rect">
-            <a:avLst/>
-          </a:prstGeom>
-          <a:noFill/>
-        </p:spPr>
-        <p:txBody>
-          <a:bodyPr wrap="square">
-            <a:spAutoFit/>
-          </a:bodyPr>
-          <a:lstStyle/>
-          <a:p>
-            <a:pPr algn="l">
-              <a:defRPr sz="1300" b="1">
-                <a:solidFill>
-                  <a:srgbClr val="2563EB"/>
-                </a:solidFill>
-              </a:defRPr>
-            </a:pPr>
-            <a:r>
-              <a:t>Buyer</a:t>
-            </a:r>
-          </a:p>
-        </p:txBody>
-      </p:sp>
-      <p:sp>
-        <p:nvSpPr>
-          <p:cNvPr id="15" name="TextBox 14"/>
-          <p:cNvSpPr txBox="1"/>
-          <p:nvPr/>
-        </p:nvSpPr>
-        <p:spPr>
-          <a:xfrm>
-            <a:off x="3291840" y="2779776"/>
-            <a:ext cx="8046720" cy="502920"/>
-          </a:xfrm>
-          <a:prstGeom prst="rect">
-            <a:avLst/>
-          </a:prstGeom>
-          <a:noFill/>
-        </p:spPr>
-        <p:txBody>
-          <a:bodyPr wrap="square">
-            <a:spAutoFit/>
-          </a:bodyPr>
-          <a:lstStyle/>
-          <a:p>
-            <a:pPr algn="l">
-              <a:defRPr sz="1600" b="0">
+              <a:t>Buyer confirms the invoice; delivery proof is verified — receivable becomes financiable</a:t>
+            </a:r>
+          </a:p>
+          <a:p>
+            <a:pPr>
+              <a:spcAft>
+                <a:spcPts val="724"/>
+              </a:spcAft>
+              <a:defRPr sz="1800">
                 <a:solidFill>
                   <a:srgbClr val="111827"/>
                 </a:solidFill>
               </a:defRPr>
             </a:pPr>
             <a:r>
-              <a:t>Confirm trade obligation</a:t>
-            </a:r>
-          </a:p>
-        </p:txBody>
-      </p:sp>
-      <p:sp>
-        <p:nvSpPr>
-          <p:cNvPr id="16" name="Rounded Rectangle 15"/>
-          <p:cNvSpPr/>
-          <p:nvPr/>
-        </p:nvSpPr>
-        <p:spPr>
-          <a:xfrm>
-            <a:off x="822960" y="3602736"/>
-            <a:ext cx="457200" cy="457200"/>
-          </a:xfrm>
-          <a:prstGeom prst="roundRect">
-            <a:avLst/>
-          </a:prstGeom>
-          <a:solidFill>
-            <a:srgbClr val="2563EB"/>
-          </a:solidFill>
-          <a:ln>
-            <a:noFill/>
-          </a:ln>
-        </p:spPr>
-        <p:style>
-          <a:lnRef idx="1">
-            <a:schemeClr val="accent1"/>
-          </a:lnRef>
-          <a:fillRef idx="3">
-            <a:schemeClr val="accent1"/>
-          </a:fillRef>
-          <a:effectRef idx="2">
-            <a:schemeClr val="accent1"/>
-          </a:effectRef>
-          <a:fontRef idx="minor">
-            <a:schemeClr val="lt1"/>
-          </a:fontRef>
-        </p:style>
-        <p:txBody>
-          <a:bodyPr rtlCol="0" anchor="ctr"/>
-          <a:lstStyle/>
-          <a:p>
-            <a:pPr algn="ctr"/>
-          </a:p>
-        </p:txBody>
-      </p:sp>
-      <p:sp>
-        <p:nvSpPr>
-          <p:cNvPr id="17" name="TextBox 16"/>
-          <p:cNvSpPr txBox="1"/>
-          <p:nvPr/>
-        </p:nvSpPr>
-        <p:spPr>
-          <a:xfrm>
-            <a:off x="822960" y="3657600"/>
-            <a:ext cx="457200" cy="365760"/>
-          </a:xfrm>
-          <a:prstGeom prst="rect">
-            <a:avLst/>
-          </a:prstGeom>
-          <a:noFill/>
-        </p:spPr>
-        <p:txBody>
-          <a:bodyPr wrap="square">
-            <a:spAutoFit/>
-          </a:bodyPr>
-          <a:lstStyle/>
-          <a:p>
-            <a:pPr algn="ctr">
-              <a:defRPr sz="1500" b="1">
-                <a:solidFill>
-                  <a:srgbClr val="FFFFFF"/>
-                </a:solidFill>
-              </a:defRPr>
-            </a:pPr>
-            <a:r>
-              <a:t>3</a:t>
-            </a:r>
-          </a:p>
-        </p:txBody>
-      </p:sp>
-      <p:sp>
-        <p:nvSpPr>
-          <p:cNvPr id="18" name="TextBox 17"/>
-          <p:cNvSpPr txBox="1"/>
-          <p:nvPr/>
-        </p:nvSpPr>
-        <p:spPr>
-          <a:xfrm>
-            <a:off x="1417320" y="3648456"/>
-            <a:ext cx="1828800" cy="320040"/>
-          </a:xfrm>
-          <a:prstGeom prst="rect">
-            <a:avLst/>
-          </a:prstGeom>
-          <a:noFill/>
-        </p:spPr>
-        <p:txBody>
-          <a:bodyPr wrap="square">
-            <a:spAutoFit/>
-          </a:bodyPr>
-          <a:lstStyle/>
-          <a:p>
-            <a:pPr algn="l">
-              <a:defRPr sz="1300" b="1">
-                <a:solidFill>
-                  <a:srgbClr val="2563EB"/>
-                </a:solidFill>
-              </a:defRPr>
-            </a:pPr>
-            <a:r>
-              <a:t>SME</a:t>
-            </a:r>
-          </a:p>
-        </p:txBody>
-      </p:sp>
-      <p:sp>
-        <p:nvSpPr>
-          <p:cNvPr id="19" name="TextBox 18"/>
-          <p:cNvSpPr txBox="1"/>
-          <p:nvPr/>
-        </p:nvSpPr>
-        <p:spPr>
-          <a:xfrm>
-            <a:off x="3291840" y="3621024"/>
-            <a:ext cx="8046720" cy="502920"/>
-          </a:xfrm>
-          <a:prstGeom prst="rect">
-            <a:avLst/>
-          </a:prstGeom>
-          <a:noFill/>
-        </p:spPr>
-        <p:txBody>
-          <a:bodyPr wrap="square">
-            <a:spAutoFit/>
-          </a:bodyPr>
-          <a:lstStyle/>
-          <a:p>
-            <a:pPr algn="l">
-              <a:defRPr sz="1600" b="0">
+              <a:t>Proof anchored on Polygon (documents stay private; hashes are tamper-evident)</a:t>
+            </a:r>
+          </a:p>
+          <a:p>
+            <a:pPr>
+              <a:spcAft>
+                <a:spcPts val="724"/>
+              </a:spcAft>
+              <a:defRPr sz="1800">
                 <a:solidFill>
                   <a:srgbClr val="111827"/>
                 </a:solidFill>
               </a:defRPr>
             </a:pPr>
             <a:r>
-              <a:t>Create receivable · anchor proof on Polygon</a:t>
-            </a:r>
-          </a:p>
-        </p:txBody>
-      </p:sp>
-      <p:sp>
-        <p:nvSpPr>
-          <p:cNvPr id="20" name="Rounded Rectangle 19"/>
-          <p:cNvSpPr/>
-          <p:nvPr/>
-        </p:nvSpPr>
-        <p:spPr>
-          <a:xfrm>
-            <a:off x="822960" y="4443984"/>
-            <a:ext cx="457200" cy="457200"/>
-          </a:xfrm>
-          <a:prstGeom prst="roundRect">
-            <a:avLst/>
-          </a:prstGeom>
-          <a:solidFill>
-            <a:srgbClr val="2563EB"/>
-          </a:solidFill>
-          <a:ln>
-            <a:noFill/>
-          </a:ln>
-        </p:spPr>
-        <p:style>
-          <a:lnRef idx="1">
-            <a:schemeClr val="accent1"/>
-          </a:lnRef>
-          <a:fillRef idx="3">
-            <a:schemeClr val="accent1"/>
-          </a:fillRef>
-          <a:effectRef idx="2">
-            <a:schemeClr val="accent1"/>
-          </a:effectRef>
-          <a:fontRef idx="minor">
-            <a:schemeClr val="lt1"/>
-          </a:fontRef>
-        </p:style>
-        <p:txBody>
-          <a:bodyPr rtlCol="0" anchor="ctr"/>
-          <a:lstStyle/>
-          <a:p>
-            <a:pPr algn="ctr"/>
-          </a:p>
-        </p:txBody>
-      </p:sp>
-      <p:sp>
-        <p:nvSpPr>
-          <p:cNvPr id="21" name="TextBox 20"/>
-          <p:cNvSpPr txBox="1"/>
-          <p:nvPr/>
-        </p:nvSpPr>
-        <p:spPr>
-          <a:xfrm>
-            <a:off x="822960" y="4498848"/>
-            <a:ext cx="457200" cy="365760"/>
-          </a:xfrm>
-          <a:prstGeom prst="rect">
-            <a:avLst/>
-          </a:prstGeom>
-          <a:noFill/>
-        </p:spPr>
-        <p:txBody>
-          <a:bodyPr wrap="square">
-            <a:spAutoFit/>
-          </a:bodyPr>
-          <a:lstStyle/>
-          <a:p>
-            <a:pPr algn="ctr">
-              <a:defRPr sz="1500" b="1">
-                <a:solidFill>
-                  <a:srgbClr val="FFFFFF"/>
-                </a:solidFill>
-              </a:defRPr>
-            </a:pPr>
-            <a:r>
-              <a:t>4</a:t>
-            </a:r>
-          </a:p>
-        </p:txBody>
-      </p:sp>
-      <p:sp>
-        <p:nvSpPr>
-          <p:cNvPr id="22" name="TextBox 21"/>
-          <p:cNvSpPr txBox="1"/>
-          <p:nvPr/>
-        </p:nvSpPr>
-        <p:spPr>
-          <a:xfrm>
-            <a:off x="1417320" y="4489704"/>
-            <a:ext cx="1828800" cy="320040"/>
-          </a:xfrm>
-          <a:prstGeom prst="rect">
-            <a:avLst/>
-          </a:prstGeom>
-          <a:noFill/>
-        </p:spPr>
-        <p:txBody>
-          <a:bodyPr wrap="square">
-            <a:spAutoFit/>
-          </a:bodyPr>
-          <a:lstStyle/>
-          <a:p>
-            <a:pPr algn="l">
-              <a:defRPr sz="1300" b="1">
-                <a:solidFill>
-                  <a:srgbClr val="2563EB"/>
-                </a:solidFill>
-              </a:defRPr>
-            </a:pPr>
-            <a:r>
-              <a:t>Financier</a:t>
-            </a:r>
-          </a:p>
-        </p:txBody>
-      </p:sp>
-      <p:sp>
-        <p:nvSpPr>
-          <p:cNvPr id="23" name="TextBox 22"/>
-          <p:cNvSpPr txBox="1"/>
-          <p:nvPr/>
-        </p:nvSpPr>
-        <p:spPr>
-          <a:xfrm>
-            <a:off x="3291840" y="4462272"/>
-            <a:ext cx="8046720" cy="502920"/>
-          </a:xfrm>
-          <a:prstGeom prst="rect">
-            <a:avLst/>
-          </a:prstGeom>
-          <a:noFill/>
-        </p:spPr>
-        <p:txBody>
-          <a:bodyPr wrap="square">
-            <a:spAutoFit/>
-          </a:bodyPr>
-          <a:lstStyle/>
-          <a:p>
-            <a:pPr algn="l">
-              <a:defRPr sz="1600" b="0">
+              <a:t>Financier funds programmable Smart LC escrow; release only after verified delivery</a:t>
+            </a:r>
+          </a:p>
+          <a:p>
+            <a:pPr>
+              <a:spcAft>
+                <a:spcPts val="724"/>
+              </a:spcAft>
+              <a:defRPr sz="1800">
                 <a:solidFill>
                   <a:srgbClr val="111827"/>
                 </a:solidFill>
               </a:defRPr>
             </a:pPr>
             <a:r>
-              <a:t>Deal room review · fund Smart LC escrow</a:t>
-            </a:r>
-          </a:p>
-        </p:txBody>
-      </p:sp>
-      <p:sp>
-        <p:nvSpPr>
-          <p:cNvPr id="24" name="Rounded Rectangle 23"/>
-          <p:cNvSpPr/>
-          <p:nvPr/>
-        </p:nvSpPr>
-        <p:spPr>
-          <a:xfrm>
-            <a:off x="822960" y="5285232"/>
-            <a:ext cx="457200" cy="457200"/>
-          </a:xfrm>
-          <a:prstGeom prst="roundRect">
-            <a:avLst/>
-          </a:prstGeom>
-          <a:solidFill>
-            <a:srgbClr val="2563EB"/>
-          </a:solidFill>
-          <a:ln>
-            <a:noFill/>
-          </a:ln>
-        </p:spPr>
-        <p:style>
-          <a:lnRef idx="1">
-            <a:schemeClr val="accent1"/>
-          </a:lnRef>
-          <a:fillRef idx="3">
-            <a:schemeClr val="accent1"/>
-          </a:fillRef>
-          <a:effectRef idx="2">
-            <a:schemeClr val="accent1"/>
-          </a:effectRef>
-          <a:fontRef idx="minor">
-            <a:schemeClr val="lt1"/>
-          </a:fontRef>
-        </p:style>
-        <p:txBody>
-          <a:bodyPr rtlCol="0" anchor="ctr"/>
-          <a:lstStyle/>
-          <a:p>
-            <a:pPr algn="ctr"/>
-          </a:p>
-        </p:txBody>
-      </p:sp>
-      <p:sp>
-        <p:nvSpPr>
-          <p:cNvPr id="25" name="TextBox 24"/>
-          <p:cNvSpPr txBox="1"/>
-          <p:nvPr/>
-        </p:nvSpPr>
-        <p:spPr>
-          <a:xfrm>
-            <a:off x="822960" y="5340096"/>
-            <a:ext cx="457200" cy="365760"/>
-          </a:xfrm>
-          <a:prstGeom prst="rect">
-            <a:avLst/>
-          </a:prstGeom>
-          <a:noFill/>
-        </p:spPr>
-        <p:txBody>
-          <a:bodyPr wrap="square">
-            <a:spAutoFit/>
-          </a:bodyPr>
-          <a:lstStyle/>
-          <a:p>
-            <a:pPr algn="ctr">
-              <a:defRPr sz="1500" b="1">
-                <a:solidFill>
-                  <a:srgbClr val="FFFFFF"/>
-                </a:solidFill>
-              </a:defRPr>
-            </a:pPr>
-            <a:r>
-              <a:t>5</a:t>
-            </a:r>
-          </a:p>
-        </p:txBody>
-      </p:sp>
-      <p:sp>
-        <p:nvSpPr>
-          <p:cNvPr id="26" name="TextBox 25"/>
-          <p:cNvSpPr txBox="1"/>
-          <p:nvPr/>
-        </p:nvSpPr>
-        <p:spPr>
-          <a:xfrm>
-            <a:off x="1417320" y="5330952"/>
-            <a:ext cx="1828800" cy="320040"/>
-          </a:xfrm>
-          <a:prstGeom prst="rect">
-            <a:avLst/>
-          </a:prstGeom>
-          <a:noFill/>
-        </p:spPr>
-        <p:txBody>
-          <a:bodyPr wrap="square">
-            <a:spAutoFit/>
-          </a:bodyPr>
-          <a:lstStyle/>
-          <a:p>
-            <a:pPr algn="l">
-              <a:defRPr sz="1300" b="1">
-                <a:solidFill>
-                  <a:srgbClr val="2563EB"/>
-                </a:solidFill>
-              </a:defRPr>
-            </a:pPr>
-            <a:r>
-              <a:t>System</a:t>
-            </a:r>
-          </a:p>
-        </p:txBody>
-      </p:sp>
-      <p:sp>
-        <p:nvSpPr>
-          <p:cNvPr id="27" name="TextBox 26"/>
-          <p:cNvSpPr txBox="1"/>
-          <p:nvPr/>
-        </p:nvSpPr>
-        <p:spPr>
-          <a:xfrm>
-            <a:off x="3291840" y="5303520"/>
-            <a:ext cx="8046720" cy="502920"/>
-          </a:xfrm>
-          <a:prstGeom prst="rect">
-            <a:avLst/>
-          </a:prstGeom>
-          <a:noFill/>
-        </p:spPr>
-        <p:txBody>
-          <a:bodyPr wrap="square">
-            <a:spAutoFit/>
-          </a:bodyPr>
-          <a:lstStyle/>
-          <a:p>
-            <a:pPr algn="l">
-              <a:defRPr sz="1600" b="0">
+              <a:t>Four enterprise workspaces — SME, Buyer, Financier, Admin — one shared trust record</a:t>
+            </a:r>
+          </a:p>
+          <a:p>
+            <a:pPr>
+              <a:spcAft>
+                <a:spcPts val="724"/>
+              </a:spcAft>
+              <a:defRPr sz="1800">
                 <a:solidFill>
                   <a:srgbClr val="111827"/>
                 </a:solidFill>
               </a:defRPr>
             </a:pPr>
             <a:r>
-              <a:t>Verify delivery · release stablecoin to seller</a:t>
-            </a:r>
-          </a:p>
-        </p:txBody>
-      </p:sp>
-      <p:sp>
-        <p:nvSpPr>
-          <p:cNvPr id="28" name="Rounded Rectangle 27"/>
-          <p:cNvSpPr/>
-          <p:nvPr/>
-        </p:nvSpPr>
-        <p:spPr>
-          <a:xfrm>
-            <a:off x="822960" y="5623560"/>
-            <a:ext cx="10515600" cy="502920"/>
-          </a:xfrm>
-          <a:prstGeom prst="roundRect">
-            <a:avLst/>
-          </a:prstGeom>
-          <a:solidFill>
-            <a:srgbClr val="ECFDF5"/>
-          </a:solidFill>
-          <a:ln>
-            <a:solidFill>
-              <a:srgbClr val="16A34A"/>
-            </a:solidFill>
-          </a:ln>
-        </p:spPr>
-        <p:style>
-          <a:lnRef idx="1">
-            <a:schemeClr val="accent1"/>
-          </a:lnRef>
-          <a:fillRef idx="3">
-            <a:schemeClr val="accent1"/>
-          </a:fillRef>
-          <a:effectRef idx="2">
-            <a:schemeClr val="accent1"/>
-          </a:effectRef>
-          <a:fontRef idx="minor">
-            <a:schemeClr val="lt1"/>
-          </a:fontRef>
-        </p:style>
-        <p:txBody>
-          <a:bodyPr rtlCol="0" anchor="ctr"/>
-          <a:lstStyle/>
-          <a:p>
-            <a:pPr algn="ctr"/>
-          </a:p>
-        </p:txBody>
-      </p:sp>
-      <p:sp>
-        <p:nvSpPr>
-          <p:cNvPr id="29" name="TextBox 28"/>
-          <p:cNvSpPr txBox="1"/>
-          <p:nvPr/>
-        </p:nvSpPr>
-        <p:spPr>
-          <a:xfrm>
-            <a:off x="960120" y="5715000"/>
-            <a:ext cx="10241280" cy="365760"/>
-          </a:xfrm>
-          <a:prstGeom prst="rect">
-            <a:avLst/>
-          </a:prstGeom>
-          <a:noFill/>
-        </p:spPr>
-        <p:txBody>
-          <a:bodyPr wrap="square">
-            <a:spAutoFit/>
-          </a:bodyPr>
-          <a:lstStyle/>
-          <a:p>
-            <a:pPr algn="l">
-              <a:defRPr sz="1300" b="1">
-                <a:solidFill>
-                  <a:srgbClr val="16A34A"/>
-                </a:solidFill>
-              </a:defRPr>
-            </a:pPr>
-            <a:r>
-              <a:t>Example trade: AED 250k invoice → 80% advance (AED 200k) → Smart LC funded → released same day after verified delivery</a:t>
+              <a:t>Outcome: collapse 7–10 day LC friction toward same-day proof-to-funding in one corridor</a:t>
             </a:r>
           </a:p>
         </p:txBody>
@@ -8307,7 +9799,7 @@
               </a:defRPr>
             </a:pPr>
             <a:r>
-              <a:t>TRACTION &amp; PROOF</a:t>
+              <a:t>WHY NOW · WHY US</a:t>
             </a:r>
           </a:p>
         </p:txBody>
@@ -8342,7 +9834,7 @@
               </a:defRPr>
             </a:pPr>
             <a:r>
-              <a:t>Built, deployed, and testable — not a concept deck</a:t>
+              <a:t>Regulation, market pain, and a shipped stack converge</a:t>
             </a:r>
           </a:p>
         </p:txBody>
@@ -8511,8 +10003,43 @@
         </p:nvSpPr>
         <p:spPr>
           <a:xfrm>
-            <a:off x="822960" y="1828800"/>
-            <a:ext cx="5029200" cy="3200400"/>
+            <a:off x="822960" y="1874519"/>
+            <a:ext cx="5029200" cy="365760"/>
+          </a:xfrm>
+          <a:prstGeom prst="rect">
+            <a:avLst/>
+          </a:prstGeom>
+          <a:noFill/>
+        </p:spPr>
+        <p:txBody>
+          <a:bodyPr wrap="square">
+            <a:spAutoFit/>
+          </a:bodyPr>
+          <a:lstStyle/>
+          <a:p>
+            <a:pPr algn="l">
+              <a:defRPr sz="1400" b="1">
+                <a:solidFill>
+                  <a:srgbClr val="2563EB"/>
+                </a:solidFill>
+              </a:defRPr>
+            </a:pPr>
+            <a:r>
+              <a:t>Why now</a:t>
+            </a:r>
+          </a:p>
+        </p:txBody>
+      </p:sp>
+      <p:sp>
+        <p:nvSpPr>
+          <p:cNvPr id="9" name="TextBox 8"/>
+          <p:cNvSpPr txBox="1"/>
+          <p:nvPr/>
+        </p:nvSpPr>
+        <p:spPr>
+          <a:xfrm>
+            <a:off x="822960" y="2240280"/>
+            <a:ext cx="5303520" cy="3657600"/>
           </a:xfrm>
           <a:prstGeom prst="rect">
             <a:avLst/>
@@ -8536,7 +10063,7 @@
               </a:defRPr>
             </a:pPr>
             <a:r>
-              <a:t>Production deploy: credara-jet.vercel.app + credara-api.vercel.app</a:t>
+              <a:t>UAE CBUAE PTSR opens regulated AED stablecoin B2B settlement</a:t>
             </a:r>
           </a:p>
           <a:p>
@@ -8551,7 +10078,7 @@
               </a:defRPr>
             </a:pPr>
             <a:r>
-              <a:t>Smart LC factory wired: create → fund → verify → release on Amoy</a:t>
+              <a:t>Polygon enterprise infra: low-cost escrow + proof anchoring at scale</a:t>
             </a:r>
           </a:p>
           <a:p>
@@ -8566,7 +10093,7 @@
               </a:defRPr>
             </a:pPr>
             <a:r>
-              <a:t>Auth0 OAuth + password auth · Didit KYB abstraction · Postgres persistence</a:t>
+              <a:t>SME trade-finance gap widening as corridors digitize faster than bank LC rails</a:t>
             </a:r>
           </a:p>
           <a:p>
@@ -8581,9 +10108,67 @@
               </a:defRPr>
             </a:pPr>
             <a:r>
-              <a:t>Slither + Hardhat in CI · role-separated escrow contracts</a:t>
-            </a:r>
-          </a:p>
+              <a:t>Smart Commerce / DIFC ecosystem primed for corridor pilots</a:t>
+            </a:r>
+          </a:p>
+        </p:txBody>
+      </p:sp>
+      <p:sp>
+        <p:nvSpPr>
+          <p:cNvPr id="10" name="TextBox 9"/>
+          <p:cNvSpPr txBox="1"/>
+          <p:nvPr/>
+        </p:nvSpPr>
+        <p:spPr>
+          <a:xfrm>
+            <a:off x="6400800" y="1874519"/>
+            <a:ext cx="5029200" cy="365760"/>
+          </a:xfrm>
+          <a:prstGeom prst="rect">
+            <a:avLst/>
+          </a:prstGeom>
+          <a:noFill/>
+        </p:spPr>
+        <p:txBody>
+          <a:bodyPr wrap="square">
+            <a:spAutoFit/>
+          </a:bodyPr>
+          <a:lstStyle/>
+          <a:p>
+            <a:pPr algn="l">
+              <a:defRPr sz="1400" b="1">
+                <a:solidFill>
+                  <a:srgbClr val="2563EB"/>
+                </a:solidFill>
+              </a:defRPr>
+            </a:pPr>
+            <a:r>
+              <a:t>Why Credara</a:t>
+            </a:r>
+          </a:p>
+        </p:txBody>
+      </p:sp>
+      <p:sp>
+        <p:nvSpPr>
+          <p:cNvPr id="11" name="TextBox 10"/>
+          <p:cNvSpPr txBox="1"/>
+          <p:nvPr/>
+        </p:nvSpPr>
+        <p:spPr>
+          <a:xfrm>
+            <a:off x="6400800" y="2240280"/>
+            <a:ext cx="5303520" cy="3657600"/>
+          </a:xfrm>
+          <a:prstGeom prst="rect">
+            <a:avLst/>
+          </a:prstGeom>
+          <a:noFill/>
+        </p:spPr>
+        <p:txBody>
+          <a:bodyPr wrap="square">
+            <a:spAutoFit/>
+          </a:bodyPr>
+          <a:lstStyle/>
           <a:p>
             <a:pPr>
               <a:spcAft>
@@ -8596,86 +10181,72 @@
               </a:defRPr>
             </a:pPr>
             <a:r>
-              <a:t>Judge Mode: guided 3-min demo for reviewers and investors</a:t>
-            </a:r>
-          </a:p>
-        </p:txBody>
-      </p:sp>
-      <p:pic>
-        <p:nvPicPr>
-          <p:cNvPr id="9" name="Picture 8" descr="workspace-judge-mode.png"/>
-          <p:cNvPicPr>
-            <a:picLocks noChangeAspect="1"/>
-          </p:cNvPicPr>
-          <p:nvPr/>
-        </p:nvPicPr>
-        <p:blipFill>
-          <a:blip r:embed="rId2"/>
-          <a:stretch>
-            <a:fillRect/>
-          </a:stretch>
-        </p:blipFill>
-        <p:spPr>
-          <a:xfrm>
-            <a:off x="6035040" y="1828800"/>
-            <a:ext cx="5394960" cy="3596640"/>
-          </a:xfrm>
-          <a:prstGeom prst="rect">
-            <a:avLst/>
-          </a:prstGeom>
-        </p:spPr>
-      </p:pic>
-      <p:sp>
-        <p:nvSpPr>
-          <p:cNvPr id="10" name="TextBox 9"/>
-          <p:cNvSpPr txBox="1"/>
-          <p:nvPr/>
-        </p:nvSpPr>
-        <p:spPr>
-          <a:xfrm>
-            <a:off x="6035040" y="5440680"/>
-            <a:ext cx="5394960" cy="274320"/>
-          </a:xfrm>
-          <a:prstGeom prst="rect">
-            <a:avLst/>
-          </a:prstGeom>
-          <a:noFill/>
-        </p:spPr>
-        <p:txBody>
-          <a:bodyPr wrap="square">
-            <a:spAutoFit/>
-          </a:bodyPr>
-          <a:lstStyle/>
-          <a:p>
-            <a:pPr algn="ctr">
-              <a:defRPr sz="1000" b="0">
-                <a:solidFill>
-                  <a:srgbClr val="667085"/>
-                </a:solidFill>
-              </a:defRPr>
-            </a:pPr>
-            <a:r>
-              <a:t>Enterprise workspace (live product)</a:t>
-            </a:r>
-          </a:p>
-        </p:txBody>
-      </p:sp>
-      <p:sp>
-        <p:nvSpPr>
-          <p:cNvPr id="11" name="Rounded Rectangle 10"/>
+              <a:t>Live monorepo on Vercel + Amoy — not slideware (test today)</a:t>
+            </a:r>
+          </a:p>
+          <a:p>
+            <a:pPr>
+              <a:spcAft>
+                <a:spcPts val="603"/>
+              </a:spcAft>
+              <a:defRPr sz="1500">
+                <a:solidFill>
+                  <a:srgbClr val="111827"/>
+                </a:solidFill>
+              </a:defRPr>
+            </a:pPr>
+            <a:r>
+              <a:t>Fail-closed chain: no fake Polygonscan; honest simulated vs anchored</a:t>
+            </a:r>
+          </a:p>
+          <a:p>
+            <a:pPr>
+              <a:spcAft>
+                <a:spcPts val="603"/>
+              </a:spcAft>
+              <a:defRPr sz="1500">
+                <a:solidFill>
+                  <a:srgbClr val="111827"/>
+                </a:solidFill>
+              </a:defRPr>
+            </a:pPr>
+            <a:r>
+              <a:t>Token-agnostic Smart LC — swap MockUSDC for licensed AED without rebuild</a:t>
+            </a:r>
+          </a:p>
+          <a:p>
+            <a:pPr>
+              <a:spcAft>
+                <a:spcPts val="603"/>
+              </a:spcAft>
+              <a:defRPr sz="1500">
+                <a:solidFill>
+                  <a:srgbClr val="111827"/>
+                </a:solidFill>
+              </a:defRPr>
+            </a:pPr>
+            <a:r>
+              <a:t>Founder: regulated banking + utilities scale + cryptographic governance (AIRG)</a:t>
+            </a:r>
+          </a:p>
+        </p:txBody>
+      </p:sp>
+      <p:sp>
+        <p:nvSpPr>
+          <p:cNvPr id="12" name="Rectangle 11"/>
           <p:cNvSpPr/>
           <p:nvPr/>
         </p:nvSpPr>
         <p:spPr>
           <a:xfrm>
-            <a:off x="822960" y="5074920"/>
-            <a:ext cx="5029200" cy="1051560"/>
-          </a:xfrm>
-          <a:prstGeom prst="roundRect">
+            <a:off x="6172200" y="1783080"/>
+            <a:ext cx="45720" cy="4206240"/>
+          </a:xfrm>
+          <a:prstGeom prst="rect">
             <a:avLst/>
           </a:prstGeom>
           <a:solidFill>
-            <a:srgbClr val="07142F"/>
+            <a:srgbClr val="E7EAF1"/>
           </a:solidFill>
           <a:ln>
             <a:noFill/>
@@ -8700,100 +10271,6 @@
           <a:lstStyle/>
           <a:p>
             <a:pPr algn="ctr"/>
-          </a:p>
-        </p:txBody>
-      </p:sp>
-      <p:sp>
-        <p:nvSpPr>
-          <p:cNvPr id="12" name="TextBox 11"/>
-          <p:cNvSpPr txBox="1"/>
-          <p:nvPr/>
-        </p:nvSpPr>
-        <p:spPr>
-          <a:xfrm>
-            <a:off x="960120" y="5193792"/>
-            <a:ext cx="4754880" cy="320040"/>
-          </a:xfrm>
-          <a:prstGeom prst="rect">
-            <a:avLst/>
-          </a:prstGeom>
-          <a:noFill/>
-        </p:spPr>
-        <p:txBody>
-          <a:bodyPr wrap="square">
-            <a:spAutoFit/>
-          </a:bodyPr>
-          <a:lstStyle/>
-          <a:p>
-            <a:pPr algn="l">
-              <a:defRPr sz="1200" b="1">
-                <a:solidFill>
-                  <a:srgbClr val="FFFFFF"/>
-                </a:solidFill>
-              </a:defRPr>
-            </a:pPr>
-            <a:r>
-              <a:t>Proof moment (demo climax)</a:t>
-            </a:r>
-          </a:p>
-        </p:txBody>
-      </p:sp>
-      <p:pic>
-        <p:nvPicPr>
-          <p:cNvPr id="13" name="Picture 12" descr="polygonscan-tx.png"/>
-          <p:cNvPicPr>
-            <a:picLocks noChangeAspect="1"/>
-          </p:cNvPicPr>
-          <p:nvPr/>
-        </p:nvPicPr>
-        <p:blipFill>
-          <a:blip r:embed="rId3"/>
-          <a:stretch>
-            <a:fillRect/>
-          </a:stretch>
-        </p:blipFill>
-        <p:spPr>
-          <a:xfrm>
-            <a:off x="960120" y="5532120"/>
-            <a:ext cx="2194560" cy="1234440"/>
-          </a:xfrm>
-          <a:prstGeom prst="rect">
-            <a:avLst/>
-          </a:prstGeom>
-        </p:spPr>
-      </p:pic>
-      <p:sp>
-        <p:nvSpPr>
-          <p:cNvPr id="14" name="TextBox 13"/>
-          <p:cNvSpPr txBox="1"/>
-          <p:nvPr/>
-        </p:nvSpPr>
-        <p:spPr>
-          <a:xfrm>
-            <a:off x="3291840" y="5532120"/>
-            <a:ext cx="2377440" cy="502920"/>
-          </a:xfrm>
-          <a:prstGeom prst="rect">
-            <a:avLst/>
-          </a:prstGeom>
-          <a:noFill/>
-        </p:spPr>
-        <p:txBody>
-          <a:bodyPr wrap="square">
-            <a:spAutoFit/>
-          </a:bodyPr>
-          <a:lstStyle/>
-          <a:p>
-            <a:pPr algn="l">
-              <a:defRPr sz="1100" b="0">
-                <a:solidFill>
-                  <a:srgbClr val="CBD5E1"/>
-                </a:solidFill>
-              </a:defRPr>
-            </a:pPr>
-            <a:r>
-              <a:t>Live Amoy tx: proof anchor + Smart LC release</a:t>
-            </a:r>
           </a:p>
         </p:txBody>
       </p:sp>
@@ -8853,7 +10330,7 @@
               </a:defRPr>
             </a:pPr>
             <a:r>
-              <a:t>COMPETITION &amp; MOAT</a:t>
+              <a:t>HOW IT WORKS</a:t>
             </a:r>
           </a:p>
         </p:txBody>
@@ -8888,7 +10365,7 @@
               </a:defRPr>
             </a:pPr>
             <a:r>
-              <a:t>Infrastructure wedge — not another hash-on-chain demo</a:t>
+              <a:t>One trade, five actors — ~3 minutes in Judge Mode</a:t>
             </a:r>
           </a:p>
         </p:txBody>
@@ -9051,130 +10528,23 @@
       </p:sp>
       <p:sp>
         <p:nvSpPr>
-          <p:cNvPr id="8" name="TextBox 7"/>
-          <p:cNvSpPr txBox="1"/>
-          <p:nvPr/>
-        </p:nvSpPr>
-        <p:spPr>
-          <a:xfrm>
-            <a:off x="777240" y="1828800"/>
-            <a:ext cx="2103120" cy="320040"/>
-          </a:xfrm>
-          <a:prstGeom prst="rect">
-            <a:avLst/>
-          </a:prstGeom>
-          <a:noFill/>
-        </p:spPr>
-        <p:txBody>
-          <a:bodyPr wrap="square">
-            <a:spAutoFit/>
-          </a:bodyPr>
-          <a:lstStyle/>
-          <a:p>
-            <a:pPr algn="l">
-              <a:defRPr sz="1100" b="1">
-                <a:solidFill>
-                  <a:srgbClr val="2563EB"/>
-                </a:solidFill>
-              </a:defRPr>
-            </a:pPr>
-            <a:r>
-              <a:t>Approach</a:t>
-            </a:r>
-          </a:p>
-        </p:txBody>
-      </p:sp>
-      <p:sp>
-        <p:nvSpPr>
-          <p:cNvPr id="9" name="TextBox 8"/>
-          <p:cNvSpPr txBox="1"/>
-          <p:nvPr/>
-        </p:nvSpPr>
-        <p:spPr>
-          <a:xfrm>
-            <a:off x="2926080" y="1828800"/>
-            <a:ext cx="4114800" cy="320040"/>
-          </a:xfrm>
-          <a:prstGeom prst="rect">
-            <a:avLst/>
-          </a:prstGeom>
-          <a:noFill/>
-        </p:spPr>
-        <p:txBody>
-          <a:bodyPr wrap="square">
-            <a:spAutoFit/>
-          </a:bodyPr>
-          <a:lstStyle/>
-          <a:p>
-            <a:pPr algn="l">
-              <a:defRPr sz="1100" b="1">
-                <a:solidFill>
-                  <a:srgbClr val="667085"/>
-                </a:solidFill>
-              </a:defRPr>
-            </a:pPr>
-            <a:r>
-              <a:t>Limitation</a:t>
-            </a:r>
-          </a:p>
-        </p:txBody>
-      </p:sp>
-      <p:sp>
-        <p:nvSpPr>
-          <p:cNvPr id="10" name="TextBox 9"/>
-          <p:cNvSpPr txBox="1"/>
-          <p:nvPr/>
-        </p:nvSpPr>
-        <p:spPr>
-          <a:xfrm>
-            <a:off x="7223760" y="1828800"/>
-            <a:ext cx="4114800" cy="320040"/>
-          </a:xfrm>
-          <a:prstGeom prst="rect">
-            <a:avLst/>
-          </a:prstGeom>
-          <a:noFill/>
-        </p:spPr>
-        <p:txBody>
-          <a:bodyPr wrap="square">
-            <a:spAutoFit/>
-          </a:bodyPr>
-          <a:lstStyle/>
-          <a:p>
-            <a:pPr algn="l">
-              <a:defRPr sz="1100" b="1">
-                <a:solidFill>
-                  <a:srgbClr val="2563EB"/>
-                </a:solidFill>
-              </a:defRPr>
-            </a:pPr>
-            <a:r>
-              <a:t>Credara edge</a:t>
-            </a:r>
-          </a:p>
-        </p:txBody>
-      </p:sp>
-      <p:sp>
-        <p:nvSpPr>
-          <p:cNvPr id="11" name="Rectangle 10"/>
+          <p:cNvPr id="8" name="Rounded Rectangle 7"/>
           <p:cNvSpPr/>
           <p:nvPr/>
         </p:nvSpPr>
         <p:spPr>
           <a:xfrm>
-            <a:off x="640080" y="2240280"/>
-            <a:ext cx="10881360" cy="658368"/>
-          </a:xfrm>
-          <a:prstGeom prst="rect">
+            <a:off x="822960" y="1920240"/>
+            <a:ext cx="457200" cy="457200"/>
+          </a:xfrm>
+          <a:prstGeom prst="roundRect">
             <a:avLst/>
           </a:prstGeom>
           <a:solidFill>
-            <a:srgbClr val="FFFFFF"/>
+            <a:srgbClr val="2563EB"/>
           </a:solidFill>
           <a:ln>
-            <a:solidFill>
-              <a:srgbClr val="E7EAF1"/>
-            </a:solidFill>
+            <a:noFill/>
           </a:ln>
         </p:spPr>
         <p:style>
@@ -9201,14 +10571,49 @@
       </p:sp>
       <p:sp>
         <p:nvSpPr>
-          <p:cNvPr id="12" name="TextBox 11"/>
-          <p:cNvSpPr txBox="1"/>
-          <p:nvPr/>
-        </p:nvSpPr>
-        <p:spPr>
-          <a:xfrm>
-            <a:off x="777240" y="2368296"/>
-            <a:ext cx="2103120" cy="411480"/>
+          <p:cNvPr id="9" name="TextBox 8"/>
+          <p:cNvSpPr txBox="1"/>
+          <p:nvPr/>
+        </p:nvSpPr>
+        <p:spPr>
+          <a:xfrm>
+            <a:off x="822960" y="1975104"/>
+            <a:ext cx="457200" cy="365760"/>
+          </a:xfrm>
+          <a:prstGeom prst="rect">
+            <a:avLst/>
+          </a:prstGeom>
+          <a:noFill/>
+        </p:spPr>
+        <p:txBody>
+          <a:bodyPr wrap="square">
+            <a:spAutoFit/>
+          </a:bodyPr>
+          <a:lstStyle/>
+          <a:p>
+            <a:pPr algn="ctr">
+              <a:defRPr sz="1500" b="1">
+                <a:solidFill>
+                  <a:srgbClr val="FFFFFF"/>
+                </a:solidFill>
+              </a:defRPr>
+            </a:pPr>
+            <a:r>
+              <a:t>1</a:t>
+            </a:r>
+          </a:p>
+        </p:txBody>
+      </p:sp>
+      <p:sp>
+        <p:nvSpPr>
+          <p:cNvPr id="10" name="TextBox 9"/>
+          <p:cNvSpPr txBox="1"/>
+          <p:nvPr/>
+        </p:nvSpPr>
+        <p:spPr>
+          <a:xfrm>
+            <a:off x="1417320" y="1965960"/>
+            <a:ext cx="1828800" cy="320040"/>
           </a:xfrm>
           <a:prstGeom prst="rect">
             <a:avLst/>
@@ -9224,107 +10629,70 @@
             <a:pPr algn="l">
               <a:defRPr sz="1300" b="1">
                 <a:solidFill>
+                  <a:srgbClr val="2563EB"/>
+                </a:solidFill>
+              </a:defRPr>
+            </a:pPr>
+            <a:r>
+              <a:t>SME</a:t>
+            </a:r>
+          </a:p>
+        </p:txBody>
+      </p:sp>
+      <p:sp>
+        <p:nvSpPr>
+          <p:cNvPr id="11" name="TextBox 10"/>
+          <p:cNvSpPr txBox="1"/>
+          <p:nvPr/>
+        </p:nvSpPr>
+        <p:spPr>
+          <a:xfrm>
+            <a:off x="3291840" y="1938528"/>
+            <a:ext cx="8046720" cy="502920"/>
+          </a:xfrm>
+          <a:prstGeom prst="rect">
+            <a:avLst/>
+          </a:prstGeom>
+          <a:noFill/>
+        </p:spPr>
+        <p:txBody>
+          <a:bodyPr wrap="square">
+            <a:spAutoFit/>
+          </a:bodyPr>
+          <a:lstStyle/>
+          <a:p>
+            <a:pPr algn="l">
+              <a:defRPr sz="1600" b="0">
+                <a:solidFill>
                   <a:srgbClr val="111827"/>
                 </a:solidFill>
               </a:defRPr>
             </a:pPr>
             <a:r>
-              <a:t>Manual bank LCs</a:t>
-            </a:r>
-          </a:p>
-        </p:txBody>
-      </p:sp>
-      <p:sp>
-        <p:nvSpPr>
-          <p:cNvPr id="13" name="TextBox 12"/>
-          <p:cNvSpPr txBox="1"/>
-          <p:nvPr/>
-        </p:nvSpPr>
-        <p:spPr>
-          <a:xfrm>
-            <a:off x="2926080" y="2331720"/>
-            <a:ext cx="4114800" cy="502920"/>
-          </a:xfrm>
-          <a:prstGeom prst="rect">
-            <a:avLst/>
-          </a:prstGeom>
-          <a:noFill/>
-        </p:spPr>
-        <p:txBody>
-          <a:bodyPr wrap="square">
-            <a:spAutoFit/>
-          </a:bodyPr>
-          <a:lstStyle/>
-          <a:p>
-            <a:pPr algn="l">
-              <a:defRPr sz="1200" b="0">
-                <a:solidFill>
-                  <a:srgbClr val="667085"/>
-                </a:solidFill>
-              </a:defRPr>
-            </a:pPr>
-            <a:r>
-              <a:t>7–10 days, paper-heavy, SME-unfriendly</a:t>
-            </a:r>
-          </a:p>
-        </p:txBody>
-      </p:sp>
-      <p:sp>
-        <p:nvSpPr>
-          <p:cNvPr id="14" name="TextBox 13"/>
-          <p:cNvSpPr txBox="1"/>
-          <p:nvPr/>
-        </p:nvSpPr>
-        <p:spPr>
-          <a:xfrm>
-            <a:off x="7223760" y="2331720"/>
-            <a:ext cx="4114800" cy="502920"/>
-          </a:xfrm>
-          <a:prstGeom prst="rect">
-            <a:avLst/>
-          </a:prstGeom>
-          <a:noFill/>
-        </p:spPr>
-        <p:txBody>
-          <a:bodyPr wrap="square">
-            <a:spAutoFit/>
-          </a:bodyPr>
-          <a:lstStyle/>
-          <a:p>
-            <a:pPr algn="l">
-              <a:defRPr sz="1200" b="0">
-                <a:solidFill>
-                  <a:srgbClr val="667085"/>
-                </a:solidFill>
-              </a:defRPr>
-            </a:pPr>
-            <a:r>
-              <a:t>Programmable escrow + verified delivery gate</a:t>
-            </a:r>
-          </a:p>
-        </p:txBody>
-      </p:sp>
-      <p:sp>
-        <p:nvSpPr>
-          <p:cNvPr id="15" name="Rectangle 14"/>
+              <a:t>Order → invoice → delivery proof</a:t>
+            </a:r>
+          </a:p>
+        </p:txBody>
+      </p:sp>
+      <p:sp>
+        <p:nvSpPr>
+          <p:cNvPr id="12" name="Rounded Rectangle 11"/>
           <p:cNvSpPr/>
           <p:nvPr/>
         </p:nvSpPr>
         <p:spPr>
           <a:xfrm>
-            <a:off x="640080" y="2953512"/>
-            <a:ext cx="10881360" cy="658368"/>
-          </a:xfrm>
-          <a:prstGeom prst="rect">
+            <a:off x="822960" y="2761488"/>
+            <a:ext cx="457200" cy="457200"/>
+          </a:xfrm>
+          <a:prstGeom prst="roundRect">
             <a:avLst/>
           </a:prstGeom>
           <a:solidFill>
-            <a:srgbClr val="FFFFFF"/>
+            <a:srgbClr val="2563EB"/>
           </a:solidFill>
           <a:ln>
-            <a:solidFill>
-              <a:srgbClr val="E7EAF1"/>
-            </a:solidFill>
+            <a:noFill/>
           </a:ln>
         </p:spPr>
         <p:style>
@@ -9351,14 +10719,49 @@
       </p:sp>
       <p:sp>
         <p:nvSpPr>
-          <p:cNvPr id="16" name="TextBox 15"/>
-          <p:cNvSpPr txBox="1"/>
-          <p:nvPr/>
-        </p:nvSpPr>
-        <p:spPr>
-          <a:xfrm>
-            <a:off x="777240" y="3081528"/>
-            <a:ext cx="2103120" cy="411480"/>
+          <p:cNvPr id="13" name="TextBox 12"/>
+          <p:cNvSpPr txBox="1"/>
+          <p:nvPr/>
+        </p:nvSpPr>
+        <p:spPr>
+          <a:xfrm>
+            <a:off x="822960" y="2816352"/>
+            <a:ext cx="457200" cy="365760"/>
+          </a:xfrm>
+          <a:prstGeom prst="rect">
+            <a:avLst/>
+          </a:prstGeom>
+          <a:noFill/>
+        </p:spPr>
+        <p:txBody>
+          <a:bodyPr wrap="square">
+            <a:spAutoFit/>
+          </a:bodyPr>
+          <a:lstStyle/>
+          <a:p>
+            <a:pPr algn="ctr">
+              <a:defRPr sz="1500" b="1">
+                <a:solidFill>
+                  <a:srgbClr val="FFFFFF"/>
+                </a:solidFill>
+              </a:defRPr>
+            </a:pPr>
+            <a:r>
+              <a:t>2</a:t>
+            </a:r>
+          </a:p>
+        </p:txBody>
+      </p:sp>
+      <p:sp>
+        <p:nvSpPr>
+          <p:cNvPr id="14" name="TextBox 13"/>
+          <p:cNvSpPr txBox="1"/>
+          <p:nvPr/>
+        </p:nvSpPr>
+        <p:spPr>
+          <a:xfrm>
+            <a:off x="1417320" y="2807208"/>
+            <a:ext cx="1828800" cy="320040"/>
           </a:xfrm>
           <a:prstGeom prst="rect">
             <a:avLst/>
@@ -9374,107 +10777,70 @@
             <a:pPr algn="l">
               <a:defRPr sz="1300" b="1">
                 <a:solidFill>
+                  <a:srgbClr val="2563EB"/>
+                </a:solidFill>
+              </a:defRPr>
+            </a:pPr>
+            <a:r>
+              <a:t>Buyer</a:t>
+            </a:r>
+          </a:p>
+        </p:txBody>
+      </p:sp>
+      <p:sp>
+        <p:nvSpPr>
+          <p:cNvPr id="15" name="TextBox 14"/>
+          <p:cNvSpPr txBox="1"/>
+          <p:nvPr/>
+        </p:nvSpPr>
+        <p:spPr>
+          <a:xfrm>
+            <a:off x="3291840" y="2779776"/>
+            <a:ext cx="8046720" cy="502920"/>
+          </a:xfrm>
+          <a:prstGeom prst="rect">
+            <a:avLst/>
+          </a:prstGeom>
+          <a:noFill/>
+        </p:spPr>
+        <p:txBody>
+          <a:bodyPr wrap="square">
+            <a:spAutoFit/>
+          </a:bodyPr>
+          <a:lstStyle/>
+          <a:p>
+            <a:pPr algn="l">
+              <a:defRPr sz="1600" b="0">
+                <a:solidFill>
                   <a:srgbClr val="111827"/>
                 </a:solidFill>
               </a:defRPr>
             </a:pPr>
             <a:r>
-              <a:t>Trade finance fintech</a:t>
-            </a:r>
-          </a:p>
-        </p:txBody>
-      </p:sp>
-      <p:sp>
-        <p:nvSpPr>
-          <p:cNvPr id="17" name="TextBox 16"/>
-          <p:cNvSpPr txBox="1"/>
-          <p:nvPr/>
-        </p:nvSpPr>
-        <p:spPr>
-          <a:xfrm>
-            <a:off x="2926080" y="3044952"/>
-            <a:ext cx="4114800" cy="502920"/>
-          </a:xfrm>
-          <a:prstGeom prst="rect">
-            <a:avLst/>
-          </a:prstGeom>
-          <a:noFill/>
-        </p:spPr>
-        <p:txBody>
-          <a:bodyPr wrap="square">
-            <a:spAutoFit/>
-          </a:bodyPr>
-          <a:lstStyle/>
-          <a:p>
-            <a:pPr algn="l">
-              <a:defRPr sz="1200" b="0">
-                <a:solidFill>
-                  <a:srgbClr val="667085"/>
-                </a:solidFill>
-              </a:defRPr>
-            </a:pPr>
-            <a:r>
-              <a:t>Off-chain docs; lenders still blind to delivery</a:t>
-            </a:r>
-          </a:p>
-        </p:txBody>
-      </p:sp>
-      <p:sp>
-        <p:nvSpPr>
-          <p:cNvPr id="18" name="TextBox 17"/>
-          <p:cNvSpPr txBox="1"/>
-          <p:nvPr/>
-        </p:nvSpPr>
-        <p:spPr>
-          <a:xfrm>
-            <a:off x="7223760" y="3044952"/>
-            <a:ext cx="4114800" cy="502920"/>
-          </a:xfrm>
-          <a:prstGeom prst="rect">
-            <a:avLst/>
-          </a:prstGeom>
-          <a:noFill/>
-        </p:spPr>
-        <p:txBody>
-          <a:bodyPr wrap="square">
-            <a:spAutoFit/>
-          </a:bodyPr>
-          <a:lstStyle/>
-          <a:p>
-            <a:pPr algn="l">
-              <a:defRPr sz="1200" b="0">
-                <a:solidFill>
-                  <a:srgbClr val="667085"/>
-                </a:solidFill>
-              </a:defRPr>
-            </a:pPr>
-            <a:r>
-              <a:t>Buyer-confirmed receivable + on-chain anchor</a:t>
-            </a:r>
-          </a:p>
-        </p:txBody>
-      </p:sp>
-      <p:sp>
-        <p:nvSpPr>
-          <p:cNvPr id="19" name="Rectangle 18"/>
+              <a:t>Confirm trade obligation</a:t>
+            </a:r>
+          </a:p>
+        </p:txBody>
+      </p:sp>
+      <p:sp>
+        <p:nvSpPr>
+          <p:cNvPr id="16" name="Rounded Rectangle 15"/>
           <p:cNvSpPr/>
           <p:nvPr/>
         </p:nvSpPr>
         <p:spPr>
           <a:xfrm>
-            <a:off x="640080" y="3666744"/>
-            <a:ext cx="10881360" cy="658368"/>
-          </a:xfrm>
-          <a:prstGeom prst="rect">
+            <a:off x="822960" y="3602736"/>
+            <a:ext cx="457200" cy="457200"/>
+          </a:xfrm>
+          <a:prstGeom prst="roundRect">
             <a:avLst/>
           </a:prstGeom>
           <a:solidFill>
-            <a:srgbClr val="EFF6FF"/>
+            <a:srgbClr val="2563EB"/>
           </a:solidFill>
           <a:ln>
-            <a:solidFill>
-              <a:srgbClr val="E7EAF1"/>
-            </a:solidFill>
+            <a:noFill/>
           </a:ln>
         </p:spPr>
         <p:style>
@@ -9501,14 +10867,49 @@
       </p:sp>
       <p:sp>
         <p:nvSpPr>
-          <p:cNvPr id="20" name="TextBox 19"/>
-          <p:cNvSpPr txBox="1"/>
-          <p:nvPr/>
-        </p:nvSpPr>
-        <p:spPr>
-          <a:xfrm>
-            <a:off x="777240" y="3794760"/>
-            <a:ext cx="2103120" cy="411480"/>
+          <p:cNvPr id="17" name="TextBox 16"/>
+          <p:cNvSpPr txBox="1"/>
+          <p:nvPr/>
+        </p:nvSpPr>
+        <p:spPr>
+          <a:xfrm>
+            <a:off x="822960" y="3657600"/>
+            <a:ext cx="457200" cy="365760"/>
+          </a:xfrm>
+          <a:prstGeom prst="rect">
+            <a:avLst/>
+          </a:prstGeom>
+          <a:noFill/>
+        </p:spPr>
+        <p:txBody>
+          <a:bodyPr wrap="square">
+            <a:spAutoFit/>
+          </a:bodyPr>
+          <a:lstStyle/>
+          <a:p>
+            <a:pPr algn="ctr">
+              <a:defRPr sz="1500" b="1">
+                <a:solidFill>
+                  <a:srgbClr val="FFFFFF"/>
+                </a:solidFill>
+              </a:defRPr>
+            </a:pPr>
+            <a:r>
+              <a:t>3</a:t>
+            </a:r>
+          </a:p>
+        </p:txBody>
+      </p:sp>
+      <p:sp>
+        <p:nvSpPr>
+          <p:cNvPr id="18" name="TextBox 17"/>
+          <p:cNvSpPr txBox="1"/>
+          <p:nvPr/>
+        </p:nvSpPr>
+        <p:spPr>
+          <a:xfrm>
+            <a:off x="1417320" y="3648456"/>
+            <a:ext cx="1828800" cy="320040"/>
           </a:xfrm>
           <a:prstGeom prst="rect">
             <a:avLst/>
@@ -9529,21 +10930,21 @@
               </a:defRPr>
             </a:pPr>
             <a:r>
-              <a:t>Generic RWA / trade chains</a:t>
-            </a:r>
-          </a:p>
-        </p:txBody>
-      </p:sp>
-      <p:sp>
-        <p:nvSpPr>
-          <p:cNvPr id="21" name="TextBox 20"/>
-          <p:cNvSpPr txBox="1"/>
-          <p:nvPr/>
-        </p:nvSpPr>
-        <p:spPr>
-          <a:xfrm>
-            <a:off x="2926080" y="3758184"/>
-            <a:ext cx="4114800" cy="502920"/>
+              <a:t>SME</a:t>
+            </a:r>
+          </a:p>
+        </p:txBody>
+      </p:sp>
+      <p:sp>
+        <p:nvSpPr>
+          <p:cNvPr id="19" name="TextBox 18"/>
+          <p:cNvSpPr txBox="1"/>
+          <p:nvPr/>
+        </p:nvSpPr>
+        <p:spPr>
+          <a:xfrm>
+            <a:off x="3291840" y="3621024"/>
+            <a:ext cx="8046720" cy="502920"/>
           </a:xfrm>
           <a:prstGeom prst="rect">
             <a:avLst/>
@@ -9557,74 +10958,37 @@
           <a:lstStyle/>
           <a:p>
             <a:pPr algn="l">
-              <a:defRPr sz="1200" b="0">
-                <a:solidFill>
-                  <a:srgbClr val="667085"/>
-                </a:solidFill>
-              </a:defRPr>
-            </a:pPr>
-            <a:r>
-              <a:t>Hash demos; simulated chain links</a:t>
-            </a:r>
-          </a:p>
-        </p:txBody>
-      </p:sp>
-      <p:sp>
-        <p:nvSpPr>
-          <p:cNvPr id="22" name="TextBox 21"/>
-          <p:cNvSpPr txBox="1"/>
-          <p:nvPr/>
-        </p:nvSpPr>
-        <p:spPr>
-          <a:xfrm>
-            <a:off x="7223760" y="3758184"/>
-            <a:ext cx="4114800" cy="502920"/>
-          </a:xfrm>
-          <a:prstGeom prst="rect">
-            <a:avLst/>
-          </a:prstGeom>
-          <a:noFill/>
-        </p:spPr>
-        <p:txBody>
-          <a:bodyPr wrap="square">
-            <a:spAutoFit/>
-          </a:bodyPr>
-          <a:lstStyle/>
-          <a:p>
-            <a:pPr algn="l">
-              <a:defRPr sz="1200" b="1">
+              <a:defRPr sz="1600" b="0">
                 <a:solidFill>
                   <a:srgbClr val="111827"/>
                 </a:solidFill>
               </a:defRPr>
             </a:pPr>
             <a:r>
-              <a:t>Fail-closed product · live Amoy · four-role workspaces</a:t>
-            </a:r>
-          </a:p>
-        </p:txBody>
-      </p:sp>
-      <p:sp>
-        <p:nvSpPr>
-          <p:cNvPr id="23" name="Rectangle 22"/>
+              <a:t>Create receivable · anchor proof on Polygon</a:t>
+            </a:r>
+          </a:p>
+        </p:txBody>
+      </p:sp>
+      <p:sp>
+        <p:nvSpPr>
+          <p:cNvPr id="20" name="Rounded Rectangle 19"/>
           <p:cNvSpPr/>
           <p:nvPr/>
         </p:nvSpPr>
         <p:spPr>
           <a:xfrm>
-            <a:off x="640080" y="4379976"/>
-            <a:ext cx="10881360" cy="658368"/>
-          </a:xfrm>
-          <a:prstGeom prst="rect">
+            <a:off x="822960" y="4443984"/>
+            <a:ext cx="457200" cy="457200"/>
+          </a:xfrm>
+          <a:prstGeom prst="roundRect">
             <a:avLst/>
           </a:prstGeom>
           <a:solidFill>
-            <a:srgbClr val="FFFFFF"/>
+            <a:srgbClr val="2563EB"/>
           </a:solidFill>
           <a:ln>
-            <a:solidFill>
-              <a:srgbClr val="E7EAF1"/>
-            </a:solidFill>
+            <a:noFill/>
           </a:ln>
         </p:spPr>
         <p:style>
@@ -9651,14 +11015,49 @@
       </p:sp>
       <p:sp>
         <p:nvSpPr>
-          <p:cNvPr id="24" name="TextBox 23"/>
-          <p:cNvSpPr txBox="1"/>
-          <p:nvPr/>
-        </p:nvSpPr>
-        <p:spPr>
-          <a:xfrm>
-            <a:off x="777240" y="4507992"/>
-            <a:ext cx="2103120" cy="411480"/>
+          <p:cNvPr id="21" name="TextBox 20"/>
+          <p:cNvSpPr txBox="1"/>
+          <p:nvPr/>
+        </p:nvSpPr>
+        <p:spPr>
+          <a:xfrm>
+            <a:off x="822960" y="4498848"/>
+            <a:ext cx="457200" cy="365760"/>
+          </a:xfrm>
+          <a:prstGeom prst="rect">
+            <a:avLst/>
+          </a:prstGeom>
+          <a:noFill/>
+        </p:spPr>
+        <p:txBody>
+          <a:bodyPr wrap="square">
+            <a:spAutoFit/>
+          </a:bodyPr>
+          <a:lstStyle/>
+          <a:p>
+            <a:pPr algn="ctr">
+              <a:defRPr sz="1500" b="1">
+                <a:solidFill>
+                  <a:srgbClr val="FFFFFF"/>
+                </a:solidFill>
+              </a:defRPr>
+            </a:pPr>
+            <a:r>
+              <a:t>4</a:t>
+            </a:r>
+          </a:p>
+        </p:txBody>
+      </p:sp>
+      <p:sp>
+        <p:nvSpPr>
+          <p:cNvPr id="22" name="TextBox 21"/>
+          <p:cNvSpPr txBox="1"/>
+          <p:nvPr/>
+        </p:nvSpPr>
+        <p:spPr>
+          <a:xfrm>
+            <a:off x="1417320" y="4489704"/>
+            <a:ext cx="1828800" cy="320040"/>
           </a:xfrm>
           <a:prstGeom prst="rect">
             <a:avLst/>
@@ -9674,13 +11073,91 @@
             <a:pPr algn="l">
               <a:defRPr sz="1300" b="1">
                 <a:solidFill>
+                  <a:srgbClr val="2563EB"/>
+                </a:solidFill>
+              </a:defRPr>
+            </a:pPr>
+            <a:r>
+              <a:t>Financier</a:t>
+            </a:r>
+          </a:p>
+        </p:txBody>
+      </p:sp>
+      <p:sp>
+        <p:nvSpPr>
+          <p:cNvPr id="23" name="TextBox 22"/>
+          <p:cNvSpPr txBox="1"/>
+          <p:nvPr/>
+        </p:nvSpPr>
+        <p:spPr>
+          <a:xfrm>
+            <a:off x="3291840" y="4462272"/>
+            <a:ext cx="8046720" cy="502920"/>
+          </a:xfrm>
+          <a:prstGeom prst="rect">
+            <a:avLst/>
+          </a:prstGeom>
+          <a:noFill/>
+        </p:spPr>
+        <p:txBody>
+          <a:bodyPr wrap="square">
+            <a:spAutoFit/>
+          </a:bodyPr>
+          <a:lstStyle/>
+          <a:p>
+            <a:pPr algn="l">
+              <a:defRPr sz="1600" b="0">
+                <a:solidFill>
                   <a:srgbClr val="111827"/>
                 </a:solidFill>
               </a:defRPr>
             </a:pPr>
             <a:r>
-              <a:t>Remittance / POS apps</a:t>
-            </a:r>
+              <a:t>Deal room review · fund Smart LC escrow</a:t>
+            </a:r>
+          </a:p>
+        </p:txBody>
+      </p:sp>
+      <p:sp>
+        <p:nvSpPr>
+          <p:cNvPr id="24" name="Rounded Rectangle 23"/>
+          <p:cNvSpPr/>
+          <p:nvPr/>
+        </p:nvSpPr>
+        <p:spPr>
+          <a:xfrm>
+            <a:off x="822960" y="5285232"/>
+            <a:ext cx="457200" cy="457200"/>
+          </a:xfrm>
+          <a:prstGeom prst="roundRect">
+            <a:avLst/>
+          </a:prstGeom>
+          <a:solidFill>
+            <a:srgbClr val="2563EB"/>
+          </a:solidFill>
+          <a:ln>
+            <a:noFill/>
+          </a:ln>
+        </p:spPr>
+        <p:style>
+          <a:lnRef idx="1">
+            <a:schemeClr val="accent1"/>
+          </a:lnRef>
+          <a:fillRef idx="3">
+            <a:schemeClr val="accent1"/>
+          </a:fillRef>
+          <a:effectRef idx="2">
+            <a:schemeClr val="accent1"/>
+          </a:effectRef>
+          <a:fontRef idx="minor">
+            <a:schemeClr val="lt1"/>
+          </a:fontRef>
+        </p:style>
+        <p:txBody>
+          <a:bodyPr rtlCol="0" anchor="ctr"/>
+          <a:lstStyle/>
+          <a:p>
+            <a:pPr algn="ctr"/>
           </a:p>
         </p:txBody>
       </p:sp>
@@ -9692,29 +11169,29 @@
         </p:nvSpPr>
         <p:spPr>
           <a:xfrm>
-            <a:off x="2926080" y="4471416"/>
-            <a:ext cx="4114800" cy="502920"/>
-          </a:xfrm>
-          <a:prstGeom prst="rect">
-            <a:avLst/>
-          </a:prstGeom>
-          <a:noFill/>
-        </p:spPr>
-        <p:txBody>
-          <a:bodyPr wrap="square">
-            <a:spAutoFit/>
-          </a:bodyPr>
-          <a:lstStyle/>
-          <a:p>
-            <a:pPr algn="l">
-              <a:defRPr sz="1200" b="0">
-                <a:solidFill>
-                  <a:srgbClr val="667085"/>
-                </a:solidFill>
-              </a:defRPr>
-            </a:pPr>
-            <a:r>
-              <a:t>Consumer wedge; not receivables finance</a:t>
+            <a:off x="822960" y="5340096"/>
+            <a:ext cx="457200" cy="365760"/>
+          </a:xfrm>
+          <a:prstGeom prst="rect">
+            <a:avLst/>
+          </a:prstGeom>
+          <a:noFill/>
+        </p:spPr>
+        <p:txBody>
+          <a:bodyPr wrap="square">
+            <a:spAutoFit/>
+          </a:bodyPr>
+          <a:lstStyle/>
+          <a:p>
+            <a:pPr algn="ctr">
+              <a:defRPr sz="1500" b="1">
+                <a:solidFill>
+                  <a:srgbClr val="FFFFFF"/>
+                </a:solidFill>
+              </a:defRPr>
+            </a:pPr>
+            <a:r>
+              <a:t>5</a:t>
             </a:r>
           </a:p>
         </p:txBody>
@@ -9727,43 +11204,8 @@
         </p:nvSpPr>
         <p:spPr>
           <a:xfrm>
-            <a:off x="7223760" y="4471416"/>
-            <a:ext cx="4114800" cy="502920"/>
-          </a:xfrm>
-          <a:prstGeom prst="rect">
-            <a:avLst/>
-          </a:prstGeom>
-          <a:noFill/>
-        </p:spPr>
-        <p:txBody>
-          <a:bodyPr wrap="square">
-            <a:spAutoFit/>
-          </a:bodyPr>
-          <a:lstStyle/>
-          <a:p>
-            <a:pPr algn="l">
-              <a:defRPr sz="1200" b="0">
-                <a:solidFill>
-                  <a:srgbClr val="667085"/>
-                </a:solidFill>
-              </a:defRPr>
-            </a:pPr>
-            <a:r>
-              <a:t>B2B settlement slice of UAE corridor</a:t>
-            </a:r>
-          </a:p>
-        </p:txBody>
-      </p:sp>
-      <p:sp>
-        <p:nvSpPr>
-          <p:cNvPr id="27" name="TextBox 26"/>
-          <p:cNvSpPr txBox="1"/>
-          <p:nvPr/>
-        </p:nvSpPr>
-        <p:spPr>
-          <a:xfrm>
-            <a:off x="822960" y="5806440"/>
-            <a:ext cx="10515600" cy="411480"/>
+            <a:off x="1417320" y="5330952"/>
+            <a:ext cx="1828800" cy="320040"/>
           </a:xfrm>
           <a:prstGeom prst="rect">
             <a:avLst/>
@@ -9779,12 +11221,127 @@
             <a:pPr algn="l">
               <a:defRPr sz="1300" b="1">
                 <a:solidFill>
+                  <a:srgbClr val="2563EB"/>
+                </a:solidFill>
+              </a:defRPr>
+            </a:pPr>
+            <a:r>
+              <a:t>System</a:t>
+            </a:r>
+          </a:p>
+        </p:txBody>
+      </p:sp>
+      <p:sp>
+        <p:nvSpPr>
+          <p:cNvPr id="27" name="TextBox 26"/>
+          <p:cNvSpPr txBox="1"/>
+          <p:nvPr/>
+        </p:nvSpPr>
+        <p:spPr>
+          <a:xfrm>
+            <a:off x="3291840" y="5303520"/>
+            <a:ext cx="8046720" cy="502920"/>
+          </a:xfrm>
+          <a:prstGeom prst="rect">
+            <a:avLst/>
+          </a:prstGeom>
+          <a:noFill/>
+        </p:spPr>
+        <p:txBody>
+          <a:bodyPr wrap="square">
+            <a:spAutoFit/>
+          </a:bodyPr>
+          <a:lstStyle/>
+          <a:p>
+            <a:pPr algn="l">
+              <a:defRPr sz="1600" b="0">
+                <a:solidFill>
                   <a:srgbClr val="111827"/>
                 </a:solidFill>
               </a:defRPr>
             </a:pPr>
             <a:r>
-              <a:t>Moat compounds: corridor data + financier network + token-agnostic escrow + evidence governance IP</a:t>
+              <a:t>Verify delivery · release stablecoin to seller</a:t>
+            </a:r>
+          </a:p>
+        </p:txBody>
+      </p:sp>
+      <p:sp>
+        <p:nvSpPr>
+          <p:cNvPr id="28" name="Rounded Rectangle 27"/>
+          <p:cNvSpPr/>
+          <p:nvPr/>
+        </p:nvSpPr>
+        <p:spPr>
+          <a:xfrm>
+            <a:off x="822960" y="5623560"/>
+            <a:ext cx="10515600" cy="502920"/>
+          </a:xfrm>
+          <a:prstGeom prst="roundRect">
+            <a:avLst/>
+          </a:prstGeom>
+          <a:solidFill>
+            <a:srgbClr val="ECFDF5"/>
+          </a:solidFill>
+          <a:ln>
+            <a:solidFill>
+              <a:srgbClr val="16A34A"/>
+            </a:solidFill>
+          </a:ln>
+        </p:spPr>
+        <p:style>
+          <a:lnRef idx="1">
+            <a:schemeClr val="accent1"/>
+          </a:lnRef>
+          <a:fillRef idx="3">
+            <a:schemeClr val="accent1"/>
+          </a:fillRef>
+          <a:effectRef idx="2">
+            <a:schemeClr val="accent1"/>
+          </a:effectRef>
+          <a:fontRef idx="minor">
+            <a:schemeClr val="lt1"/>
+          </a:fontRef>
+        </p:style>
+        <p:txBody>
+          <a:bodyPr rtlCol="0" anchor="ctr"/>
+          <a:lstStyle/>
+          <a:p>
+            <a:pPr algn="ctr"/>
+          </a:p>
+        </p:txBody>
+      </p:sp>
+      <p:sp>
+        <p:nvSpPr>
+          <p:cNvPr id="29" name="TextBox 28"/>
+          <p:cNvSpPr txBox="1"/>
+          <p:nvPr/>
+        </p:nvSpPr>
+        <p:spPr>
+          <a:xfrm>
+            <a:off x="960120" y="5715000"/>
+            <a:ext cx="10241280" cy="365760"/>
+          </a:xfrm>
+          <a:prstGeom prst="rect">
+            <a:avLst/>
+          </a:prstGeom>
+          <a:noFill/>
+        </p:spPr>
+        <p:txBody>
+          <a:bodyPr wrap="square">
+            <a:spAutoFit/>
+          </a:bodyPr>
+          <a:lstStyle/>
+          <a:p>
+            <a:pPr algn="l">
+              <a:defRPr sz="1300" b="1">
+                <a:solidFill>
+                  <a:srgbClr val="16A34A"/>
+                </a:solidFill>
+              </a:defRPr>
+            </a:pPr>
+            <a:r>
+              <a:t>Example trade: AED 250k invoice → 80% advance (AED 200k) → Smart LC funded → released same day after verified delivery</a:t>
             </a:r>
           </a:p>
         </p:txBody>
@@ -9845,7 +11402,7 @@
               </a:defRPr>
             </a:pPr>
             <a:r>
-              <a:t>BUSINESS MODEL</a:t>
+              <a:t>TRACTION &amp; PROOF</a:t>
             </a:r>
           </a:p>
         </p:txBody>
@@ -9880,7 +11437,7 @@
               </a:defRPr>
             </a:pPr>
             <a:r>
-              <a:t>Who pays: financiers and platform users — API expands TAM</a:t>
+              <a:t>Built, deployed, and testable — not a concept deck</a:t>
             </a:r>
           </a:p>
         </p:txBody>
@@ -10049,8 +11606,208 @@
         </p:nvSpPr>
         <p:spPr>
           <a:xfrm>
-            <a:off x="822960" y="2011680"/>
-            <a:ext cx="3108960" cy="365760"/>
+            <a:off x="822960" y="1828800"/>
+            <a:ext cx="5029200" cy="3200400"/>
+          </a:xfrm>
+          <a:prstGeom prst="rect">
+            <a:avLst/>
+          </a:prstGeom>
+          <a:noFill/>
+        </p:spPr>
+        <p:txBody>
+          <a:bodyPr wrap="square">
+            <a:spAutoFit/>
+          </a:bodyPr>
+          <a:lstStyle/>
+          <a:p>
+            <a:pPr>
+              <a:spcAft>
+                <a:spcPts val="603"/>
+              </a:spcAft>
+              <a:defRPr sz="1500">
+                <a:solidFill>
+                  <a:srgbClr val="111827"/>
+                </a:solidFill>
+              </a:defRPr>
+            </a:pPr>
+            <a:r>
+              <a:t>Production deploy: credara-jet.vercel.app + credara-api.vercel.app</a:t>
+            </a:r>
+          </a:p>
+          <a:p>
+            <a:pPr>
+              <a:spcAft>
+                <a:spcPts val="603"/>
+              </a:spcAft>
+              <a:defRPr sz="1500">
+                <a:solidFill>
+                  <a:srgbClr val="111827"/>
+                </a:solidFill>
+              </a:defRPr>
+            </a:pPr>
+            <a:r>
+              <a:t>Smart LC factory wired: create → fund → verify → release on Amoy</a:t>
+            </a:r>
+          </a:p>
+          <a:p>
+            <a:pPr>
+              <a:spcAft>
+                <a:spcPts val="603"/>
+              </a:spcAft>
+              <a:defRPr sz="1500">
+                <a:solidFill>
+                  <a:srgbClr val="111827"/>
+                </a:solidFill>
+              </a:defRPr>
+            </a:pPr>
+            <a:r>
+              <a:t>Auth0 OAuth + password auth · Didit KYB abstraction · Postgres persistence</a:t>
+            </a:r>
+          </a:p>
+          <a:p>
+            <a:pPr>
+              <a:spcAft>
+                <a:spcPts val="603"/>
+              </a:spcAft>
+              <a:defRPr sz="1500">
+                <a:solidFill>
+                  <a:srgbClr val="111827"/>
+                </a:solidFill>
+              </a:defRPr>
+            </a:pPr>
+            <a:r>
+              <a:t>Slither + Hardhat in CI · role-separated escrow contracts</a:t>
+            </a:r>
+          </a:p>
+          <a:p>
+            <a:pPr>
+              <a:spcAft>
+                <a:spcPts val="603"/>
+              </a:spcAft>
+              <a:defRPr sz="1500">
+                <a:solidFill>
+                  <a:srgbClr val="111827"/>
+                </a:solidFill>
+              </a:defRPr>
+            </a:pPr>
+            <a:r>
+              <a:t>Judge Mode: guided 3-min demo for reviewers and investors</a:t>
+            </a:r>
+          </a:p>
+        </p:txBody>
+      </p:sp>
+      <p:pic>
+        <p:nvPicPr>
+          <p:cNvPr id="9" name="Picture 8" descr="workspace-judge-mode.png"/>
+          <p:cNvPicPr>
+            <a:picLocks noChangeAspect="1"/>
+          </p:cNvPicPr>
+          <p:nvPr/>
+        </p:nvPicPr>
+        <p:blipFill>
+          <a:blip r:embed="rId2"/>
+          <a:stretch>
+            <a:fillRect/>
+          </a:stretch>
+        </p:blipFill>
+        <p:spPr>
+          <a:xfrm>
+            <a:off x="6035040" y="1828800"/>
+            <a:ext cx="5394960" cy="3596640"/>
+          </a:xfrm>
+          <a:prstGeom prst="rect">
+            <a:avLst/>
+          </a:prstGeom>
+        </p:spPr>
+      </p:pic>
+      <p:sp>
+        <p:nvSpPr>
+          <p:cNvPr id="10" name="TextBox 9"/>
+          <p:cNvSpPr txBox="1"/>
+          <p:nvPr/>
+        </p:nvSpPr>
+        <p:spPr>
+          <a:xfrm>
+            <a:off x="6035040" y="5440680"/>
+            <a:ext cx="5394960" cy="274320"/>
+          </a:xfrm>
+          <a:prstGeom prst="rect">
+            <a:avLst/>
+          </a:prstGeom>
+          <a:noFill/>
+        </p:spPr>
+        <p:txBody>
+          <a:bodyPr wrap="square">
+            <a:spAutoFit/>
+          </a:bodyPr>
+          <a:lstStyle/>
+          <a:p>
+            <a:pPr algn="ctr">
+              <a:defRPr sz="1000" b="0">
+                <a:solidFill>
+                  <a:srgbClr val="667085"/>
+                </a:solidFill>
+              </a:defRPr>
+            </a:pPr>
+            <a:r>
+              <a:t>Enterprise workspace (live product)</a:t>
+            </a:r>
+          </a:p>
+        </p:txBody>
+      </p:sp>
+      <p:sp>
+        <p:nvSpPr>
+          <p:cNvPr id="11" name="Rounded Rectangle 10"/>
+          <p:cNvSpPr/>
+          <p:nvPr/>
+        </p:nvSpPr>
+        <p:spPr>
+          <a:xfrm>
+            <a:off x="822960" y="5074920"/>
+            <a:ext cx="5029200" cy="1051560"/>
+          </a:xfrm>
+          <a:prstGeom prst="roundRect">
+            <a:avLst/>
+          </a:prstGeom>
+          <a:solidFill>
+            <a:srgbClr val="07142F"/>
+          </a:solidFill>
+          <a:ln>
+            <a:noFill/>
+          </a:ln>
+        </p:spPr>
+        <p:style>
+          <a:lnRef idx="1">
+            <a:schemeClr val="accent1"/>
+          </a:lnRef>
+          <a:fillRef idx="3">
+            <a:schemeClr val="accent1"/>
+          </a:fillRef>
+          <a:effectRef idx="2">
+            <a:schemeClr val="accent1"/>
+          </a:effectRef>
+          <a:fontRef idx="minor">
+            <a:schemeClr val="lt1"/>
+          </a:fontRef>
+        </p:style>
+        <p:txBody>
+          <a:bodyPr rtlCol="0" anchor="ctr"/>
+          <a:lstStyle/>
+          <a:p>
+            <a:pPr algn="ctr"/>
+          </a:p>
+        </p:txBody>
+      </p:sp>
+      <p:sp>
+        <p:nvSpPr>
+          <p:cNvPr id="12" name="TextBox 11"/>
+          <p:cNvSpPr txBox="1"/>
+          <p:nvPr/>
+        </p:nvSpPr>
+        <p:spPr>
+          <a:xfrm>
+            <a:off x="960120" y="5193792"/>
+            <a:ext cx="4754880" cy="320040"/>
           </a:xfrm>
           <a:prstGeom prst="rect">
             <a:avLst/>
@@ -10064,28 +11821,52 @@
           <a:lstStyle/>
           <a:p>
             <a:pPr algn="l">
-              <a:defRPr sz="1600" b="1">
-                <a:solidFill>
-                  <a:srgbClr val="2563EB"/>
-                </a:solidFill>
-              </a:defRPr>
-            </a:pPr>
-            <a:r>
-              <a:t>Financing origination</a:t>
-            </a:r>
-          </a:p>
-        </p:txBody>
-      </p:sp>
-      <p:sp>
-        <p:nvSpPr>
-          <p:cNvPr id="9" name="TextBox 8"/>
-          <p:cNvSpPr txBox="1"/>
-          <p:nvPr/>
-        </p:nvSpPr>
-        <p:spPr>
-          <a:xfrm>
-            <a:off x="4023360" y="2011680"/>
-            <a:ext cx="7406640" cy="457200"/>
+              <a:defRPr sz="1200" b="1">
+                <a:solidFill>
+                  <a:srgbClr val="FFFFFF"/>
+                </a:solidFill>
+              </a:defRPr>
+            </a:pPr>
+            <a:r>
+              <a:t>Proof moment (demo climax)</a:t>
+            </a:r>
+          </a:p>
+        </p:txBody>
+      </p:sp>
+      <p:pic>
+        <p:nvPicPr>
+          <p:cNvPr id="13" name="Picture 12" descr="polygonscan-tx.png"/>
+          <p:cNvPicPr>
+            <a:picLocks noChangeAspect="1"/>
+          </p:cNvPicPr>
+          <p:nvPr/>
+        </p:nvPicPr>
+        <p:blipFill>
+          <a:blip r:embed="rId3"/>
+          <a:stretch>
+            <a:fillRect/>
+          </a:stretch>
+        </p:blipFill>
+        <p:spPr>
+          <a:xfrm>
+            <a:off x="960120" y="5532120"/>
+            <a:ext cx="2194560" cy="1234440"/>
+          </a:xfrm>
+          <a:prstGeom prst="rect">
+            <a:avLst/>
+          </a:prstGeom>
+        </p:spPr>
+      </p:pic>
+      <p:sp>
+        <p:nvSpPr>
+          <p:cNvPr id="14" name="TextBox 13"/>
+          <p:cNvSpPr txBox="1"/>
+          <p:nvPr/>
+        </p:nvSpPr>
+        <p:spPr>
+          <a:xfrm>
+            <a:off x="3291840" y="5532120"/>
+            <a:ext cx="2377440" cy="502920"/>
           </a:xfrm>
           <a:prstGeom prst="rect">
             <a:avLst/>
@@ -10099,259 +11880,14 @@
           <a:lstStyle/>
           <a:p>
             <a:pPr algn="l">
-              <a:defRPr sz="1600" b="0">
-                <a:solidFill>
-                  <a:srgbClr val="111827"/>
-                </a:solidFill>
-              </a:defRPr>
-            </a:pPr>
-            <a:r>
-              <a:t>Fee when receivable is funded via Smart LC marketplace</a:t>
-            </a:r>
-          </a:p>
-        </p:txBody>
-      </p:sp>
-      <p:sp>
-        <p:nvSpPr>
-          <p:cNvPr id="10" name="TextBox 9"/>
-          <p:cNvSpPr txBox="1"/>
-          <p:nvPr/>
-        </p:nvSpPr>
-        <p:spPr>
-          <a:xfrm>
-            <a:off x="822960" y="2761488"/>
-            <a:ext cx="3108960" cy="365760"/>
-          </a:xfrm>
-          <a:prstGeom prst="rect">
-            <a:avLst/>
-          </a:prstGeom>
-          <a:noFill/>
-        </p:spPr>
-        <p:txBody>
-          <a:bodyPr wrap="square">
-            <a:spAutoFit/>
-          </a:bodyPr>
-          <a:lstStyle/>
-          <a:p>
-            <a:pPr algn="l">
-              <a:defRPr sz="1600" b="1">
-                <a:solidFill>
-                  <a:srgbClr val="2563EB"/>
-                </a:solidFill>
-              </a:defRPr>
-            </a:pPr>
-            <a:r>
-              <a:t>Platform / SaaS</a:t>
-            </a:r>
-          </a:p>
-        </p:txBody>
-      </p:sp>
-      <p:sp>
-        <p:nvSpPr>
-          <p:cNvPr id="11" name="TextBox 10"/>
-          <p:cNvSpPr txBox="1"/>
-          <p:nvPr/>
-        </p:nvSpPr>
-        <p:spPr>
-          <a:xfrm>
-            <a:off x="4023360" y="2761488"/>
-            <a:ext cx="7406640" cy="457200"/>
-          </a:xfrm>
-          <a:prstGeom prst="rect">
-            <a:avLst/>
-          </a:prstGeom>
-          <a:noFill/>
-        </p:spPr>
-        <p:txBody>
-          <a:bodyPr wrap="square">
-            <a:spAutoFit/>
-          </a:bodyPr>
-          <a:lstStyle/>
-          <a:p>
-            <a:pPr algn="l">
-              <a:defRPr sz="1600" b="0">
-                <a:solidFill>
-                  <a:srgbClr val="111827"/>
-                </a:solidFill>
-              </a:defRPr>
-            </a:pPr>
-            <a:r>
-              <a:t>Verification, deal room, reporting — tiered by volume</a:t>
-            </a:r>
-          </a:p>
-        </p:txBody>
-      </p:sp>
-      <p:sp>
-        <p:nvSpPr>
-          <p:cNvPr id="12" name="TextBox 11"/>
-          <p:cNvSpPr txBox="1"/>
-          <p:nvPr/>
-        </p:nvSpPr>
-        <p:spPr>
-          <a:xfrm>
-            <a:off x="822960" y="3511296"/>
-            <a:ext cx="3108960" cy="365760"/>
-          </a:xfrm>
-          <a:prstGeom prst="rect">
-            <a:avLst/>
-          </a:prstGeom>
-          <a:noFill/>
-        </p:spPr>
-        <p:txBody>
-          <a:bodyPr wrap="square">
-            <a:spAutoFit/>
-          </a:bodyPr>
-          <a:lstStyle/>
-          <a:p>
-            <a:pPr algn="l">
-              <a:defRPr sz="1600" b="1">
-                <a:solidFill>
-                  <a:srgbClr val="2563EB"/>
-                </a:solidFill>
-              </a:defRPr>
-            </a:pPr>
-            <a:r>
-              <a:t>Settlement / escrow</a:t>
-            </a:r>
-          </a:p>
-        </p:txBody>
-      </p:sp>
-      <p:sp>
-        <p:nvSpPr>
-          <p:cNvPr id="13" name="TextBox 12"/>
-          <p:cNvSpPr txBox="1"/>
-          <p:nvPr/>
-        </p:nvSpPr>
-        <p:spPr>
-          <a:xfrm>
-            <a:off x="4023360" y="3511296"/>
-            <a:ext cx="7406640" cy="457200"/>
-          </a:xfrm>
-          <a:prstGeom prst="rect">
-            <a:avLst/>
-          </a:prstGeom>
-          <a:noFill/>
-        </p:spPr>
-        <p:txBody>
-          <a:bodyPr wrap="square">
-            <a:spAutoFit/>
-          </a:bodyPr>
-          <a:lstStyle/>
-          <a:p>
-            <a:pPr algn="l">
-              <a:defRPr sz="1600" b="0">
-                <a:solidFill>
-                  <a:srgbClr val="111827"/>
-                </a:solidFill>
-              </a:defRPr>
-            </a:pPr>
-            <a:r>
-              <a:t>Basis points per fund/release vs. multi-day bank LC cost</a:t>
-            </a:r>
-          </a:p>
-        </p:txBody>
-      </p:sp>
-      <p:sp>
-        <p:nvSpPr>
-          <p:cNvPr id="14" name="TextBox 13"/>
-          <p:cNvSpPr txBox="1"/>
-          <p:nvPr/>
-        </p:nvSpPr>
-        <p:spPr>
-          <a:xfrm>
-            <a:off x="822960" y="4261104"/>
-            <a:ext cx="3108960" cy="365760"/>
-          </a:xfrm>
-          <a:prstGeom prst="rect">
-            <a:avLst/>
-          </a:prstGeom>
-          <a:noFill/>
-        </p:spPr>
-        <p:txBody>
-          <a:bodyPr wrap="square">
-            <a:spAutoFit/>
-          </a:bodyPr>
-          <a:lstStyle/>
-          <a:p>
-            <a:pPr algn="l">
-              <a:defRPr sz="1600" b="1">
-                <a:solidFill>
-                  <a:srgbClr val="2563EB"/>
-                </a:solidFill>
-              </a:defRPr>
-            </a:pPr>
-            <a:r>
-              <a:t>Credit scoring API</a:t>
-            </a:r>
-          </a:p>
-        </p:txBody>
-      </p:sp>
-      <p:sp>
-        <p:nvSpPr>
-          <p:cNvPr id="15" name="TextBox 14"/>
-          <p:cNvSpPr txBox="1"/>
-          <p:nvPr/>
-        </p:nvSpPr>
-        <p:spPr>
-          <a:xfrm>
-            <a:off x="4023360" y="4261104"/>
-            <a:ext cx="7406640" cy="457200"/>
-          </a:xfrm>
-          <a:prstGeom prst="rect">
-            <a:avLst/>
-          </a:prstGeom>
-          <a:noFill/>
-        </p:spPr>
-        <p:txBody>
-          <a:bodyPr wrap="square">
-            <a:spAutoFit/>
-          </a:bodyPr>
-          <a:lstStyle/>
-          <a:p>
-            <a:pPr algn="l">
-              <a:defRPr sz="1600" b="0">
-                <a:solidFill>
-                  <a:srgbClr val="111827"/>
-                </a:solidFill>
-              </a:defRPr>
-            </a:pPr>
-            <a:r>
-              <a:t>On-chain attestations for external lenders without full UI</a:t>
-            </a:r>
-          </a:p>
-        </p:txBody>
-      </p:sp>
-      <p:sp>
-        <p:nvSpPr>
-          <p:cNvPr id="16" name="TextBox 15"/>
-          <p:cNvSpPr txBox="1"/>
-          <p:nvPr/>
-        </p:nvSpPr>
-        <p:spPr>
-          <a:xfrm>
-            <a:off x="822960" y="5257800"/>
-            <a:ext cx="10515600" cy="502920"/>
-          </a:xfrm>
-          <a:prstGeom prst="rect">
-            <a:avLst/>
-          </a:prstGeom>
-          <a:noFill/>
-        </p:spPr>
-        <p:txBody>
-          <a:bodyPr wrap="square">
-            <a:spAutoFit/>
-          </a:bodyPr>
-          <a:lstStyle/>
-          <a:p>
-            <a:pPr algn="l">
-              <a:defRPr sz="1500" b="1">
-                <a:solidFill>
-                  <a:srgbClr val="16A34A"/>
-                </a:solidFill>
-              </a:defRPr>
-            </a:pPr>
-            <a:r>
-              <a:t>Land financiers first — verified receivables pull SME supply onto the rail.</a:t>
+              <a:defRPr sz="1100" b="0">
+                <a:solidFill>
+                  <a:srgbClr val="CBD5E1"/>
+                </a:solidFill>
+              </a:defRPr>
+            </a:pPr>
+            <a:r>
+              <a:t>Live Amoy tx: proof anchor + Smart LC release</a:t>
             </a:r>
           </a:p>
         </p:txBody>
@@ -10412,7 +11948,7 @@
               </a:defRPr>
             </a:pPr>
             <a:r>
-              <a:t>UNIT ECONOMICS &amp; ASK</a:t>
+              <a:t>COMPETITION &amp; MOAT</a:t>
             </a:r>
           </a:p>
         </p:txBody>
@@ -10447,7 +11983,7 @@
               </a:defRPr>
             </a:pPr>
             <a:r>
-              <a:t>Illustrative pilot model — tighten with live pilot quotes</a:t>
+              <a:t>Infrastructure wedge — not another hash-on-chain demo</a:t>
             </a:r>
           </a:p>
         </p:txBody>
@@ -10610,24 +12146,129 @@
       </p:sp>
       <p:sp>
         <p:nvSpPr>
-          <p:cNvPr id="8" name="Rounded Rectangle 7"/>
+          <p:cNvPr id="8" name="TextBox 7"/>
+          <p:cNvSpPr txBox="1"/>
+          <p:nvPr/>
+        </p:nvSpPr>
+        <p:spPr>
+          <a:xfrm>
+            <a:off x="777240" y="1828800"/>
+            <a:ext cx="2103120" cy="320040"/>
+          </a:xfrm>
+          <a:prstGeom prst="rect">
+            <a:avLst/>
+          </a:prstGeom>
+          <a:noFill/>
+        </p:spPr>
+        <p:txBody>
+          <a:bodyPr wrap="square">
+            <a:spAutoFit/>
+          </a:bodyPr>
+          <a:lstStyle/>
+          <a:p>
+            <a:pPr algn="l">
+              <a:defRPr sz="1100" b="1">
+                <a:solidFill>
+                  <a:srgbClr val="2563EB"/>
+                </a:solidFill>
+              </a:defRPr>
+            </a:pPr>
+            <a:r>
+              <a:t>Approach</a:t>
+            </a:r>
+          </a:p>
+        </p:txBody>
+      </p:sp>
+      <p:sp>
+        <p:nvSpPr>
+          <p:cNvPr id="9" name="TextBox 8"/>
+          <p:cNvSpPr txBox="1"/>
+          <p:nvPr/>
+        </p:nvSpPr>
+        <p:spPr>
+          <a:xfrm>
+            <a:off x="2926080" y="1828800"/>
+            <a:ext cx="4114800" cy="320040"/>
+          </a:xfrm>
+          <a:prstGeom prst="rect">
+            <a:avLst/>
+          </a:prstGeom>
+          <a:noFill/>
+        </p:spPr>
+        <p:txBody>
+          <a:bodyPr wrap="square">
+            <a:spAutoFit/>
+          </a:bodyPr>
+          <a:lstStyle/>
+          <a:p>
+            <a:pPr algn="l">
+              <a:defRPr sz="1100" b="1">
+                <a:solidFill>
+                  <a:srgbClr val="667085"/>
+                </a:solidFill>
+              </a:defRPr>
+            </a:pPr>
+            <a:r>
+              <a:t>Limitation</a:t>
+            </a:r>
+          </a:p>
+        </p:txBody>
+      </p:sp>
+      <p:sp>
+        <p:nvSpPr>
+          <p:cNvPr id="10" name="TextBox 9"/>
+          <p:cNvSpPr txBox="1"/>
+          <p:nvPr/>
+        </p:nvSpPr>
+        <p:spPr>
+          <a:xfrm>
+            <a:off x="7223760" y="1828800"/>
+            <a:ext cx="4114800" cy="320040"/>
+          </a:xfrm>
+          <a:prstGeom prst="rect">
+            <a:avLst/>
+          </a:prstGeom>
+          <a:noFill/>
+        </p:spPr>
+        <p:txBody>
+          <a:bodyPr wrap="square">
+            <a:spAutoFit/>
+          </a:bodyPr>
+          <a:lstStyle/>
+          <a:p>
+            <a:pPr algn="l">
+              <a:defRPr sz="1100" b="1">
+                <a:solidFill>
+                  <a:srgbClr val="2563EB"/>
+                </a:solidFill>
+              </a:defRPr>
+            </a:pPr>
+            <a:r>
+              <a:t>Credara edge</a:t>
+            </a:r>
+          </a:p>
+        </p:txBody>
+      </p:sp>
+      <p:sp>
+        <p:nvSpPr>
+          <p:cNvPr id="11" name="Rectangle 10"/>
           <p:cNvSpPr/>
           <p:nvPr/>
         </p:nvSpPr>
         <p:spPr>
           <a:xfrm>
-            <a:off x="822960" y="1920240"/>
-            <a:ext cx="2286000" cy="1005840"/>
-          </a:xfrm>
-          <a:prstGeom prst="roundRect">
+            <a:off x="640080" y="2240280"/>
+            <a:ext cx="10881360" cy="658368"/>
+          </a:xfrm>
+          <a:prstGeom prst="rect">
             <a:avLst/>
           </a:prstGeom>
           <a:solidFill>
-            <a:srgbClr val="F8FAFC"/>
+            <a:srgbClr val="FFFFFF"/>
           </a:solidFill>
           <a:ln>
             <a:solidFill>
-              <a:srgbClr val="E2E8F0"/>
+              <a:srgbClr val="E7EAF1"/>
             </a:solidFill>
           </a:ln>
         </p:spPr>
@@ -10655,14 +12296,14 @@
       </p:sp>
       <p:sp>
         <p:nvSpPr>
-          <p:cNvPr id="9" name="TextBox 8"/>
-          <p:cNvSpPr txBox="1"/>
-          <p:nvPr/>
-        </p:nvSpPr>
-        <p:spPr>
-          <a:xfrm>
-            <a:off x="960120" y="2029968"/>
-            <a:ext cx="2011680" cy="502920"/>
+          <p:cNvPr id="12" name="TextBox 11"/>
+          <p:cNvSpPr txBox="1"/>
+          <p:nvPr/>
+        </p:nvSpPr>
+        <p:spPr>
+          <a:xfrm>
+            <a:off x="777240" y="2368296"/>
+            <a:ext cx="2103120" cy="411480"/>
           </a:xfrm>
           <a:prstGeom prst="rect">
             <a:avLst/>
@@ -10676,28 +12317,28 @@
           <a:lstStyle/>
           <a:p>
             <a:pPr algn="l">
-              <a:defRPr sz="2200" b="1">
-                <a:solidFill>
-                  <a:srgbClr val="2563EB"/>
-                </a:solidFill>
-              </a:defRPr>
-            </a:pPr>
-            <a:r>
-              <a:t>0.5%</a:t>
-            </a:r>
-          </a:p>
-        </p:txBody>
-      </p:sp>
-      <p:sp>
-        <p:nvSpPr>
-          <p:cNvPr id="10" name="TextBox 9"/>
-          <p:cNvSpPr txBox="1"/>
-          <p:nvPr/>
-        </p:nvSpPr>
-        <p:spPr>
-          <a:xfrm>
-            <a:off x="960120" y="2487168"/>
-            <a:ext cx="2011680" cy="411480"/>
+              <a:defRPr sz="1300" b="1">
+                <a:solidFill>
+                  <a:srgbClr val="111827"/>
+                </a:solidFill>
+              </a:defRPr>
+            </a:pPr>
+            <a:r>
+              <a:t>Manual bank LCs</a:t>
+            </a:r>
+          </a:p>
+        </p:txBody>
+      </p:sp>
+      <p:sp>
+        <p:nvSpPr>
+          <p:cNvPr id="13" name="TextBox 12"/>
+          <p:cNvSpPr txBox="1"/>
+          <p:nvPr/>
+        </p:nvSpPr>
+        <p:spPr>
+          <a:xfrm>
+            <a:off x="2926080" y="2331720"/>
+            <a:ext cx="4114800" cy="502920"/>
           </a:xfrm>
           <a:prstGeom prst="rect">
             <a:avLst/>
@@ -10711,38 +12352,73 @@
           <a:lstStyle/>
           <a:p>
             <a:pPr algn="l">
-              <a:defRPr sz="1100" b="0">
+              <a:defRPr sz="1200" b="0">
                 <a:solidFill>
                   <a:srgbClr val="667085"/>
                 </a:solidFill>
               </a:defRPr>
             </a:pPr>
             <a:r>
-              <a:t>Platform fee (indicative)</a:t>
-            </a:r>
-          </a:p>
-        </p:txBody>
-      </p:sp>
-      <p:sp>
-        <p:nvSpPr>
-          <p:cNvPr id="11" name="Rounded Rectangle 10"/>
+              <a:t>7–10 days, paper-heavy, SME-unfriendly</a:t>
+            </a:r>
+          </a:p>
+        </p:txBody>
+      </p:sp>
+      <p:sp>
+        <p:nvSpPr>
+          <p:cNvPr id="14" name="TextBox 13"/>
+          <p:cNvSpPr txBox="1"/>
+          <p:nvPr/>
+        </p:nvSpPr>
+        <p:spPr>
+          <a:xfrm>
+            <a:off x="7223760" y="2331720"/>
+            <a:ext cx="4114800" cy="502920"/>
+          </a:xfrm>
+          <a:prstGeom prst="rect">
+            <a:avLst/>
+          </a:prstGeom>
+          <a:noFill/>
+        </p:spPr>
+        <p:txBody>
+          <a:bodyPr wrap="square">
+            <a:spAutoFit/>
+          </a:bodyPr>
+          <a:lstStyle/>
+          <a:p>
+            <a:pPr algn="l">
+              <a:defRPr sz="1200" b="0">
+                <a:solidFill>
+                  <a:srgbClr val="667085"/>
+                </a:solidFill>
+              </a:defRPr>
+            </a:pPr>
+            <a:r>
+              <a:t>Programmable escrow + verified delivery gate</a:t>
+            </a:r>
+          </a:p>
+        </p:txBody>
+      </p:sp>
+      <p:sp>
+        <p:nvSpPr>
+          <p:cNvPr id="15" name="Rectangle 14"/>
           <p:cNvSpPr/>
           <p:nvPr/>
         </p:nvSpPr>
         <p:spPr>
           <a:xfrm>
-            <a:off x="3246120" y="1920240"/>
-            <a:ext cx="2286000" cy="1005840"/>
-          </a:xfrm>
-          <a:prstGeom prst="roundRect">
+            <a:off x="640080" y="2953512"/>
+            <a:ext cx="10881360" cy="658368"/>
+          </a:xfrm>
+          <a:prstGeom prst="rect">
             <a:avLst/>
           </a:prstGeom>
           <a:solidFill>
-            <a:srgbClr val="F8FAFC"/>
+            <a:srgbClr val="FFFFFF"/>
           </a:solidFill>
           <a:ln>
             <a:solidFill>
-              <a:srgbClr val="E2E8F0"/>
+              <a:srgbClr val="E7EAF1"/>
             </a:solidFill>
           </a:ln>
         </p:spPr>
@@ -10770,14 +12446,14 @@
       </p:sp>
       <p:sp>
         <p:nvSpPr>
-          <p:cNvPr id="12" name="TextBox 11"/>
-          <p:cNvSpPr txBox="1"/>
-          <p:nvPr/>
-        </p:nvSpPr>
-        <p:spPr>
-          <a:xfrm>
-            <a:off x="3383280" y="2029968"/>
-            <a:ext cx="2011680" cy="502920"/>
+          <p:cNvPr id="16" name="TextBox 15"/>
+          <p:cNvSpPr txBox="1"/>
+          <p:nvPr/>
+        </p:nvSpPr>
+        <p:spPr>
+          <a:xfrm>
+            <a:off x="777240" y="3081528"/>
+            <a:ext cx="2103120" cy="411480"/>
           </a:xfrm>
           <a:prstGeom prst="rect">
             <a:avLst/>
@@ -10791,28 +12467,28 @@
           <a:lstStyle/>
           <a:p>
             <a:pPr algn="l">
-              <a:defRPr sz="2200" b="1">
-                <a:solidFill>
-                  <a:srgbClr val="2563EB"/>
-                </a:solidFill>
-              </a:defRPr>
-            </a:pPr>
-            <a:r>
-              <a:t>80%</a:t>
-            </a:r>
-          </a:p>
-        </p:txBody>
-      </p:sp>
-      <p:sp>
-        <p:nvSpPr>
-          <p:cNvPr id="13" name="TextBox 12"/>
-          <p:cNvSpPr txBox="1"/>
-          <p:nvPr/>
-        </p:nvSpPr>
-        <p:spPr>
-          <a:xfrm>
-            <a:off x="3383280" y="2487168"/>
-            <a:ext cx="2011680" cy="411480"/>
+              <a:defRPr sz="1300" b="1">
+                <a:solidFill>
+                  <a:srgbClr val="111827"/>
+                </a:solidFill>
+              </a:defRPr>
+            </a:pPr>
+            <a:r>
+              <a:t>Trade finance fintech</a:t>
+            </a:r>
+          </a:p>
+        </p:txBody>
+      </p:sp>
+      <p:sp>
+        <p:nvSpPr>
+          <p:cNvPr id="17" name="TextBox 16"/>
+          <p:cNvSpPr txBox="1"/>
+          <p:nvPr/>
+        </p:nvSpPr>
+        <p:spPr>
+          <a:xfrm>
+            <a:off x="2926080" y="3044952"/>
+            <a:ext cx="4114800" cy="502920"/>
           </a:xfrm>
           <a:prstGeom prst="rect">
             <a:avLst/>
@@ -10826,38 +12502,73 @@
           <a:lstStyle/>
           <a:p>
             <a:pPr algn="l">
-              <a:defRPr sz="1100" b="0">
+              <a:defRPr sz="1200" b="0">
                 <a:solidFill>
                   <a:srgbClr val="667085"/>
                 </a:solidFill>
               </a:defRPr>
             </a:pPr>
             <a:r>
-              <a:t>Advance rate (indicative)</a:t>
-            </a:r>
-          </a:p>
-        </p:txBody>
-      </p:sp>
-      <p:sp>
-        <p:nvSpPr>
-          <p:cNvPr id="14" name="Rounded Rectangle 13"/>
+              <a:t>Off-chain docs; lenders still blind to delivery</a:t>
+            </a:r>
+          </a:p>
+        </p:txBody>
+      </p:sp>
+      <p:sp>
+        <p:nvSpPr>
+          <p:cNvPr id="18" name="TextBox 17"/>
+          <p:cNvSpPr txBox="1"/>
+          <p:nvPr/>
+        </p:nvSpPr>
+        <p:spPr>
+          <a:xfrm>
+            <a:off x="7223760" y="3044952"/>
+            <a:ext cx="4114800" cy="502920"/>
+          </a:xfrm>
+          <a:prstGeom prst="rect">
+            <a:avLst/>
+          </a:prstGeom>
+          <a:noFill/>
+        </p:spPr>
+        <p:txBody>
+          <a:bodyPr wrap="square">
+            <a:spAutoFit/>
+          </a:bodyPr>
+          <a:lstStyle/>
+          <a:p>
+            <a:pPr algn="l">
+              <a:defRPr sz="1200" b="0">
+                <a:solidFill>
+                  <a:srgbClr val="667085"/>
+                </a:solidFill>
+              </a:defRPr>
+            </a:pPr>
+            <a:r>
+              <a:t>Buyer-confirmed receivable + on-chain anchor</a:t>
+            </a:r>
+          </a:p>
+        </p:txBody>
+      </p:sp>
+      <p:sp>
+        <p:nvSpPr>
+          <p:cNvPr id="19" name="Rectangle 18"/>
           <p:cNvSpPr/>
           <p:nvPr/>
         </p:nvSpPr>
         <p:spPr>
           <a:xfrm>
-            <a:off x="5669280" y="1920240"/>
-            <a:ext cx="2286000" cy="1005840"/>
-          </a:xfrm>
-          <a:prstGeom prst="roundRect">
+            <a:off x="640080" y="3666744"/>
+            <a:ext cx="10881360" cy="658368"/>
+          </a:xfrm>
+          <a:prstGeom prst="rect">
             <a:avLst/>
           </a:prstGeom>
           <a:solidFill>
-            <a:srgbClr val="F8FAFC"/>
+            <a:srgbClr val="EFF6FF"/>
           </a:solidFill>
           <a:ln>
             <a:solidFill>
-              <a:srgbClr val="E2E8F0"/>
+              <a:srgbClr val="E7EAF1"/>
             </a:solidFill>
           </a:ln>
         </p:spPr>
@@ -10885,14 +12596,14 @@
       </p:sp>
       <p:sp>
         <p:nvSpPr>
-          <p:cNvPr id="15" name="TextBox 14"/>
-          <p:cNvSpPr txBox="1"/>
-          <p:nvPr/>
-        </p:nvSpPr>
-        <p:spPr>
-          <a:xfrm>
-            <a:off x="5806440" y="2029968"/>
-            <a:ext cx="2011680" cy="502920"/>
+          <p:cNvPr id="20" name="TextBox 19"/>
+          <p:cNvSpPr txBox="1"/>
+          <p:nvPr/>
+        </p:nvSpPr>
+        <p:spPr>
+          <a:xfrm>
+            <a:off x="777240" y="3794760"/>
+            <a:ext cx="2103120" cy="411480"/>
           </a:xfrm>
           <a:prstGeom prst="rect">
             <a:avLst/>
@@ -10906,28 +12617,28 @@
           <a:lstStyle/>
           <a:p>
             <a:pPr algn="l">
-              <a:defRPr sz="2200" b="1">
+              <a:defRPr sz="1300" b="1">
                 <a:solidFill>
                   <a:srgbClr val="2563EB"/>
                 </a:solidFill>
               </a:defRPr>
             </a:pPr>
             <a:r>
-              <a:t>AED 1.25k</a:t>
-            </a:r>
-          </a:p>
-        </p:txBody>
-      </p:sp>
-      <p:sp>
-        <p:nvSpPr>
-          <p:cNvPr id="16" name="TextBox 15"/>
-          <p:cNvSpPr txBox="1"/>
-          <p:nvPr/>
-        </p:nvSpPr>
-        <p:spPr>
-          <a:xfrm>
-            <a:off x="5806440" y="2487168"/>
-            <a:ext cx="2011680" cy="411480"/>
+              <a:t>Generic RWA / trade chains</a:t>
+            </a:r>
+          </a:p>
+        </p:txBody>
+      </p:sp>
+      <p:sp>
+        <p:nvSpPr>
+          <p:cNvPr id="21" name="TextBox 20"/>
+          <p:cNvSpPr txBox="1"/>
+          <p:nvPr/>
+        </p:nvSpPr>
+        <p:spPr>
+          <a:xfrm>
+            <a:off x="2926080" y="3758184"/>
+            <a:ext cx="4114800" cy="502920"/>
           </a:xfrm>
           <a:prstGeom prst="rect">
             <a:avLst/>
@@ -10941,38 +12652,73 @@
           <a:lstStyle/>
           <a:p>
             <a:pPr algn="l">
-              <a:defRPr sz="1100" b="0">
+              <a:defRPr sz="1200" b="0">
                 <a:solidFill>
                   <a:srgbClr val="667085"/>
                 </a:solidFill>
               </a:defRPr>
             </a:pPr>
             <a:r>
-              <a:t>Fee on AED 250k invoice</a:t>
-            </a:r>
-          </a:p>
-        </p:txBody>
-      </p:sp>
-      <p:sp>
-        <p:nvSpPr>
-          <p:cNvPr id="17" name="Rounded Rectangle 16"/>
+              <a:t>Hash demos; simulated chain links</a:t>
+            </a:r>
+          </a:p>
+        </p:txBody>
+      </p:sp>
+      <p:sp>
+        <p:nvSpPr>
+          <p:cNvPr id="22" name="TextBox 21"/>
+          <p:cNvSpPr txBox="1"/>
+          <p:nvPr/>
+        </p:nvSpPr>
+        <p:spPr>
+          <a:xfrm>
+            <a:off x="7223760" y="3758184"/>
+            <a:ext cx="4114800" cy="502920"/>
+          </a:xfrm>
+          <a:prstGeom prst="rect">
+            <a:avLst/>
+          </a:prstGeom>
+          <a:noFill/>
+        </p:spPr>
+        <p:txBody>
+          <a:bodyPr wrap="square">
+            <a:spAutoFit/>
+          </a:bodyPr>
+          <a:lstStyle/>
+          <a:p>
+            <a:pPr algn="l">
+              <a:defRPr sz="1200" b="1">
+                <a:solidFill>
+                  <a:srgbClr val="111827"/>
+                </a:solidFill>
+              </a:defRPr>
+            </a:pPr>
+            <a:r>
+              <a:t>Fail-closed product · live Amoy · four-role workspaces</a:t>
+            </a:r>
+          </a:p>
+        </p:txBody>
+      </p:sp>
+      <p:sp>
+        <p:nvSpPr>
+          <p:cNvPr id="23" name="Rectangle 22"/>
           <p:cNvSpPr/>
           <p:nvPr/>
         </p:nvSpPr>
         <p:spPr>
           <a:xfrm>
-            <a:off x="8092440" y="1920240"/>
-            <a:ext cx="2560320" cy="1005840"/>
-          </a:xfrm>
-          <a:prstGeom prst="roundRect">
+            <a:off x="640080" y="4379976"/>
+            <a:ext cx="10881360" cy="658368"/>
+          </a:xfrm>
+          <a:prstGeom prst="rect">
             <a:avLst/>
           </a:prstGeom>
           <a:solidFill>
-            <a:srgbClr val="F8FAFC"/>
+            <a:srgbClr val="FFFFFF"/>
           </a:solidFill>
           <a:ln>
             <a:solidFill>
-              <a:srgbClr val="E2E8F0"/>
+              <a:srgbClr val="E7EAF1"/>
             </a:solidFill>
           </a:ln>
         </p:spPr>
@@ -11000,14 +12746,14 @@
       </p:sp>
       <p:sp>
         <p:nvSpPr>
-          <p:cNvPr id="18" name="TextBox 17"/>
-          <p:cNvSpPr txBox="1"/>
-          <p:nvPr/>
-        </p:nvSpPr>
-        <p:spPr>
-          <a:xfrm>
-            <a:off x="8229600" y="2029968"/>
-            <a:ext cx="2286000" cy="502920"/>
+          <p:cNvPr id="24" name="TextBox 23"/>
+          <p:cNvSpPr txBox="1"/>
+          <p:nvPr/>
+        </p:nvSpPr>
+        <p:spPr>
+          <a:xfrm>
+            <a:off x="777240" y="4507992"/>
+            <a:ext cx="2103120" cy="411480"/>
           </a:xfrm>
           <a:prstGeom prst="rect">
             <a:avLst/>
@@ -11021,28 +12767,28 @@
           <a:lstStyle/>
           <a:p>
             <a:pPr algn="l">
-              <a:defRPr sz="2200" b="1">
-                <a:solidFill>
-                  <a:srgbClr val="2563EB"/>
-                </a:solidFill>
-              </a:defRPr>
-            </a:pPr>
-            <a:r>
-              <a:t>$15M</a:t>
-            </a:r>
-          </a:p>
-        </p:txBody>
-      </p:sp>
-      <p:sp>
-        <p:nvSpPr>
-          <p:cNvPr id="19" name="TextBox 18"/>
-          <p:cNvSpPr txBox="1"/>
-          <p:nvPr/>
-        </p:nvSpPr>
-        <p:spPr>
-          <a:xfrm>
-            <a:off x="8229600" y="2487168"/>
-            <a:ext cx="2286000" cy="411480"/>
+              <a:defRPr sz="1300" b="1">
+                <a:solidFill>
+                  <a:srgbClr val="111827"/>
+                </a:solidFill>
+              </a:defRPr>
+            </a:pPr>
+            <a:r>
+              <a:t>Remittance / POS apps</a:t>
+            </a:r>
+          </a:p>
+        </p:txBody>
+      </p:sp>
+      <p:sp>
+        <p:nvSpPr>
+          <p:cNvPr id="25" name="TextBox 24"/>
+          <p:cNvSpPr txBox="1"/>
+          <p:nvPr/>
+        </p:nvSpPr>
+        <p:spPr>
+          <a:xfrm>
+            <a:off x="2926080" y="4471416"/>
+            <a:ext cx="4114800" cy="502920"/>
           </a:xfrm>
           <a:prstGeom prst="rect">
             <a:avLst/>
@@ -11056,293 +12802,84 @@
           <a:lstStyle/>
           <a:p>
             <a:pPr algn="l">
-              <a:defRPr sz="1100" b="0">
+              <a:defRPr sz="1200" b="0">
                 <a:solidFill>
                   <a:srgbClr val="667085"/>
                 </a:solidFill>
               </a:defRPr>
             </a:pPr>
             <a:r>
-              <a:t>Pilot receivables pipe (Y1 target)</a:t>
-            </a:r>
-          </a:p>
-        </p:txBody>
-      </p:sp>
-      <p:sp>
-        <p:nvSpPr>
-          <p:cNvPr id="20" name="TextBox 19"/>
-          <p:cNvSpPr txBox="1"/>
-          <p:nvPr/>
-        </p:nvSpPr>
-        <p:spPr>
-          <a:xfrm>
-            <a:off x="822960" y="3154680"/>
-            <a:ext cx="5669280" cy="2926080"/>
-          </a:xfrm>
-          <a:prstGeom prst="rect">
-            <a:avLst/>
-          </a:prstGeom>
-          <a:noFill/>
-        </p:spPr>
-        <p:txBody>
-          <a:bodyPr wrap="square">
-            <a:spAutoFit/>
-          </a:bodyPr>
-          <a:lstStyle/>
-          <a:p>
-            <a:pPr>
-              <a:spcAft>
-                <a:spcPts val="603"/>
-              </a:spcAft>
-              <a:defRPr sz="1500">
+              <a:t>Consumer wedge; not receivables finance</a:t>
+            </a:r>
+          </a:p>
+        </p:txBody>
+      </p:sp>
+      <p:sp>
+        <p:nvSpPr>
+          <p:cNvPr id="26" name="TextBox 25"/>
+          <p:cNvSpPr txBox="1"/>
+          <p:nvPr/>
+        </p:nvSpPr>
+        <p:spPr>
+          <a:xfrm>
+            <a:off x="7223760" y="4471416"/>
+            <a:ext cx="4114800" cy="502920"/>
+          </a:xfrm>
+          <a:prstGeom prst="rect">
+            <a:avLst/>
+          </a:prstGeom>
+          <a:noFill/>
+        </p:spPr>
+        <p:txBody>
+          <a:bodyPr wrap="square">
+            <a:spAutoFit/>
+          </a:bodyPr>
+          <a:lstStyle/>
+          <a:p>
+            <a:pPr algn="l">
+              <a:defRPr sz="1200" b="0">
+                <a:solidFill>
+                  <a:srgbClr val="667085"/>
+                </a:solidFill>
+              </a:defRPr>
+            </a:pPr>
+            <a:r>
+              <a:t>B2B settlement slice of UAE corridor</a:t>
+            </a:r>
+          </a:p>
+        </p:txBody>
+      </p:sp>
+      <p:sp>
+        <p:nvSpPr>
+          <p:cNvPr id="27" name="TextBox 26"/>
+          <p:cNvSpPr txBox="1"/>
+          <p:nvPr/>
+        </p:nvSpPr>
+        <p:spPr>
+          <a:xfrm>
+            <a:off x="822960" y="5806440"/>
+            <a:ext cx="10515600" cy="411480"/>
+          </a:xfrm>
+          <a:prstGeom prst="rect">
+            <a:avLst/>
+          </a:prstGeom>
+          <a:noFill/>
+        </p:spPr>
+        <p:txBody>
+          <a:bodyPr wrap="square">
+            <a:spAutoFit/>
+          </a:bodyPr>
+          <a:lstStyle/>
+          <a:p>
+            <a:pPr algn="l">
+              <a:defRPr sz="1300" b="1">
                 <a:solidFill>
                   <a:srgbClr val="111827"/>
                 </a:solidFill>
               </a:defRPr>
             </a:pPr>
             <a:r>
-              <a:t>Pilot cohort: 3 financiers + 50 UAE SMEs (Jebel Ali supply chains)</a:t>
-            </a:r>
-          </a:p>
-          <a:p>
-            <a:pPr>
-              <a:spcAft>
-                <a:spcPts val="603"/>
-              </a:spcAft>
-              <a:defRPr sz="1500">
-                <a:solidFill>
-                  <a:srgbClr val="111827"/>
-                </a:solidFill>
-              </a:defRPr>
-            </a:pPr>
-            <a:r>
-              <a:t>Revenue scales with financed volume, not headcount</a:t>
-            </a:r>
-          </a:p>
-          <a:p>
-            <a:pPr>
-              <a:spcAft>
-                <a:spcPts val="603"/>
-              </a:spcAft>
-              <a:defRPr sz="1500">
-                <a:solidFill>
-                  <a:srgbClr val="111827"/>
-                </a:solidFill>
-              </a:defRPr>
-            </a:pPr>
-            <a:r>
-              <a:t>API-first: third parties integrate rails without Credara UI</a:t>
-            </a:r>
-          </a:p>
-          <a:p>
-            <a:pPr>
-              <a:spcAft>
-                <a:spcPts val="603"/>
-              </a:spcAft>
-              <a:defRPr sz="1500">
-                <a:solidFill>
-                  <a:srgbClr val="111827"/>
-                </a:solidFill>
-              </a:defRPr>
-            </a:pPr>
-            <a:r>
-              <a:t>Path to $1M ARR: ~$200M annual financed volume at ~50 bps blended take</a:t>
-            </a:r>
-          </a:p>
-        </p:txBody>
-      </p:sp>
-      <p:sp>
-        <p:nvSpPr>
-          <p:cNvPr id="21" name="Rounded Rectangle 20"/>
-          <p:cNvSpPr/>
-          <p:nvPr/>
-        </p:nvSpPr>
-        <p:spPr>
-          <a:xfrm>
-            <a:off x="6766560" y="3063240"/>
-            <a:ext cx="4754880" cy="2606040"/>
-          </a:xfrm>
-          <a:prstGeom prst="roundRect">
-            <a:avLst/>
-          </a:prstGeom>
-          <a:solidFill>
-            <a:srgbClr val="07142F"/>
-          </a:solidFill>
-          <a:ln>
-            <a:noFill/>
-          </a:ln>
-        </p:spPr>
-        <p:style>
-          <a:lnRef idx="1">
-            <a:schemeClr val="accent1"/>
-          </a:lnRef>
-          <a:fillRef idx="3">
-            <a:schemeClr val="accent1"/>
-          </a:fillRef>
-          <a:effectRef idx="2">
-            <a:schemeClr val="accent1"/>
-          </a:effectRef>
-          <a:fontRef idx="minor">
-            <a:schemeClr val="lt1"/>
-          </a:fontRef>
-        </p:style>
-        <p:txBody>
-          <a:bodyPr rtlCol="0" anchor="ctr"/>
-          <a:lstStyle/>
-          <a:p>
-            <a:pPr algn="ctr"/>
-          </a:p>
-        </p:txBody>
-      </p:sp>
-      <p:sp>
-        <p:nvSpPr>
-          <p:cNvPr id="22" name="TextBox 21"/>
-          <p:cNvSpPr txBox="1"/>
-          <p:nvPr/>
-        </p:nvSpPr>
-        <p:spPr>
-          <a:xfrm>
-            <a:off x="6949440" y="3246120"/>
-            <a:ext cx="4389120" cy="365760"/>
-          </a:xfrm>
-          <a:prstGeom prst="rect">
-            <a:avLst/>
-          </a:prstGeom>
-          <a:noFill/>
-        </p:spPr>
-        <p:txBody>
-          <a:bodyPr wrap="square">
-            <a:spAutoFit/>
-          </a:bodyPr>
-          <a:lstStyle/>
-          <a:p>
-            <a:pPr algn="l">
-              <a:defRPr sz="1200" b="1">
-                <a:solidFill>
-                  <a:srgbClr val="94A3B8"/>
-                </a:solidFill>
-              </a:defRPr>
-            </a:pPr>
-            <a:r>
-              <a:t>Raising (illustrative)</a:t>
-            </a:r>
-          </a:p>
-        </p:txBody>
-      </p:sp>
-      <p:sp>
-        <p:nvSpPr>
-          <p:cNvPr id="23" name="TextBox 22"/>
-          <p:cNvSpPr txBox="1"/>
-          <p:nvPr/>
-        </p:nvSpPr>
-        <p:spPr>
-          <a:xfrm>
-            <a:off x="6949440" y="3611880"/>
-            <a:ext cx="4389120" cy="502920"/>
-          </a:xfrm>
-          <a:prstGeom prst="rect">
-            <a:avLst/>
-          </a:prstGeom>
-          <a:noFill/>
-        </p:spPr>
-        <p:txBody>
-          <a:bodyPr wrap="square">
-            <a:spAutoFit/>
-          </a:bodyPr>
-          <a:lstStyle/>
-          <a:p>
-            <a:pPr algn="l">
-              <a:defRPr sz="2800" b="1">
-                <a:solidFill>
-                  <a:srgbClr val="FFFFFF"/>
-                </a:solidFill>
-              </a:defRPr>
-            </a:pPr>
-            <a:r>
-              <a:t>$500K pre-seed</a:t>
-            </a:r>
-          </a:p>
-        </p:txBody>
-      </p:sp>
-      <p:sp>
-        <p:nvSpPr>
-          <p:cNvPr id="24" name="TextBox 23"/>
-          <p:cNvSpPr txBox="1"/>
-          <p:nvPr/>
-        </p:nvSpPr>
-        <p:spPr>
-          <a:xfrm>
-            <a:off x="6949440" y="4251960"/>
-            <a:ext cx="4389120" cy="2194560"/>
-          </a:xfrm>
-          <a:prstGeom prst="rect">
-            <a:avLst/>
-          </a:prstGeom>
-          <a:noFill/>
-        </p:spPr>
-        <p:txBody>
-          <a:bodyPr wrap="square">
-            <a:spAutoFit/>
-          </a:bodyPr>
-          <a:lstStyle/>
-          <a:p>
-            <a:pPr>
-              <a:spcAft>
-                <a:spcPts val="523"/>
-              </a:spcAft>
-              <a:defRPr sz="1300">
-                <a:solidFill>
-                  <a:srgbClr val="CBD5E1"/>
-                </a:solidFill>
-              </a:defRPr>
-            </a:pPr>
-            <a:r>
-              <a:t>UAE 3-financier pilot + GTM hire</a:t>
-            </a:r>
-          </a:p>
-          <a:p>
-            <a:pPr>
-              <a:spcAft>
-                <a:spcPts val="523"/>
-              </a:spcAft>
-              <a:defRPr sz="1300">
-                <a:solidFill>
-                  <a:srgbClr val="CBD5E1"/>
-                </a:solidFill>
-              </a:defRPr>
-            </a:pPr>
-            <a:r>
-              <a:t>Didit KYB production + Solidity audit</a:t>
-            </a:r>
-          </a:p>
-          <a:p>
-            <a:pPr>
-              <a:spcAft>
-                <a:spcPts val="523"/>
-              </a:spcAft>
-              <a:defRPr sz="1300">
-                <a:solidFill>
-                  <a:srgbClr val="CBD5E1"/>
-                </a:solidFill>
-              </a:defRPr>
-            </a:pPr>
-            <a:r>
-              <a:t>AED stablecoin issuer partnership</a:t>
-            </a:r>
-          </a:p>
-          <a:p>
-            <a:pPr>
-              <a:spcAft>
-                <a:spcPts val="523"/>
-              </a:spcAft>
-              <a:defRPr sz="1300">
-                <a:solidFill>
-                  <a:srgbClr val="CBD5E1"/>
-                </a:solidFill>
-              </a:defRPr>
-            </a:pPr>
-            <a:r>
-              <a:t>18-mo: mainnet + API ecosystem</a:t>
+              <a:t>Moat compounds: corridor data + financier network + token-agnostic escrow + evidence governance IP</a:t>
             </a:r>
           </a:p>
         </p:txBody>
